--- a/Final-Project-STI-Kel5-Presentation.pptx
+++ b/Final-Project-STI-Kel5-Presentation.pptx
@@ -3267,7 +3267,7 @@
         <p:spPr>
           <a:xfrm>
             <a:off x="1783080" y="3950208"/>
-            <a:ext cx="8229600" cy="365760"/>
+            <a:ext cx="8778240" cy="365760"/>
           </a:xfrm>
           <a:prstGeom prst="rect">
             <a:avLst/>
@@ -3298,7 +3298,7 @@
                 </a:solidFill>
                 <a:latin typeface="Segoe UI Semibold"/>
               </a:rPr>
-              <a:t>Analisis &amp; Monitoring Data dengan Pendekatan CRISP-DM</a:t>
+              <a:t>Analisis Data &amp; Dashboard Pemantauan dengan Pendekatan CRISP-DM</a:t>
             </a:r>
           </a:p>
         </p:txBody>
@@ -3787,7 +3787,7 @@
                 </a:solidFill>
                 <a:latin typeface="Segoe UI Black"/>
               </a:rPr>
-              <a:t>BUSINESS QUESTIONS</a:t>
+              <a:t>PERTANYAAN BISNIS</a:t>
             </a:r>
           </a:p>
         </p:txBody>
@@ -3931,7 +3931,7 @@
                 </a:solidFill>
                 <a:latin typeface="Segoe UI"/>
               </a:rPr>
-              <a:t> ingin memahami kinerja penjualannya selama ~3,5 tahun (data agregat mingguan, anonim) untuk mendukung keputusan stok, promo, dan target.</a:t>
+              <a:t> ingin memahami kinerja penjualannya selama kurang lebih 3,5 tahun (data agregat mingguan dan anonim) sebagai dasar keputusan stok, promo, dan target penjualan.</a:t>
             </a:r>
           </a:p>
         </p:txBody>
@@ -4089,7 +4089,7 @@
                 </a:solidFill>
                 <a:latin typeface="Segoe UI"/>
               </a:rPr>
-              <a:t>Bagaimana tren revenue, transaksi, dan pelanggan dari waktu ke waktu?</a:t>
+              <a:t>Bagaimana arah tren revenue, transaksi, dan jumlah pelanggan dari waktu ke waktu?</a:t>
             </a:r>
           </a:p>
         </p:txBody>
@@ -4247,7 +4247,7 @@
                 </a:solidFill>
                 <a:latin typeface="Segoe UI"/>
               </a:rPr>
-              <a:t>Pertumbuhan ditarik oleh volume transaksi atau nilai per transaksi (AOV)?</a:t>
+              <a:t>Pertumbuhan lebih ditarik oleh volume transaksi atau nilai per transaksi (AOV)?</a:t>
             </a:r>
           </a:p>
         </p:txBody>
@@ -4405,7 +4405,7 @@
                 </a:solidFill>
                 <a:latin typeface="Segoe UI"/>
               </a:rPr>
-              <a:t>Adakah bulan ramai/sepi untuk perencanaan stok &amp; campaign?</a:t>
+              <a:t>Adakah bulan ramai dan sepi yang bisa dipakai merencanakan stok dan campaign?</a:t>
             </a:r>
           </a:p>
         </p:txBody>
@@ -4563,7 +4563,7 @@
                 </a:solidFill>
                 <a:latin typeface="Segoe UI"/>
               </a:rPr>
-              <a:t>Seberapa efektif strategi diskon terhadap revenue?</a:t>
+              <a:t>Seberapa besar pengaruh strategi diskon terhadap revenue?</a:t>
             </a:r>
           </a:p>
         </p:txBody>
@@ -5004,7 +5004,7 @@
                 </a:solidFill>
                 <a:latin typeface="Segoe UI"/>
               </a:rPr>
-              <a:t>Scorecard KPI: revenue, transaksi, AOV, rata-rata diskon.</a:t>
+              <a:t>Scorecard KPI: revenue, transaksi, AOV, dan rata-rata diskon.</a:t>
             </a:r>
           </a:p>
           <a:p>
@@ -5032,7 +5032,7 @@
                 </a:solidFill>
                 <a:latin typeface="Segoe UI"/>
               </a:rPr>
-              <a:t>Tren revenue mingguan + rata-rata 4 minggu (range slider, dropdown tahun).</a:t>
+              <a:t>Tren revenue mingguan beserta rata-rata 4 minggu (range slider dan dropdown tahun).</a:t>
             </a:r>
           </a:p>
           <a:p>
@@ -5060,7 +5060,7 @@
                 </a:solidFill>
                 <a:latin typeface="Segoe UI"/>
               </a:rPr>
-              <a:t>Revenue per tahun &amp; pola musiman per bulan.</a:t>
+              <a:t>Revenue per tahun dan pola musiman per bulan.</a:t>
             </a:r>
           </a:p>
           <a:p>
@@ -5088,7 +5088,7 @@
                 </a:solidFill>
                 <a:latin typeface="Segoe UI"/>
               </a:rPr>
-              <a:t>AOV per tahun &amp; scatter diskon vs revenue.</a:t>
+              <a:t>AOV per tahun dan scatter diskon terhadap revenue.</a:t>
             </a:r>
           </a:p>
         </p:txBody>
@@ -5142,7 +5142,7 @@
                 </a:solidFill>
                 <a:latin typeface="Segoe UI"/>
               </a:rPr>
-              <a:t>hover, zoom, filter tahun, langsung di notebook.</a:t>
+              <a:t>hover, zoom, dan filter per tahun, langsung di dalam notebook.</a:t>
             </a:r>
           </a:p>
         </p:txBody>
@@ -6329,7 +6329,7 @@
                 </a:solidFill>
                 <a:latin typeface="Segoe UI"/>
               </a:rPr>
-              <a:t>Revenue tahunan naik ~5× dalam dua tahun (2023 → 2025).</a:t>
+              <a:t>Revenue tahunan tumbuh sekitar 5 kali lipat dalam dua tahun (2023 → 2025).</a:t>
             </a:r>
           </a:p>
           <a:p>
@@ -6357,7 +6357,7 @@
                 </a:solidFill>
                 <a:latin typeface="Segoe UI"/>
               </a:rPr>
-              <a:t>Pendorong = nilai (AOV naik tajam), bukan sekadar jumlah transaksi.</a:t>
+              <a:t>Pendorong utamanya adalah kenaikan nilai per transaksi (AOV), bukan semata jumlah transaksi.</a:t>
             </a:r>
           </a:p>
           <a:p>
@@ -6385,7 +6385,7 @@
                 </a:solidFill>
                 <a:latin typeface="Segoe UI"/>
               </a:rPr>
-              <a:t>Diskon belum efektif: rata-rata ~36% namun korelasi diskon-revenue ~0 → indikasi over-discounting.</a:t>
+              <a:t>Diskon belum efektif: rata-rata mencapai ~36%, tetapi korelasinya terhadap revenue mendekati nol, mengindikasikan over-discounting.</a:t>
             </a:r>
           </a:p>
         </p:txBody>
@@ -6529,7 +6529,7 @@
                 </a:solidFill>
                 <a:latin typeface="Segoe UI"/>
               </a:rPr>
-              <a:t>Pertahankan momentum AOV via bundling/upsell (keranjang masih 1,3 item).</a:t>
+              <a:t>Jaga momentum AOV lewat bundling dan upsell, mengingat keranjang masih sekitar 1,3 item.</a:t>
             </a:r>
           </a:p>
           <a:p>
@@ -6557,7 +6557,7 @@
                 </a:solidFill>
                 <a:latin typeface="Segoe UI"/>
               </a:rPr>
-              <a:t>Evaluasi strategi diskon: uji kurangi diskon, ukur dampak ke revenue.</a:t>
+              <a:t>Evaluasi strategi diskon dengan menguji pengurangan diskon dan mengukur dampaknya terhadap revenue.</a:t>
             </a:r>
           </a:p>
           <a:p>
@@ -6585,7 +6585,7 @@
                 </a:solidFill>
                 <a:latin typeface="Segoe UI"/>
               </a:rPr>
-              <a:t>Manfaatkan puncak musiman (Jun–Jul, Jan) untuk stok &amp; promo.</a:t>
+              <a:t>Manfaatkan puncak musiman (Juni–Juli dan Januari) untuk perencanaan stok dan promo.</a:t>
             </a:r>
           </a:p>
           <a:p>
@@ -6613,7 +6613,7 @@
                 </a:solidFill>
                 <a:latin typeface="Segoe UI"/>
               </a:rPr>
-              <a:t>Dorong akuisisi/retensi pelanggan (jumlah pelanggan relatif stagnan).</a:t>
+              <a:t>Dorong akuisisi dan retensi pelanggan karena jumlahnya cenderung stagnan.</a:t>
             </a:r>
           </a:p>
         </p:txBody>
@@ -6930,7 +6930,7 @@
                 </a:solidFill>
                 <a:latin typeface="Segoe UI"/>
               </a:rPr>
-              <a:t>Pendekatan CRISP-DM berhasil mengubah dua dataset mentah menjadi artefak pemantauan yang menjawab pertanyaan bisnis nyata.</a:t>
+              <a:t>Pendekatan CRISP-DM berhasil mengubah dua dataset mentah menjadi dashboard pemantauan yang menjawab pertanyaan bisnis nyata.</a:t>
             </a:r>
           </a:p>
           <a:p>
@@ -6958,7 +6958,7 @@
                 </a:solidFill>
                 <a:latin typeface="Segoe UI"/>
               </a:rPr>
-              <a:t>Inventory CGS-1: aset siap (~94% aktif), namun gap data kalibrasi menjadi prioritas tindak lanjut keselamatan &amp; kepatuhan.</a:t>
+              <a:t>Inventory CGS-1: ketersediaan aset tergolong baik (~94% aktif), tetapi gap data kalibrasi perlu segera ditindaklanjuti demi keselamatan dan kepatuhan.</a:t>
             </a:r>
           </a:p>
           <a:p>
@@ -6986,7 +6986,7 @@
                 </a:solidFill>
                 <a:latin typeface="Segoe UI"/>
               </a:rPr>
-              <a:t>Penjualan ritel: pertumbuhan kuat (~5×) ditarik kenaikan AOV; strategi diskon perlu dievaluasi (indikasi over-discounting).</a:t>
+              <a:t>Penjualan ritel: pertumbuhan kuat (~5×) ditopang kenaikan AOV, sementara strategi diskon perlu dievaluasi karena terindikasi over-discounting.</a:t>
             </a:r>
           </a:p>
           <a:p>
@@ -7014,7 +7014,7 @@
                 </a:solidFill>
                 <a:latin typeface="Segoe UI"/>
               </a:rPr>
-              <a:t>Manajemen proyek via GitHub Projects menjaga pekerjaan kelompok transparan, terbagi, dan terlacak (12 selesai · 2 berjalan · 2 antre).</a:t>
+              <a:t>Manajemen proyek lewat GitHub Projects menjaga pekerjaan kelompok tetap transparan, terbagi rapi, dan terlacak (12 selesai, 2 berjalan, 2 antre).</a:t>
             </a:r>
           </a:p>
           <a:p>
@@ -7042,7 +7042,7 @@
                 </a:solidFill>
                 <a:latin typeface="Segoe UI"/>
               </a:rPr>
-              <a:t>Tindak lanjut terbuka: bersihkan outlier data penjualan dan finalisasi dashboard Looker Studio inventory.</a:t>
+              <a:t>Langkah berikutnya: membersihkan outlier pada data penjualan dan menuntaskan dashboard Looker Studio untuk inventory.</a:t>
             </a:r>
           </a:p>
         </p:txBody>
@@ -7696,7 +7696,7 @@
                 </a:solidFill>
                 <a:latin typeface="Segoe UI"/>
               </a:rPr>
-              <a:t>Konteks dua studi kasus dan business questions</a:t>
+              <a:t>Konteks dua studi kasus dan pertanyaan bisnis yang ingin dijawab</a:t>
             </a:r>
           </a:p>
         </p:txBody>
@@ -7854,7 +7854,7 @@
                 </a:solidFill>
                 <a:latin typeface="Segoe UI"/>
               </a:rPr>
-              <a:t>Kerangka kerja pengolahan data end-to-end</a:t>
+              <a:t>Kerangka kerja pengolahan data dari awal hingga akhir</a:t>
             </a:r>
           </a:p>
         </p:txBody>
@@ -8012,7 +8012,7 @@
                 </a:solidFill>
                 <a:latin typeface="Segoe UI"/>
               </a:rPr>
-              <a:t>Pelacakan pekerjaan via GitHub Projects (kanban)</a:t>
+              <a:t>Pelacakan pekerjaan kelompok lewat GitHub Projects</a:t>
             </a:r>
           </a:p>
         </p:txBody>
@@ -8170,7 +8170,7 @@
                 </a:solidFill>
                 <a:latin typeface="Segoe UI"/>
               </a:rPr>
-              <a:t>Monitoring kesiapan &amp; kalibrasi instrumen</a:t>
+              <a:t>Pemantauan kesiapan dan kalibrasi instrumen</a:t>
             </a:r>
           </a:p>
         </p:txBody>
@@ -8328,7 +8328,7 @@
                 </a:solidFill>
                 <a:latin typeface="Segoe UI"/>
               </a:rPr>
-              <a:t>Tren, pendorong revenue, musiman, diskon</a:t>
+              <a:t>Tren, pendorong revenue, musiman, dan diskon</a:t>
             </a:r>
           </a:p>
         </p:txBody>
@@ -8486,7 +8486,7 @@
                 </a:solidFill>
                 <a:latin typeface="Segoe UI"/>
               </a:rPr>
-              <a:t>Temuan utama dan tindak lanjut</a:t>
+              <a:t>Temuan utama dan langkah tindak lanjut</a:t>
             </a:r>
           </a:p>
         </p:txBody>
@@ -8806,7 +8806,7 @@
                 </a:solidFill>
                 <a:latin typeface="Segoe UI"/>
               </a:rPr>
-              <a:t>Tim mengangkat </a:t>
+              <a:t>Kelompok mengambil </a:t>
             </a:r>
             <a:r>
               <a:rPr sz="1400" b="1">
@@ -8815,7 +8815,7 @@
                 </a:solidFill>
                 <a:latin typeface="Segoe UI Semibold"/>
               </a:rPr>
-              <a:t>dua studi kasus pengolahan data nyata</a:t>
+              <a:t>dua studi kasus nyata</a:t>
             </a:r>
             <a:r>
               <a:rPr sz="1400" b="0">
@@ -8824,7 +8824,7 @@
                 </a:solidFill>
                 <a:latin typeface="Segoe UI"/>
               </a:rPr>
-              <a:t> dari lingkungan kerja anggota, lalu mengolahnya secara terstruktur (CRISP-DM) hingga menjadi dashboard pemantauan.</a:t>
+              <a:t> dari lingkungan kerja anggota, lalu mengolah datanya secara terstruktur mengikuti CRISP-DM hingga menghasilkan dashboard pemantauan.</a:t>
             </a:r>
           </a:p>
         </p:txBody>
@@ -9057,7 +9057,7 @@
                 </a:solidFill>
                 <a:latin typeface="Segoe UI"/>
               </a:rPr>
-              <a:t>Monitoring kesiapan instrumen lapangan (transmitter, valve, actuator) pada Custody Gas Station.</a:t>
+              <a:t>Memantau kesiapan instrumen lapangan (transmitter, valve, actuator) di Custody Gas Station (CGS-1).</a:t>
             </a:r>
           </a:p>
           <a:p>
@@ -9085,7 +9085,7 @@
                 </a:solidFill>
                 <a:latin typeface="Segoe UI"/>
               </a:rPr>
-              <a:t>Fokus: status aset, ketergantungan vendor, dan gap data kalibrasi (keselamatan &amp; kepatuhan).</a:t>
+              <a:t>Menyoroti status aset, ketergantungan vendor, dan kelengkapan data kalibrasi yang menyangkut keselamatan serta kepatuhan.</a:t>
             </a:r>
           </a:p>
           <a:p>
@@ -9113,7 +9113,7 @@
                 </a:solidFill>
                 <a:latin typeface="Segoe UI"/>
               </a:rPr>
-              <a:t>Output: dashboard Looker Studio.</a:t>
+              <a:t>Hasil akhir disajikan sebagai dashboard Looker Studio.</a:t>
             </a:r>
           </a:p>
         </p:txBody>
@@ -9346,7 +9346,7 @@
                 </a:solidFill>
                 <a:latin typeface="Segoe UI"/>
               </a:rPr>
-              <a:t>Data penjualan B2C agregat mingguan, 2022–2026 (~3,5 tahun).</a:t>
+              <a:t>Data penjualan B2C agregat mingguan sepanjang 2022–2026 (sekitar 3,5 tahun).</a:t>
             </a:r>
           </a:p>
           <a:p>
@@ -9374,7 +9374,7 @@
                 </a:solidFill>
                 <a:latin typeface="Segoe UI"/>
               </a:rPr>
-              <a:t>Fokus: tren &amp; pertumbuhan, pendorong revenue, pola musiman, efektivitas diskon.</a:t>
+              <a:t>Menelusuri tren pertumbuhan, pendorong revenue, pola musiman, dan efektivitas diskon.</a:t>
             </a:r>
           </a:p>
           <a:p>
@@ -9402,7 +9402,7 @@
                 </a:solidFill>
                 <a:latin typeface="Segoe UI"/>
               </a:rPr>
-              <a:t>Output: dashboard interaktif Plotly.</a:t>
+              <a:t>Hasil akhir disajikan sebagai dashboard interaktif Plotly.</a:t>
             </a:r>
           </a:p>
         </p:txBody>
@@ -9722,7 +9722,7 @@
                 </a:solidFill>
                 <a:latin typeface="Segoe UI"/>
               </a:rPr>
-              <a:t>Setiap studi kasus mengikuti enam fase CRISP-DM berurutan, dari pemahaman bisnis hingga deployment dashboard.</a:t>
+              <a:t>Kedua studi kasus dikerjakan melalui enam fase CRISP-DM secara berurutan, mulai dari pemahaman bisnis hingga penyajian dashboard.</a:t>
             </a:r>
           </a:p>
         </p:txBody>
@@ -9973,7 +9973,7 @@
                 </a:solidFill>
                 <a:latin typeface="Segoe UI"/>
               </a:rPr>
-              <a:t>Tujuan &amp; business questions</a:t>
+              <a:t>Tujuan &amp; pertanyaan bisnis</a:t>
             </a:r>
           </a:p>
         </p:txBody>
@@ -10268,7 +10268,7 @@
                 </a:solidFill>
                 <a:latin typeface="Segoe UI"/>
               </a:rPr>
-              <a:t>Load data, profil kualitas</a:t>
+              <a:t>Memuat data, menilai kualitas</a:t>
             </a:r>
           </a:p>
         </p:txBody>
@@ -10563,7 +10563,7 @@
                 </a:solidFill>
                 <a:latin typeface="Segoe UI"/>
               </a:rPr>
-              <a:t>Cleaning, kolom turunan</a:t>
+              <a:t>Pembersihan &amp; kolom turunan</a:t>
             </a:r>
           </a:p>
         </p:txBody>
@@ -11404,7 +11404,7 @@
                 </a:solidFill>
                 <a:latin typeface="Segoe UI"/>
               </a:rPr>
-              <a:t>Dashboard monitoring</a:t>
+              <a:t>Dashboard pemantauan</a:t>
             </a:r>
           </a:p>
         </p:txBody>
@@ -11449,7 +11449,7 @@
                 </a:solidFill>
                 <a:latin typeface="Segoe UI"/>
               </a:rPr>
-              <a:t>Pendekatan ini memastikan analisis selalu berangkat dari pertanyaan bisnis dan diakhiri dengan artefak yang dapat dipantau, bukan sekadar grafik lepas.</a:t>
+              <a:t>Dengan kerangka ini, analisis selalu berangkat dari pertanyaan bisnis yang jelas dan berakhir pada dashboard yang siap dipantau, bukan sekadar kumpulan grafik.</a:t>
             </a:r>
           </a:p>
         </p:txBody>
@@ -11738,7 +11738,7 @@
         <p:spPr>
           <a:xfrm>
             <a:off x="822960" y="1481328"/>
-            <a:ext cx="10607040" cy="731520"/>
+            <a:ext cx="10607040" cy="777240"/>
           </a:xfrm>
           <a:prstGeom prst="rect">
             <a:avLst/>
@@ -11769,7 +11769,7 @@
                 </a:solidFill>
                 <a:latin typeface="Segoe UI"/>
               </a:rPr>
-              <a:t>Pekerjaan kelompok dikelola pada </a:t>
+              <a:t>Seluruh pekerjaan kelompok dikelola lewat </a:t>
             </a:r>
             <a:r>
               <a:rPr sz="1400" b="1">
@@ -11787,7 +11787,7 @@
                 </a:solidFill>
                 <a:latin typeface="Segoe UI"/>
               </a:rPr>
-              <a:t>, dengan setiap fase CRISP-DM dari kedua studi kasus dipecah menjadi kartu tugas dan dilacak melalui kolom </a:t>
+              <a:t>. Setiap fase CRISP-DM dari kedua studi kasus dipecah menjadi kartu tugas, lalu dilacak perpindahannya dari </a:t>
             </a:r>
             <a:r>
               <a:rPr sz="1400" b="1">
@@ -11987,7 +11987,7 @@
                 </a:solidFill>
                 <a:latin typeface="Segoe UI"/>
               </a:rPr>
-              <a:t>Status tiap pekerjaan terlihat satu layar, tidak ada tugas yang "hilang".</a:t>
+              <a:t>Status setiap pekerjaan terlihat dalam satu layar, sehingga tidak ada tugas yang terlewat.</a:t>
             </a:r>
           </a:p>
         </p:txBody>
@@ -12169,7 +12169,7 @@
                 </a:solidFill>
                 <a:latin typeface="Segoe UI"/>
               </a:rPr>
-              <a:t>Pemecahan tugas yang jelas memudahkan pembagian kerja antar anggota.</a:t>
+              <a:t>Tugas yang terpecah jelas memudahkan pembagian kerja antaranggota.</a:t>
             </a:r>
           </a:p>
         </p:txBody>
@@ -12351,7 +12351,7 @@
                 </a:solidFill>
                 <a:latin typeface="Segoe UI"/>
               </a:rPr>
-              <a:t>Progres terukur (12 selesai, 2 berjalan, 2 antre) dan terhubung ke repositori kode.</a:t>
+              <a:t>Progres terukur (12 selesai, 2 berjalan, 2 antre) dan langsung terhubung ke repositori kode.</a:t>
             </a:r>
           </a:p>
         </p:txBody>
@@ -13553,7 +13553,7 @@
                 </a:solidFill>
                 <a:latin typeface="Segoe UI"/>
               </a:rPr>
-              <a:t>Kartu = fase CRISP-DM kedua studi kasus + setup, dokumentasi, dan pengumpulan.</a:t>
+              <a:t>Tiap kartu mewakili satu fase CRISP-DM dari kedua studi kasus, ditambah setup, dokumentasi, dan pengumpulan.</a:t>
             </a:r>
           </a:p>
         </p:txBody>
@@ -14186,7 +14186,7 @@
               </a:spcAft>
             </a:pPr>
             <a:r>
-              <a:rPr sz="1250" b="1">
+              <a:rPr sz="1200" b="1">
                 <a:solidFill>
                   <a:srgbClr val="123047"/>
                 </a:solidFill>
@@ -14277,13 +14277,13 @@
               </a:spcAft>
             </a:pPr>
             <a:r>
-              <a:rPr sz="1250" b="0">
+              <a:rPr sz="1200" b="0">
                 <a:solidFill>
                   <a:srgbClr val="1E2C33"/>
                 </a:solidFill>
                 <a:latin typeface="Segoe UI"/>
               </a:rPr>
-              <a:t>Definisi 3 business question</a:t>
+              <a:t>Menyusun 3 pertanyaan bisnis</a:t>
             </a:r>
           </a:p>
         </p:txBody>
@@ -14368,13 +14368,13 @@
               </a:spcAft>
             </a:pPr>
             <a:r>
-              <a:rPr sz="1250" b="0">
+              <a:rPr sz="1200" b="0">
                 <a:solidFill>
                   <a:srgbClr val="1E2C33"/>
                 </a:solidFill>
                 <a:latin typeface="Segoe UI"/>
               </a:rPr>
-              <a:t>Definisi 4 business question</a:t>
+              <a:t>Menyusun 4 pertanyaan bisnis</a:t>
             </a:r>
           </a:p>
         </p:txBody>
@@ -14459,7 +14459,7 @@
               </a:spcAft>
             </a:pPr>
             <a:r>
-              <a:rPr sz="1250" b="1">
+              <a:rPr sz="1200" b="1">
                 <a:solidFill>
                   <a:srgbClr val="123047"/>
                 </a:solidFill>
@@ -14550,13 +14550,13 @@
               </a:spcAft>
             </a:pPr>
             <a:r>
-              <a:rPr sz="1250" b="0">
+              <a:rPr sz="1200" b="0">
                 <a:solidFill>
                   <a:srgbClr val="1E2C33"/>
                 </a:solidFill>
                 <a:latin typeface="Segoe UI"/>
               </a:rPr>
-              <a:t>Load Excel, profil missing</a:t>
+              <a:t>Memuat Excel, memeriksa data hilang</a:t>
             </a:r>
           </a:p>
         </p:txBody>
@@ -14641,13 +14641,13 @@
               </a:spcAft>
             </a:pPr>
             <a:r>
-              <a:rPr sz="1250" b="0">
+              <a:rPr sz="1200" b="0">
                 <a:solidFill>
                   <a:srgbClr val="1E2C33"/>
                 </a:solidFill>
                 <a:latin typeface="Segoe UI"/>
               </a:rPr>
-              <a:t>Ingest data mingguan, kamus data</a:t>
+              <a:t>Memuat data mingguan &amp; kamus data</a:t>
             </a:r>
           </a:p>
         </p:txBody>
@@ -14732,7 +14732,7 @@
               </a:spcAft>
             </a:pPr>
             <a:r>
-              <a:rPr sz="1250" b="1">
+              <a:rPr sz="1200" b="1">
                 <a:solidFill>
                   <a:srgbClr val="123047"/>
                 </a:solidFill>
@@ -14823,13 +14823,13 @@
               </a:spcAft>
             </a:pPr>
             <a:r>
-              <a:rPr sz="1250" b="0">
+              <a:rPr sz="1200" b="0">
                 <a:solidFill>
                   <a:srgbClr val="1E2C33"/>
                 </a:solidFill>
                 <a:latin typeface="Segoe UI"/>
               </a:rPr>
-              <a:t>Cleaning, flag kalibrasi/serial</a:t>
+              <a:t>Membersihkan, menandai kalibrasi/serial</a:t>
             </a:r>
           </a:p>
         </p:txBody>
@@ -14914,13 +14914,13 @@
               </a:spcAft>
             </a:pPr>
             <a:r>
-              <a:rPr sz="1250" b="0">
+              <a:rPr sz="1200" b="0">
                 <a:solidFill>
                   <a:srgbClr val="1E2C33"/>
                 </a:solidFill>
                 <a:latin typeface="Segoe UI"/>
               </a:rPr>
-              <a:t>KPI turunan: AOV, MA, disc%</a:t>
+              <a:t>Menurunkan KPI: AOV, MA, disc%</a:t>
             </a:r>
           </a:p>
         </p:txBody>
@@ -15005,7 +15005,7 @@
               </a:spcAft>
             </a:pPr>
             <a:r>
-              <a:rPr sz="1250" b="1">
+              <a:rPr sz="1200" b="1">
                 <a:solidFill>
                   <a:srgbClr val="123047"/>
                 </a:solidFill>
@@ -15096,13 +15096,13 @@
               </a:spcAft>
             </a:pPr>
             <a:r>
-              <a:rPr sz="1250" b="0">
+              <a:rPr sz="1200" b="0">
                 <a:solidFill>
                   <a:srgbClr val="1E2C33"/>
                 </a:solidFill>
                 <a:latin typeface="Segoe UI"/>
               </a:rPr>
-              <a:t>Status, vendor, coverage kalibrasi</a:t>
+              <a:t>Status, vendor, cakupan kalibrasi</a:t>
             </a:r>
           </a:p>
         </p:txBody>
@@ -15187,7 +15187,7 @@
               </a:spcAft>
             </a:pPr>
             <a:r>
-              <a:rPr sz="1250" b="0">
+              <a:rPr sz="1200" b="0">
                 <a:solidFill>
                   <a:srgbClr val="1E2C33"/>
                 </a:solidFill>
@@ -15278,7 +15278,7 @@
               </a:spcAft>
             </a:pPr>
             <a:r>
-              <a:rPr sz="1250" b="1">
+              <a:rPr sz="1200" b="1">
                 <a:solidFill>
                   <a:srgbClr val="123047"/>
                 </a:solidFill>
@@ -15369,7 +15369,7 @@
               </a:spcAft>
             </a:pPr>
             <a:r>
-              <a:rPr sz="1250" b="0">
+              <a:rPr sz="1200" b="0">
                 <a:solidFill>
                   <a:srgbClr val="1E2C33"/>
                 </a:solidFill>
@@ -15460,7 +15460,7 @@
               </a:spcAft>
             </a:pPr>
             <a:r>
-              <a:rPr sz="1250" b="0">
+              <a:rPr sz="1200" b="0">
                 <a:solidFill>
                   <a:srgbClr val="1E2C33"/>
                 </a:solidFill>
@@ -15551,7 +15551,7 @@
               </a:spcAft>
             </a:pPr>
             <a:r>
-              <a:rPr sz="1250" b="1">
+              <a:rPr sz="1200" b="1">
                 <a:solidFill>
                   <a:srgbClr val="123047"/>
                 </a:solidFill>
@@ -15642,7 +15642,7 @@
               </a:spcAft>
             </a:pPr>
             <a:r>
-              <a:rPr sz="1250" b="0">
+              <a:rPr sz="1200" b="0">
                 <a:solidFill>
                   <a:srgbClr val="1E2C33"/>
                 </a:solidFill>
@@ -15733,7 +15733,7 @@
               </a:spcAft>
             </a:pPr>
             <a:r>
-              <a:rPr sz="1250" b="0">
+              <a:rPr sz="1200" b="0">
                 <a:solidFill>
                   <a:srgbClr val="1E2C33"/>
                 </a:solidFill>
@@ -15968,7 +15968,7 @@
                 </a:solidFill>
                 <a:latin typeface="Segoe UI Black"/>
               </a:rPr>
-              <a:t>BUSINESS QUESTIONS</a:t>
+              <a:t>PERTANYAAN BISNIS</a:t>
             </a:r>
           </a:p>
         </p:txBody>
@@ -16112,7 +16112,7 @@
                 </a:solidFill>
                 <a:latin typeface="Segoe UI"/>
               </a:rPr>
-              <a:t> memiliki sejumlah instrumen lapangan yang menopang keandalan, keselamatan, dan kepatuhan operasi. Data tersedia namun belum diolah dan kualitasnya belum dievaluasi.</a:t>
+              <a:t> mengoperasikan banyak instrumen lapangan yang menjadi tumpuan keandalan, keselamatan, dan kepatuhan operasi. Datanya sudah tersedia, tetapi belum diolah dan kualitasnya belum pernah dievaluasi.</a:t>
             </a:r>
           </a:p>
         </p:txBody>
@@ -16270,7 +16270,7 @@
                 </a:solidFill>
                 <a:latin typeface="Segoe UI"/>
               </a:rPr>
-              <a:t>Bagaimana sebaran instrumen aktif vs tidak aktif?</a:t>
+              <a:t>Bagaimana sebaran instrumen yang aktif dibanding yang tidak aktif?</a:t>
             </a:r>
           </a:p>
         </p:txBody>
@@ -16428,7 +16428,7 @@
                 </a:solidFill>
                 <a:latin typeface="Segoe UI"/>
               </a:rPr>
-              <a:t>Equipment class dan manufacturer apa yang dominan (ketergantungan vendor)?</a:t>
+              <a:t>Equipment class dan manufacturer apa yang paling dominan, dan seberapa besar ketergantungan vendornya?</a:t>
             </a:r>
           </a:p>
         </p:txBody>
@@ -16586,7 +16586,7 @@
                 </a:solidFill>
                 <a:latin typeface="Segoe UI"/>
               </a:rPr>
-              <a:t>Instrumen mana yang belum punya data kalibrasi (potensi gap keselamatan/kepatuhan)?</a:t>
+              <a:t>Instrumen mana yang belum memiliki data kalibrasi, sehingga berpotensi menimbulkan gap keselamatan dan kepatuhan?</a:t>
             </a:r>
           </a:p>
         </p:txBody>
@@ -16957,7 +16957,7 @@
                 </a:solidFill>
                 <a:latin typeface="Segoe UI"/>
               </a:rPr>
-              <a:t>Status: mayoritas instrumen Active (~94%), ketersediaan aset baik.</a:t>
+              <a:t>Mayoritas instrumen berstatus Active (~94%), menandakan ketersediaan aset yang baik.</a:t>
             </a:r>
           </a:p>
           <a:p>
@@ -16985,7 +16985,7 @@
                 </a:solidFill>
                 <a:latin typeface="Segoe UI"/>
               </a:rPr>
-              <a:t>Komposisi didominasi Actuator &amp; Pressure Transmitter; vendor terkonsentrasi pada Rosemount &amp; Honeywell → ada ketergantungan vendor.</a:t>
+              <a:t>Komposisi didominasi Actuator dan Pressure Transmitter, dengan vendor terpusat pada Rosemount dan Honeywell sehingga muncul ketergantungan vendor.</a:t>
             </a:r>
           </a:p>
           <a:p>
@@ -17013,7 +17013,7 @@
                 </a:solidFill>
                 <a:latin typeface="Segoe UI"/>
               </a:rPr>
-              <a:t>Insight utama: gap data kalibrasi signifikan; sebagian instrumen tidak memiliki Calibrate Range tercatat.</a:t>
+              <a:t>Temuan terpenting: cukup banyak instrumen belum memiliki Calibrate Range tercatat, menyisakan gap data kalibrasi yang signifikan.</a:t>
             </a:r>
           </a:p>
           <a:p>
@@ -17041,7 +17041,7 @@
                 </a:solidFill>
                 <a:latin typeface="Segoe UI"/>
               </a:rPr>
-              <a:t>Instrumen Active tanpa data kalibrasi menjadi watchlist prioritas (risiko kepatuhan/keselamatan).</a:t>
+              <a:t>Instrumen Active yang belum berkalibrasi masuk daftar prioritas karena berisiko terhadap kepatuhan dan keselamatan.</a:t>
             </a:r>
           </a:p>
           <a:p>
@@ -17069,7 +17069,7 @@
                 </a:solidFill>
                 <a:latin typeface="Segoe UI"/>
               </a:rPr>
-              <a:t>Sebagian Serial Number kosong → menyulitkan keterlacakan aset &amp; klaim garansi.</a:t>
+              <a:t>Sebagian Serial Number masih kosong, menyulitkan keterlacakan aset dan klaim garansi.</a:t>
             </a:r>
           </a:p>
         </p:txBody>
@@ -17213,7 +17213,7 @@
                 </a:solidFill>
                 <a:latin typeface="Segoe UI"/>
               </a:rPr>
-              <a:t>Lengkapi Calibrate Range &amp; Serial Number untuk instrumen prioritas (Active tanpa kalibrasi).</a:t>
+              <a:t>Lengkapi Calibrate Range dan Serial Number, dimulai dari instrumen prioritas yang aktif namun belum berkalibrasi.</a:t>
             </a:r>
           </a:p>
           <a:p>
@@ -17241,7 +17241,7 @@
                 </a:solidFill>
                 <a:latin typeface="Segoe UI"/>
               </a:rPr>
-              <a:t>Jadikan % cakupan kalibrasi sebagai KPI monitoring berkala di dashboard.</a:t>
+              <a:t>Jadikan persentase cakupan kalibrasi sebagai KPI yang dipantau berkala di dashboard.</a:t>
             </a:r>
           </a:p>
           <a:p>
@@ -17269,7 +17269,7 @@
                 </a:solidFill>
                 <a:latin typeface="Segoe UI"/>
               </a:rPr>
-              <a:t>Standardisasi input data di sumber untuk menghindari field kosong.</a:t>
+              <a:t>Standardkan pengisian data di sumbernya agar tidak ada field yang kosong.</a:t>
             </a:r>
           </a:p>
         </p:txBody>
@@ -17367,7 +17367,7 @@
                 </a:solidFill>
                 <a:latin typeface="Segoe UI"/>
               </a:rPr>
-              <a:t>sampel kecil (18 instrumen), satu area, snapshot satu waktu → analisis deskriptif, belum prediktif.</a:t>
+              <a:t>data masih terbatas (18 instrumen, satu area, satu titik waktu), sehingga analisis bersifat deskriptif dan belum prediktif.</a:t>
             </a:r>
           </a:p>
         </p:txBody>

--- a/Final-Project-STI-Kel5-Presentation.pptx
+++ b/Final-Project-STI-Kel5-Presentation.pptx
@@ -3452,44 +3452,35 @@
               </a:spcAft>
             </a:pPr>
             <a:r>
-              <a:rPr sz="1400" b="1">
+              <a:rPr sz="1150" b="1">
                 <a:solidFill>
                   <a:srgbClr val="123047"/>
                 </a:solidFill>
                 <a:latin typeface="Segoe UI Semibold"/>
               </a:rPr>
-              <a:t>Moch Chesa Nur Hidayat</a:t>
-            </a:r>
-            <a:r>
-              <a:rPr sz="1300" b="0">
+              <a:t>Moch Chesa Nur Hidayat  ·  Misbahul Munir Dwi Julianto  ·  Eko Yunianto</a:t>
+            </a:r>
+          </a:p>
+          <a:p>
+            <a:pPr algn="l">
+              <a:lnSpc>
+                <a:spcPct val="110000"/>
+              </a:lnSpc>
+              <a:spcBef>
+                <a:spcPts val="0"/>
+              </a:spcBef>
+              <a:spcAft>
+                <a:spcPts val="300"/>
+              </a:spcAft>
+            </a:pPr>
+            <a:r>
+              <a:rPr sz="1000" b="0">
                 <a:solidFill>
                   <a:srgbClr val="8A98A0"/>
                 </a:solidFill>
                 <a:latin typeface="Segoe UI"/>
               </a:rPr>
-              <a:t>    ·    [Anggota 2]    ·    [Anggota 3]</a:t>
-            </a:r>
-          </a:p>
-          <a:p>
-            <a:pPr algn="l">
-              <a:lnSpc>
-                <a:spcPct val="110000"/>
-              </a:lnSpc>
-              <a:spcBef>
-                <a:spcPts val="0"/>
-              </a:spcBef>
-              <a:spcAft>
-                <a:spcPts val="300"/>
-              </a:spcAft>
-            </a:pPr>
-            <a:r>
-              <a:rPr sz="1000" b="0">
-                <a:solidFill>
-                  <a:srgbClr val="8A98A0"/>
-                </a:solidFill>
-                <a:latin typeface="Segoe UI"/>
-              </a:rPr>
-              <a:t>GitHub: sianida26, Misbahulmunir26, …     |     Dosen: [isi nama dosen]</a:t>
+              <a:t>Dosen Pengampu: Dr. Agus Budi Raharjo     |     GitHub: sianida26, Misbahulmunir26</a:t>
             </a:r>
           </a:p>
         </p:txBody>

--- a/Final-Project-STI-Kel5-Presentation.pptx
+++ b/Final-Project-STI-Kel5-Presentation.pptx
@@ -16,9 +16,6 @@
     <p:sldId id="264" r:id="rId15"/>
     <p:sldId id="265" r:id="rId16"/>
     <p:sldId id="266" r:id="rId17"/>
-    <p:sldId id="267" r:id="rId18"/>
-    <p:sldId id="268" r:id="rId19"/>
-    <p:sldId id="269" r:id="rId20"/>
   </p:sldIdLst>
   <p:sldSz cx="12191695" cy="6858000" type="screen4x3"/>
   <p:notesSz cx="6858000" cy="9144000"/>
@@ -3724,7 +3721,7 @@
                 </a:solidFill>
                 <a:latin typeface="Segoe UI Semibold"/>
               </a:rPr>
-              <a:t>STUDI KASUS 2 · PENJUALAN RITEL</a:t>
+              <a:t>PENUTUP</a:t>
             </a:r>
           </a:p>
         </p:txBody>
@@ -3769,16 +3766,7 @@
                 </a:solidFill>
                 <a:latin typeface="Segoe UI Black"/>
               </a:rPr>
-              <a:t>KONTEKS &amp; </a:t>
-            </a:r>
-            <a:r>
-              <a:rPr sz="2600" b="1">
-                <a:solidFill>
-                  <a:srgbClr val="1EA7DD"/>
-                </a:solidFill>
-                <a:latin typeface="Segoe UI Black"/>
-              </a:rPr>
-              <a:t>PERTANYAAN BISNIS</a:t>
+              <a:t>KESIMPULAN</a:t>
             </a:r>
           </a:p>
         </p:txBody>
@@ -3881,8 +3869,8 @@
         </p:nvSpPr>
         <p:spPr>
           <a:xfrm>
-            <a:off x="822960" y="1517904"/>
-            <a:ext cx="10607040" cy="822960"/>
+            <a:off x="822960" y="1691640"/>
+            <a:ext cx="10515600" cy="3840480"/>
           </a:xfrm>
           <a:prstGeom prst="rect">
             <a:avLst/>
@@ -3890,671 +3878,148 @@
           <a:noFill/>
         </p:spPr>
         <p:txBody>
-          <a:bodyPr wrap="square" anchor="t" lIns="0" rIns="0" tIns="0" bIns="0">
+          <a:bodyPr wrap="square" lIns="0" rIns="0" tIns="0" bIns="0">
             <a:spAutoFit/>
           </a:bodyPr>
           <a:lstStyle/>
           <a:p>
-            <a:pPr algn="l">
+            <a:pPr>
               <a:lnSpc>
                 <a:spcPct val="118000"/>
               </a:lnSpc>
-              <a:spcBef>
-                <a:spcPts val="0"/>
-              </a:spcBef>
-              <a:spcAft>
-                <a:spcPts val="0"/>
-              </a:spcAft>
-            </a:pPr>
-            <a:r>
-              <a:rPr sz="1400" b="1">
+              <a:spcAft>
+                <a:spcPts val="1600"/>
+              </a:spcAft>
+            </a:pPr>
+            <a:r>
+              <a:rPr sz="1250">
                 <a:solidFill>
                   <a:srgbClr val="1EA7DD"/>
                 </a:solidFill>
-                <a:latin typeface="Segoe UI Semibold"/>
-              </a:rPr>
-              <a:t>Sebuah retailer online B2C</a:t>
-            </a:r>
-            <a:r>
-              <a:rPr sz="1400" b="0">
+                <a:latin typeface="Segoe UI"/>
+              </a:rPr>
+              <a:t>▪  </a:t>
+            </a:r>
+            <a:r>
+              <a:rPr sz="1450">
                 <a:solidFill>
                   <a:srgbClr val="1E2C33"/>
                 </a:solidFill>
                 <a:latin typeface="Segoe UI"/>
               </a:rPr>
-              <a:t> ingin memahami kinerja penjualannya selama kurang lebih 3,5 tahun (data agregat mingguan dan anonim) sebagai dasar keputusan stok, promo, dan target penjualan.</a:t>
-            </a:r>
-          </a:p>
-        </p:txBody>
-      </p:sp>
-      <p:sp>
-        <p:nvSpPr>
-          <p:cNvPr id="9" name="Snip Single Corner Rectangle 8"/>
-          <p:cNvSpPr/>
-          <p:nvPr/>
-        </p:nvSpPr>
-        <p:spPr>
-          <a:xfrm>
-            <a:off x="822960" y="2560320"/>
-            <a:ext cx="841248" cy="786384"/>
-          </a:xfrm>
-          <a:prstGeom prst="snip1Rect">
-            <a:avLst>
-              <a:gd name="adj" fmla="val 22000"/>
-            </a:avLst>
-          </a:prstGeom>
-          <a:solidFill>
-            <a:srgbClr val="123047"/>
-          </a:solidFill>
-          <a:ln>
-            <a:noFill/>
-          </a:ln>
-          <a:effectLst/>
-        </p:spPr>
-        <p:style>
-          <a:lnRef idx="1">
-            <a:schemeClr val="accent1"/>
-          </a:lnRef>
-          <a:fillRef idx="3">
-            <a:schemeClr val="accent1"/>
-          </a:fillRef>
-          <a:effectRef idx="2">
-            <a:schemeClr val="accent1"/>
-          </a:effectRef>
-          <a:fontRef idx="minor">
-            <a:schemeClr val="lt1"/>
-          </a:fontRef>
-        </p:style>
-        <p:txBody>
-          <a:bodyPr rtlCol="0" anchor="ctr"/>
-          <a:lstStyle/>
-          <a:p>
-            <a:pPr algn="ctr"/>
-          </a:p>
-        </p:txBody>
-      </p:sp>
-      <p:sp>
-        <p:nvSpPr>
-          <p:cNvPr id="10" name="TextBox 9"/>
-          <p:cNvSpPr txBox="1"/>
-          <p:nvPr/>
-        </p:nvSpPr>
-        <p:spPr>
-          <a:xfrm>
-            <a:off x="822960" y="2578608"/>
-            <a:ext cx="841248" cy="786384"/>
-          </a:xfrm>
-          <a:prstGeom prst="rect">
-            <a:avLst/>
-          </a:prstGeom>
-          <a:noFill/>
-        </p:spPr>
-        <p:txBody>
-          <a:bodyPr wrap="square" anchor="ctr" lIns="0" rIns="0" tIns="0" bIns="0">
-            <a:spAutoFit/>
-          </a:bodyPr>
-          <a:lstStyle/>
-          <a:p>
-            <a:pPr algn="ctr">
-              <a:lnSpc>
-                <a:spcPct val="105000"/>
-              </a:lnSpc>
-              <a:spcBef>
-                <a:spcPts val="0"/>
-              </a:spcBef>
-              <a:spcAft>
-                <a:spcPts val="0"/>
-              </a:spcAft>
-            </a:pPr>
-            <a:r>
-              <a:rPr sz="1800" b="1">
+              <a:t>Pendekatan CRISP-DM berhasil mengubah dataset instrumen mentah menjadi dashboard pemantauan yang menjawab pertanyaan bisnis nyata.</a:t>
+            </a:r>
+          </a:p>
+          <a:p>
+            <a:pPr>
+              <a:lnSpc>
+                <a:spcPct val="118000"/>
+              </a:lnSpc>
+              <a:spcAft>
+                <a:spcPts val="1600"/>
+              </a:spcAft>
+            </a:pPr>
+            <a:r>
+              <a:rPr sz="1250">
                 <a:solidFill>
                   <a:srgbClr val="1EA7DD"/>
                 </a:solidFill>
-                <a:latin typeface="Segoe UI Black"/>
-              </a:rPr>
-              <a:t>Q1</a:t>
-            </a:r>
-          </a:p>
-        </p:txBody>
-      </p:sp>
-      <p:sp>
-        <p:nvSpPr>
-          <p:cNvPr id="11" name="TextBox 10"/>
-          <p:cNvSpPr txBox="1"/>
-          <p:nvPr/>
-        </p:nvSpPr>
-        <p:spPr>
-          <a:xfrm>
-            <a:off x="1828800" y="2633472"/>
-            <a:ext cx="9418320" cy="731520"/>
-          </a:xfrm>
-          <a:prstGeom prst="rect">
-            <a:avLst/>
-          </a:prstGeom>
-          <a:noFill/>
-        </p:spPr>
-        <p:txBody>
-          <a:bodyPr wrap="square" anchor="t" lIns="0" rIns="0" tIns="0" bIns="0">
-            <a:spAutoFit/>
-          </a:bodyPr>
-          <a:lstStyle/>
-          <a:p>
-            <a:pPr algn="l">
-              <a:lnSpc>
-                <a:spcPct val="105000"/>
-              </a:lnSpc>
-              <a:spcBef>
-                <a:spcPts val="0"/>
-              </a:spcBef>
-              <a:spcAft>
-                <a:spcPts val="200"/>
-              </a:spcAft>
-            </a:pPr>
-            <a:r>
-              <a:rPr sz="1550" b="1">
-                <a:solidFill>
-                  <a:srgbClr val="123047"/>
-                </a:solidFill>
-                <a:latin typeface="Segoe UI Semibold"/>
-              </a:rPr>
-              <a:t>Tren &amp; pertumbuhan</a:t>
-            </a:r>
-          </a:p>
-          <a:p>
-            <a:pPr algn="l">
-              <a:lnSpc>
-                <a:spcPct val="105000"/>
-              </a:lnSpc>
-              <a:spcBef>
-                <a:spcPts val="0"/>
-              </a:spcBef>
-              <a:spcAft>
-                <a:spcPts val="200"/>
-              </a:spcAft>
-            </a:pPr>
-            <a:r>
-              <a:rPr sz="1200" b="0">
-                <a:solidFill>
-                  <a:srgbClr val="8A98A0"/>
-                </a:solidFill>
                 <a:latin typeface="Segoe UI"/>
               </a:rPr>
-              <a:t>Bagaimana arah tren revenue, transaksi, dan jumlah pelanggan dari waktu ke waktu?</a:t>
-            </a:r>
-          </a:p>
-        </p:txBody>
-      </p:sp>
-      <p:sp>
-        <p:nvSpPr>
-          <p:cNvPr id="12" name="Snip Single Corner Rectangle 11"/>
-          <p:cNvSpPr/>
-          <p:nvPr/>
-        </p:nvSpPr>
-        <p:spPr>
-          <a:xfrm>
-            <a:off x="822960" y="3456432"/>
-            <a:ext cx="841248" cy="786384"/>
-          </a:xfrm>
-          <a:prstGeom prst="snip1Rect">
-            <a:avLst>
-              <a:gd name="adj" fmla="val 22000"/>
-            </a:avLst>
-          </a:prstGeom>
-          <a:solidFill>
-            <a:srgbClr val="123047"/>
-          </a:solidFill>
-          <a:ln>
-            <a:noFill/>
-          </a:ln>
-          <a:effectLst/>
-        </p:spPr>
-        <p:style>
-          <a:lnRef idx="1">
-            <a:schemeClr val="accent1"/>
-          </a:lnRef>
-          <a:fillRef idx="3">
-            <a:schemeClr val="accent1"/>
-          </a:fillRef>
-          <a:effectRef idx="2">
-            <a:schemeClr val="accent1"/>
-          </a:effectRef>
-          <a:fontRef idx="minor">
-            <a:schemeClr val="lt1"/>
-          </a:fontRef>
-        </p:style>
-        <p:txBody>
-          <a:bodyPr rtlCol="0" anchor="ctr"/>
-          <a:lstStyle/>
-          <a:p>
-            <a:pPr algn="ctr"/>
-          </a:p>
-        </p:txBody>
-      </p:sp>
-      <p:sp>
-        <p:nvSpPr>
-          <p:cNvPr id="13" name="TextBox 12"/>
-          <p:cNvSpPr txBox="1"/>
-          <p:nvPr/>
-        </p:nvSpPr>
-        <p:spPr>
-          <a:xfrm>
-            <a:off x="822960" y="3474720"/>
-            <a:ext cx="841248" cy="786384"/>
-          </a:xfrm>
-          <a:prstGeom prst="rect">
-            <a:avLst/>
-          </a:prstGeom>
-          <a:noFill/>
-        </p:spPr>
-        <p:txBody>
-          <a:bodyPr wrap="square" anchor="ctr" lIns="0" rIns="0" tIns="0" bIns="0">
-            <a:spAutoFit/>
-          </a:bodyPr>
-          <a:lstStyle/>
-          <a:p>
-            <a:pPr algn="ctr">
-              <a:lnSpc>
-                <a:spcPct val="105000"/>
-              </a:lnSpc>
-              <a:spcBef>
-                <a:spcPts val="0"/>
-              </a:spcBef>
-              <a:spcAft>
-                <a:spcPts val="0"/>
-              </a:spcAft>
-            </a:pPr>
-            <a:r>
-              <a:rPr sz="1800" b="1">
+              <a:t>▪  </a:t>
+            </a:r>
+            <a:r>
+              <a:rPr sz="1450">
+                <a:solidFill>
+                  <a:srgbClr val="1E2C33"/>
+                </a:solidFill>
+                <a:latin typeface="Segoe UI"/>
+              </a:rPr>
+              <a:t>Inventory CGS-1: ketersediaan aset tergolong baik (~94% aktif), tetapi gap data kalibrasi perlu segera ditindaklanjuti demi keselamatan dan kepatuhan.</a:t>
+            </a:r>
+          </a:p>
+          <a:p>
+            <a:pPr>
+              <a:lnSpc>
+                <a:spcPct val="118000"/>
+              </a:lnSpc>
+              <a:spcAft>
+                <a:spcPts val="1600"/>
+              </a:spcAft>
+            </a:pPr>
+            <a:r>
+              <a:rPr sz="1250">
                 <a:solidFill>
                   <a:srgbClr val="1EA7DD"/>
                 </a:solidFill>
-                <a:latin typeface="Segoe UI Black"/>
-              </a:rPr>
-              <a:t>Q2</a:t>
-            </a:r>
-          </a:p>
-        </p:txBody>
-      </p:sp>
-      <p:sp>
-        <p:nvSpPr>
-          <p:cNvPr id="14" name="TextBox 13"/>
-          <p:cNvSpPr txBox="1"/>
-          <p:nvPr/>
-        </p:nvSpPr>
-        <p:spPr>
-          <a:xfrm>
-            <a:off x="1828800" y="3529584"/>
-            <a:ext cx="9418320" cy="731520"/>
-          </a:xfrm>
-          <a:prstGeom prst="rect">
-            <a:avLst/>
-          </a:prstGeom>
-          <a:noFill/>
-        </p:spPr>
-        <p:txBody>
-          <a:bodyPr wrap="square" anchor="t" lIns="0" rIns="0" tIns="0" bIns="0">
-            <a:spAutoFit/>
-          </a:bodyPr>
-          <a:lstStyle/>
-          <a:p>
-            <a:pPr algn="l">
-              <a:lnSpc>
-                <a:spcPct val="105000"/>
-              </a:lnSpc>
-              <a:spcBef>
-                <a:spcPts val="0"/>
-              </a:spcBef>
-              <a:spcAft>
-                <a:spcPts val="200"/>
-              </a:spcAft>
-            </a:pPr>
-            <a:r>
-              <a:rPr sz="1550" b="1">
-                <a:solidFill>
-                  <a:srgbClr val="123047"/>
-                </a:solidFill>
-                <a:latin typeface="Segoe UI Semibold"/>
-              </a:rPr>
-              <a:t>Pendorong revenue</a:t>
-            </a:r>
-          </a:p>
-          <a:p>
-            <a:pPr algn="l">
-              <a:lnSpc>
-                <a:spcPct val="105000"/>
-              </a:lnSpc>
-              <a:spcBef>
-                <a:spcPts val="0"/>
-              </a:spcBef>
-              <a:spcAft>
-                <a:spcPts val="200"/>
-              </a:spcAft>
-            </a:pPr>
-            <a:r>
-              <a:rPr sz="1200" b="0">
-                <a:solidFill>
-                  <a:srgbClr val="8A98A0"/>
-                </a:solidFill>
                 <a:latin typeface="Segoe UI"/>
               </a:rPr>
-              <a:t>Pertumbuhan lebih ditarik oleh volume transaksi atau nilai per transaksi (AOV)?</a:t>
-            </a:r>
-          </a:p>
-        </p:txBody>
-      </p:sp>
-      <p:sp>
-        <p:nvSpPr>
-          <p:cNvPr id="15" name="Snip Single Corner Rectangle 14"/>
-          <p:cNvSpPr/>
-          <p:nvPr/>
-        </p:nvSpPr>
-        <p:spPr>
-          <a:xfrm>
-            <a:off x="822960" y="4352544"/>
-            <a:ext cx="841248" cy="786384"/>
-          </a:xfrm>
-          <a:prstGeom prst="snip1Rect">
-            <a:avLst>
-              <a:gd name="adj" fmla="val 22000"/>
-            </a:avLst>
-          </a:prstGeom>
-          <a:solidFill>
-            <a:srgbClr val="123047"/>
-          </a:solidFill>
-          <a:ln>
-            <a:noFill/>
-          </a:ln>
-          <a:effectLst/>
-        </p:spPr>
-        <p:style>
-          <a:lnRef idx="1">
-            <a:schemeClr val="accent1"/>
-          </a:lnRef>
-          <a:fillRef idx="3">
-            <a:schemeClr val="accent1"/>
-          </a:fillRef>
-          <a:effectRef idx="2">
-            <a:schemeClr val="accent1"/>
-          </a:effectRef>
-          <a:fontRef idx="minor">
-            <a:schemeClr val="lt1"/>
-          </a:fontRef>
-        </p:style>
-        <p:txBody>
-          <a:bodyPr rtlCol="0" anchor="ctr"/>
-          <a:lstStyle/>
-          <a:p>
-            <a:pPr algn="ctr"/>
-          </a:p>
-        </p:txBody>
-      </p:sp>
-      <p:sp>
-        <p:nvSpPr>
-          <p:cNvPr id="16" name="TextBox 15"/>
-          <p:cNvSpPr txBox="1"/>
-          <p:nvPr/>
-        </p:nvSpPr>
-        <p:spPr>
-          <a:xfrm>
-            <a:off x="822960" y="4370831"/>
-            <a:ext cx="841248" cy="786384"/>
-          </a:xfrm>
-          <a:prstGeom prst="rect">
-            <a:avLst/>
-          </a:prstGeom>
-          <a:noFill/>
-        </p:spPr>
-        <p:txBody>
-          <a:bodyPr wrap="square" anchor="ctr" lIns="0" rIns="0" tIns="0" bIns="0">
-            <a:spAutoFit/>
-          </a:bodyPr>
-          <a:lstStyle/>
-          <a:p>
-            <a:pPr algn="ctr">
-              <a:lnSpc>
-                <a:spcPct val="105000"/>
-              </a:lnSpc>
-              <a:spcBef>
-                <a:spcPts val="0"/>
-              </a:spcBef>
-              <a:spcAft>
-                <a:spcPts val="0"/>
-              </a:spcAft>
-            </a:pPr>
-            <a:r>
-              <a:rPr sz="1800" b="1">
+              <a:t>▪  </a:t>
+            </a:r>
+            <a:r>
+              <a:rPr sz="1450">
+                <a:solidFill>
+                  <a:srgbClr val="1E2C33"/>
+                </a:solidFill>
+                <a:latin typeface="Segoe UI"/>
+              </a:rPr>
+              <a:t>Instrumen Active yang belum berkalibrasi menjadi watchlist prioritas, dan sebagian Serial Number masih perlu dilengkapi untuk keterlacakan aset.</a:t>
+            </a:r>
+          </a:p>
+          <a:p>
+            <a:pPr>
+              <a:lnSpc>
+                <a:spcPct val="118000"/>
+              </a:lnSpc>
+              <a:spcAft>
+                <a:spcPts val="1600"/>
+              </a:spcAft>
+            </a:pPr>
+            <a:r>
+              <a:rPr sz="1250">
                 <a:solidFill>
                   <a:srgbClr val="1EA7DD"/>
                 </a:solidFill>
-                <a:latin typeface="Segoe UI Black"/>
-              </a:rPr>
-              <a:t>Q3</a:t>
-            </a:r>
-          </a:p>
-        </p:txBody>
-      </p:sp>
-      <p:sp>
-        <p:nvSpPr>
-          <p:cNvPr id="17" name="TextBox 16"/>
-          <p:cNvSpPr txBox="1"/>
-          <p:nvPr/>
-        </p:nvSpPr>
-        <p:spPr>
-          <a:xfrm>
-            <a:off x="1828800" y="4425696"/>
-            <a:ext cx="9418320" cy="731520"/>
-          </a:xfrm>
-          <a:prstGeom prst="rect">
-            <a:avLst/>
-          </a:prstGeom>
-          <a:noFill/>
-        </p:spPr>
-        <p:txBody>
-          <a:bodyPr wrap="square" anchor="t" lIns="0" rIns="0" tIns="0" bIns="0">
-            <a:spAutoFit/>
-          </a:bodyPr>
-          <a:lstStyle/>
-          <a:p>
-            <a:pPr algn="l">
-              <a:lnSpc>
-                <a:spcPct val="105000"/>
-              </a:lnSpc>
-              <a:spcBef>
-                <a:spcPts val="0"/>
-              </a:spcBef>
-              <a:spcAft>
-                <a:spcPts val="200"/>
-              </a:spcAft>
-            </a:pPr>
-            <a:r>
-              <a:rPr sz="1550" b="1">
-                <a:solidFill>
-                  <a:srgbClr val="123047"/>
-                </a:solidFill>
-                <a:latin typeface="Segoe UI Semibold"/>
-              </a:rPr>
-              <a:t>Pola musiman</a:t>
-            </a:r>
-          </a:p>
-          <a:p>
-            <a:pPr algn="l">
-              <a:lnSpc>
-                <a:spcPct val="105000"/>
-              </a:lnSpc>
-              <a:spcBef>
-                <a:spcPts val="0"/>
-              </a:spcBef>
-              <a:spcAft>
-                <a:spcPts val="200"/>
-              </a:spcAft>
-            </a:pPr>
-            <a:r>
-              <a:rPr sz="1200" b="0">
-                <a:solidFill>
-                  <a:srgbClr val="8A98A0"/>
-                </a:solidFill>
                 <a:latin typeface="Segoe UI"/>
               </a:rPr>
-              <a:t>Adakah bulan ramai dan sepi yang bisa dipakai merencanakan stok dan campaign?</a:t>
-            </a:r>
-          </a:p>
-        </p:txBody>
-      </p:sp>
-      <p:sp>
-        <p:nvSpPr>
-          <p:cNvPr id="18" name="Snip Single Corner Rectangle 17"/>
-          <p:cNvSpPr/>
-          <p:nvPr/>
-        </p:nvSpPr>
-        <p:spPr>
-          <a:xfrm>
-            <a:off x="822960" y="5248656"/>
-            <a:ext cx="841248" cy="786384"/>
-          </a:xfrm>
-          <a:prstGeom prst="snip1Rect">
-            <a:avLst>
-              <a:gd name="adj" fmla="val 22000"/>
-            </a:avLst>
-          </a:prstGeom>
-          <a:solidFill>
-            <a:srgbClr val="123047"/>
-          </a:solidFill>
-          <a:ln>
-            <a:noFill/>
-          </a:ln>
-          <a:effectLst/>
-        </p:spPr>
-        <p:style>
-          <a:lnRef idx="1">
-            <a:schemeClr val="accent1"/>
-          </a:lnRef>
-          <a:fillRef idx="3">
-            <a:schemeClr val="accent1"/>
-          </a:fillRef>
-          <a:effectRef idx="2">
-            <a:schemeClr val="accent1"/>
-          </a:effectRef>
-          <a:fontRef idx="minor">
-            <a:schemeClr val="lt1"/>
-          </a:fontRef>
-        </p:style>
-        <p:txBody>
-          <a:bodyPr rtlCol="0" anchor="ctr"/>
-          <a:lstStyle/>
-          <a:p>
-            <a:pPr algn="ctr"/>
-          </a:p>
-        </p:txBody>
-      </p:sp>
-      <p:sp>
-        <p:nvSpPr>
-          <p:cNvPr id="19" name="TextBox 18"/>
-          <p:cNvSpPr txBox="1"/>
-          <p:nvPr/>
-        </p:nvSpPr>
-        <p:spPr>
-          <a:xfrm>
-            <a:off x="822960" y="5266944"/>
-            <a:ext cx="841248" cy="786384"/>
-          </a:xfrm>
-          <a:prstGeom prst="rect">
-            <a:avLst/>
-          </a:prstGeom>
-          <a:noFill/>
-        </p:spPr>
-        <p:txBody>
-          <a:bodyPr wrap="square" anchor="ctr" lIns="0" rIns="0" tIns="0" bIns="0">
-            <a:spAutoFit/>
-          </a:bodyPr>
-          <a:lstStyle/>
-          <a:p>
-            <a:pPr algn="ctr">
-              <a:lnSpc>
-                <a:spcPct val="105000"/>
-              </a:lnSpc>
-              <a:spcBef>
-                <a:spcPts val="0"/>
-              </a:spcBef>
-              <a:spcAft>
-                <a:spcPts val="0"/>
-              </a:spcAft>
-            </a:pPr>
-            <a:r>
-              <a:rPr sz="1800" b="1">
+              <a:t>▪  </a:t>
+            </a:r>
+            <a:r>
+              <a:rPr sz="1450">
+                <a:solidFill>
+                  <a:srgbClr val="1E2C33"/>
+                </a:solidFill>
+                <a:latin typeface="Segoe UI"/>
+              </a:rPr>
+              <a:t>Manajemen proyek lewat GitHub Projects menjaga pekerjaan kelompok tetap transparan, terbagi rapi, dan terlacak (12 selesai, 2 berjalan, 2 antre).</a:t>
+            </a:r>
+          </a:p>
+          <a:p>
+            <a:pPr>
+              <a:lnSpc>
+                <a:spcPct val="118000"/>
+              </a:lnSpc>
+              <a:spcAft>
+                <a:spcPts val="1600"/>
+              </a:spcAft>
+            </a:pPr>
+            <a:r>
+              <a:rPr sz="1250">
                 <a:solidFill>
                   <a:srgbClr val="1EA7DD"/>
                 </a:solidFill>
-                <a:latin typeface="Segoe UI Black"/>
-              </a:rPr>
-              <a:t>Q4</a:t>
-            </a:r>
-          </a:p>
-        </p:txBody>
-      </p:sp>
-      <p:sp>
-        <p:nvSpPr>
-          <p:cNvPr id="20" name="TextBox 19"/>
-          <p:cNvSpPr txBox="1"/>
-          <p:nvPr/>
-        </p:nvSpPr>
-        <p:spPr>
-          <a:xfrm>
-            <a:off x="1828800" y="5321808"/>
-            <a:ext cx="9418320" cy="731520"/>
-          </a:xfrm>
-          <a:prstGeom prst="rect">
-            <a:avLst/>
-          </a:prstGeom>
-          <a:noFill/>
-        </p:spPr>
-        <p:txBody>
-          <a:bodyPr wrap="square" anchor="t" lIns="0" rIns="0" tIns="0" bIns="0">
-            <a:spAutoFit/>
-          </a:bodyPr>
-          <a:lstStyle/>
-          <a:p>
-            <a:pPr algn="l">
-              <a:lnSpc>
-                <a:spcPct val="105000"/>
-              </a:lnSpc>
-              <a:spcBef>
-                <a:spcPts val="0"/>
-              </a:spcBef>
-              <a:spcAft>
-                <a:spcPts val="200"/>
-              </a:spcAft>
-            </a:pPr>
-            <a:r>
-              <a:rPr sz="1550" b="1">
-                <a:solidFill>
-                  <a:srgbClr val="123047"/>
-                </a:solidFill>
-                <a:latin typeface="Segoe UI Semibold"/>
-              </a:rPr>
-              <a:t>Efektivitas diskon</a:t>
-            </a:r>
-          </a:p>
-          <a:p>
-            <a:pPr algn="l">
-              <a:lnSpc>
-                <a:spcPct val="105000"/>
-              </a:lnSpc>
-              <a:spcBef>
-                <a:spcPts val="0"/>
-              </a:spcBef>
-              <a:spcAft>
-                <a:spcPts val="200"/>
-              </a:spcAft>
-            </a:pPr>
-            <a:r>
-              <a:rPr sz="1200" b="0">
-                <a:solidFill>
-                  <a:srgbClr val="8A98A0"/>
-                </a:solidFill>
                 <a:latin typeface="Segoe UI"/>
               </a:rPr>
-              <a:t>Seberapa besar pengaruh strategi diskon terhadap revenue?</a:t>
+              <a:t>▪  </a:t>
+            </a:r>
+            <a:r>
+              <a:rPr sz="1450">
+                <a:solidFill>
+                  <a:srgbClr val="1E2C33"/>
+                </a:solidFill>
+                <a:latin typeface="Segoe UI"/>
+              </a:rPr>
+              <a:t>Langkah berikutnya: menuntaskan dashboard Looker Studio dan melengkapi data kalibrasi instrumen prioritas.</a:t>
             </a:r>
           </a:p>
         </p:txBody>
@@ -4568,2485 +4033,6 @@
 </file>
 
 <file path=ppt/slides/slide11.xml><?xml version="1.0" encoding="utf-8"?>
-<p:sld xmlns:a="http://schemas.openxmlformats.org/drawingml/2006/main" xmlns:p="http://schemas.openxmlformats.org/presentationml/2006/main" xmlns:r="http://schemas.openxmlformats.org/officeDocument/2006/relationships">
-  <p:cSld>
-    <p:spTree>
-      <p:nvGrpSpPr>
-        <p:cNvPr id="1" name=""/>
-        <p:cNvGrpSpPr/>
-        <p:nvPr/>
-      </p:nvGrpSpPr>
-      <p:grpSpPr/>
-      <p:pic>
-        <p:nvPicPr>
-          <p:cNvPr id="2" name="Picture 1" descr="bg_light.png"/>
-          <p:cNvPicPr>
-            <a:picLocks noChangeAspect="1"/>
-          </p:cNvPicPr>
-          <p:nvPr/>
-        </p:nvPicPr>
-        <p:blipFill>
-          <a:blip r:embed="rId2"/>
-          <a:stretch>
-            <a:fillRect/>
-          </a:stretch>
-        </p:blipFill>
-        <p:spPr>
-          <a:xfrm>
-            <a:off x="0" y="0"/>
-            <a:ext cx="12191695" cy="6858000"/>
-          </a:xfrm>
-          <a:prstGeom prst="rect">
-            <a:avLst/>
-          </a:prstGeom>
-        </p:spPr>
-      </p:pic>
-      <p:sp>
-        <p:nvSpPr>
-          <p:cNvPr id="3" name="Rectangle 2"/>
-          <p:cNvSpPr/>
-          <p:nvPr/>
-        </p:nvSpPr>
-        <p:spPr>
-          <a:xfrm>
-            <a:off x="566928" y="475488"/>
-            <a:ext cx="146304" cy="603504"/>
-          </a:xfrm>
-          <a:prstGeom prst="rect">
-            <a:avLst/>
-          </a:prstGeom>
-          <a:solidFill>
-            <a:srgbClr val="1EA7DD"/>
-          </a:solidFill>
-          <a:ln>
-            <a:noFill/>
-          </a:ln>
-          <a:effectLst/>
-        </p:spPr>
-        <p:style>
-          <a:lnRef idx="1">
-            <a:schemeClr val="accent1"/>
-          </a:lnRef>
-          <a:fillRef idx="3">
-            <a:schemeClr val="accent1"/>
-          </a:fillRef>
-          <a:effectRef idx="2">
-            <a:schemeClr val="accent1"/>
-          </a:effectRef>
-          <a:fontRef idx="minor">
-            <a:schemeClr val="lt1"/>
-          </a:fontRef>
-        </p:style>
-        <p:txBody>
-          <a:bodyPr rtlCol="0" anchor="ctr"/>
-          <a:lstStyle/>
-          <a:p>
-            <a:pPr algn="ctr"/>
-          </a:p>
-        </p:txBody>
-      </p:sp>
-      <p:sp>
-        <p:nvSpPr>
-          <p:cNvPr id="4" name="TextBox 3"/>
-          <p:cNvSpPr txBox="1"/>
-          <p:nvPr/>
-        </p:nvSpPr>
-        <p:spPr>
-          <a:xfrm>
-            <a:off x="841248" y="420624"/>
-            <a:ext cx="10058400" cy="292608"/>
-          </a:xfrm>
-          <a:prstGeom prst="rect">
-            <a:avLst/>
-          </a:prstGeom>
-          <a:noFill/>
-        </p:spPr>
-        <p:txBody>
-          <a:bodyPr wrap="square" anchor="t" lIns="0" rIns="0" tIns="0" bIns="0">
-            <a:spAutoFit/>
-          </a:bodyPr>
-          <a:lstStyle/>
-          <a:p>
-            <a:pPr algn="l">
-              <a:lnSpc>
-                <a:spcPct val="105000"/>
-              </a:lnSpc>
-              <a:spcBef>
-                <a:spcPts val="0"/>
-              </a:spcBef>
-              <a:spcAft>
-                <a:spcPts val="0"/>
-              </a:spcAft>
-            </a:pPr>
-            <a:r>
-              <a:rPr sz="1100" b="1">
-                <a:solidFill>
-                  <a:srgbClr val="1EA7DD"/>
-                </a:solidFill>
-                <a:latin typeface="Segoe UI Semibold"/>
-              </a:rPr>
-              <a:t>STUDI KASUS 2 · PENJUALAN RITEL</a:t>
-            </a:r>
-          </a:p>
-        </p:txBody>
-      </p:sp>
-      <p:sp>
-        <p:nvSpPr>
-          <p:cNvPr id="5" name="TextBox 4"/>
-          <p:cNvSpPr txBox="1"/>
-          <p:nvPr/>
-        </p:nvSpPr>
-        <p:spPr>
-          <a:xfrm>
-            <a:off x="822960" y="640080"/>
-            <a:ext cx="10607040" cy="566928"/>
-          </a:xfrm>
-          <a:prstGeom prst="rect">
-            <a:avLst/>
-          </a:prstGeom>
-          <a:noFill/>
-        </p:spPr>
-        <p:txBody>
-          <a:bodyPr wrap="square" anchor="t" lIns="0" rIns="0" tIns="0" bIns="0">
-            <a:spAutoFit/>
-          </a:bodyPr>
-          <a:lstStyle/>
-          <a:p>
-            <a:pPr algn="l">
-              <a:lnSpc>
-                <a:spcPct val="105000"/>
-              </a:lnSpc>
-              <a:spcBef>
-                <a:spcPts val="0"/>
-              </a:spcBef>
-              <a:spcAft>
-                <a:spcPts val="0"/>
-              </a:spcAft>
-            </a:pPr>
-            <a:r>
-              <a:rPr sz="2600" b="1">
-                <a:solidFill>
-                  <a:srgbClr val="123047"/>
-                </a:solidFill>
-                <a:latin typeface="Segoe UI Black"/>
-              </a:rPr>
-              <a:t>DASHBOARD </a:t>
-            </a:r>
-            <a:r>
-              <a:rPr sz="2600" b="1">
-                <a:solidFill>
-                  <a:srgbClr val="1EA7DD"/>
-                </a:solidFill>
-                <a:latin typeface="Segoe UI Black"/>
-              </a:rPr>
-              <a:t>INTERAKTIF (PLOTLY)</a:t>
-            </a:r>
-          </a:p>
-        </p:txBody>
-      </p:sp>
-      <p:sp>
-        <p:nvSpPr>
-          <p:cNvPr id="6" name="TextBox 5"/>
-          <p:cNvSpPr txBox="1"/>
-          <p:nvPr/>
-        </p:nvSpPr>
-        <p:spPr>
-          <a:xfrm>
-            <a:off x="566928" y="6373368"/>
-            <a:ext cx="6400800" cy="292608"/>
-          </a:xfrm>
-          <a:prstGeom prst="rect">
-            <a:avLst/>
-          </a:prstGeom>
-          <a:noFill/>
-        </p:spPr>
-        <p:txBody>
-          <a:bodyPr wrap="square" anchor="t" lIns="0" rIns="0" tIns="0" bIns="0">
-            <a:spAutoFit/>
-          </a:bodyPr>
-          <a:lstStyle/>
-          <a:p>
-            <a:pPr algn="l">
-              <a:lnSpc>
-                <a:spcPct val="105000"/>
-              </a:lnSpc>
-              <a:spcBef>
-                <a:spcPts val="0"/>
-              </a:spcBef>
-              <a:spcAft>
-                <a:spcPts val="0"/>
-              </a:spcAft>
-            </a:pPr>
-            <a:r>
-              <a:rPr sz="950" b="0">
-                <a:solidFill>
-                  <a:srgbClr val="8A98A0"/>
-                </a:solidFill>
-                <a:latin typeface="Segoe UI"/>
-              </a:rPr>
-              <a:t>final project sti · kelompok 5</a:t>
-            </a:r>
-          </a:p>
-        </p:txBody>
-      </p:sp>
-      <p:sp>
-        <p:nvSpPr>
-          <p:cNvPr id="7" name="TextBox 6"/>
-          <p:cNvSpPr txBox="1"/>
-          <p:nvPr/>
-        </p:nvSpPr>
-        <p:spPr>
-          <a:xfrm>
-            <a:off x="10972800" y="6355080"/>
-            <a:ext cx="822960" cy="320040"/>
-          </a:xfrm>
-          <a:prstGeom prst="rect">
-            <a:avLst/>
-          </a:prstGeom>
-          <a:noFill/>
-        </p:spPr>
-        <p:txBody>
-          <a:bodyPr wrap="square" anchor="t" lIns="0" rIns="0" tIns="0" bIns="0">
-            <a:spAutoFit/>
-          </a:bodyPr>
-          <a:lstStyle/>
-          <a:p>
-            <a:pPr algn="r">
-              <a:lnSpc>
-                <a:spcPct val="105000"/>
-              </a:lnSpc>
-              <a:spcBef>
-                <a:spcPts val="0"/>
-              </a:spcBef>
-              <a:spcAft>
-                <a:spcPts val="0"/>
-              </a:spcAft>
-            </a:pPr>
-            <a:r>
-              <a:rPr sz="1100" b="1">
-                <a:solidFill>
-                  <a:srgbClr val="1EA7DD"/>
-                </a:solidFill>
-                <a:latin typeface="Segoe UI Semibold"/>
-              </a:rPr>
-              <a:t>11</a:t>
-            </a:r>
-          </a:p>
-        </p:txBody>
-      </p:sp>
-      <p:sp>
-        <p:nvSpPr>
-          <p:cNvPr id="8" name="Snip Single Corner Rectangle 7"/>
-          <p:cNvSpPr/>
-          <p:nvPr/>
-        </p:nvSpPr>
-        <p:spPr>
-          <a:xfrm>
-            <a:off x="777240" y="1371600"/>
-            <a:ext cx="4125290" cy="4818888"/>
-          </a:xfrm>
-          <a:prstGeom prst="snip1Rect">
-            <a:avLst>
-              <a:gd name="adj" fmla="val 3000"/>
-            </a:avLst>
-          </a:prstGeom>
-          <a:noFill/>
-          <a:ln w="15875">
-            <a:solidFill>
-              <a:srgbClr val="D9E2E7"/>
-            </a:solidFill>
-          </a:ln>
-          <a:effectLst/>
-        </p:spPr>
-        <p:style>
-          <a:lnRef idx="1">
-            <a:schemeClr val="accent1"/>
-          </a:lnRef>
-          <a:fillRef idx="3">
-            <a:schemeClr val="accent1"/>
-          </a:fillRef>
-          <a:effectRef idx="2">
-            <a:schemeClr val="accent1"/>
-          </a:effectRef>
-          <a:fontRef idx="minor">
-            <a:schemeClr val="lt1"/>
-          </a:fontRef>
-        </p:style>
-        <p:txBody>
-          <a:bodyPr rtlCol="0" anchor="ctr"/>
-          <a:lstStyle/>
-          <a:p>
-            <a:pPr algn="ctr"/>
-          </a:p>
-        </p:txBody>
-      </p:sp>
-      <p:pic>
-        <p:nvPicPr>
-          <p:cNvPr id="9" name="Picture 8" descr="plotly_dashboard_preview.png"/>
-          <p:cNvPicPr>
-            <a:picLocks noChangeAspect="1"/>
-          </p:cNvPicPr>
-          <p:nvPr/>
-        </p:nvPicPr>
-        <p:blipFill>
-          <a:blip r:embed="rId3"/>
-          <a:stretch>
-            <a:fillRect/>
-          </a:stretch>
-        </p:blipFill>
-        <p:spPr>
-          <a:xfrm>
-            <a:off x="832104" y="1426464"/>
-            <a:ext cx="4015562" cy="4709160"/>
-          </a:xfrm>
-          <a:prstGeom prst="rect">
-            <a:avLst/>
-          </a:prstGeom>
-        </p:spPr>
-      </p:pic>
-      <p:sp>
-        <p:nvSpPr>
-          <p:cNvPr id="10" name="TextBox 9"/>
-          <p:cNvSpPr txBox="1"/>
-          <p:nvPr/>
-        </p:nvSpPr>
-        <p:spPr>
-          <a:xfrm>
-            <a:off x="5259146" y="1517904"/>
-            <a:ext cx="6079413" cy="365760"/>
-          </a:xfrm>
-          <a:prstGeom prst="rect">
-            <a:avLst/>
-          </a:prstGeom>
-          <a:noFill/>
-        </p:spPr>
-        <p:txBody>
-          <a:bodyPr wrap="square" anchor="t" lIns="0" rIns="0" tIns="0" bIns="0">
-            <a:spAutoFit/>
-          </a:bodyPr>
-          <a:lstStyle/>
-          <a:p>
-            <a:pPr algn="l">
-              <a:lnSpc>
-                <a:spcPct val="105000"/>
-              </a:lnSpc>
-              <a:spcBef>
-                <a:spcPts val="0"/>
-              </a:spcBef>
-              <a:spcAft>
-                <a:spcPts val="0"/>
-              </a:spcAft>
-            </a:pPr>
-            <a:r>
-              <a:rPr sz="1150" b="1">
-                <a:solidFill>
-                  <a:srgbClr val="1EA7DD"/>
-                </a:solidFill>
-                <a:latin typeface="Segoe UI Semibold"/>
-              </a:rPr>
-              <a:t>KOMPONEN</a:t>
-            </a:r>
-          </a:p>
-        </p:txBody>
-      </p:sp>
-      <p:sp>
-        <p:nvSpPr>
-          <p:cNvPr id="11" name="TextBox 10"/>
-          <p:cNvSpPr txBox="1"/>
-          <p:nvPr/>
-        </p:nvSpPr>
-        <p:spPr>
-          <a:xfrm>
-            <a:off x="5259146" y="1920240"/>
-            <a:ext cx="6079413" cy="4023360"/>
-          </a:xfrm>
-          <a:prstGeom prst="rect">
-            <a:avLst/>
-          </a:prstGeom>
-          <a:noFill/>
-        </p:spPr>
-        <p:txBody>
-          <a:bodyPr wrap="square" lIns="0" rIns="0" tIns="0" bIns="0">
-            <a:spAutoFit/>
-          </a:bodyPr>
-          <a:lstStyle/>
-          <a:p>
-            <a:pPr>
-              <a:lnSpc>
-                <a:spcPct val="112000"/>
-              </a:lnSpc>
-              <a:spcAft>
-                <a:spcPts val="1000"/>
-              </a:spcAft>
-            </a:pPr>
-            <a:r>
-              <a:rPr sz="1050">
-                <a:solidFill>
-                  <a:srgbClr val="1EA7DD"/>
-                </a:solidFill>
-                <a:latin typeface="Segoe UI"/>
-              </a:rPr>
-              <a:t>▪  </a:t>
-            </a:r>
-            <a:r>
-              <a:rPr sz="1250">
-                <a:solidFill>
-                  <a:srgbClr val="1E2C33"/>
-                </a:solidFill>
-                <a:latin typeface="Segoe UI"/>
-              </a:rPr>
-              <a:t>Scorecard KPI: revenue, transaksi, AOV, dan rata-rata diskon.</a:t>
-            </a:r>
-          </a:p>
-          <a:p>
-            <a:pPr>
-              <a:lnSpc>
-                <a:spcPct val="112000"/>
-              </a:lnSpc>
-              <a:spcAft>
-                <a:spcPts val="1000"/>
-              </a:spcAft>
-            </a:pPr>
-            <a:r>
-              <a:rPr sz="1050">
-                <a:solidFill>
-                  <a:srgbClr val="1EA7DD"/>
-                </a:solidFill>
-                <a:latin typeface="Segoe UI"/>
-              </a:rPr>
-              <a:t>▪  </a:t>
-            </a:r>
-            <a:r>
-              <a:rPr sz="1250">
-                <a:solidFill>
-                  <a:srgbClr val="1E2C33"/>
-                </a:solidFill>
-                <a:latin typeface="Segoe UI"/>
-              </a:rPr>
-              <a:t>Tren revenue mingguan beserta rata-rata 4 minggu (range slider dan dropdown tahun).</a:t>
-            </a:r>
-          </a:p>
-          <a:p>
-            <a:pPr>
-              <a:lnSpc>
-                <a:spcPct val="112000"/>
-              </a:lnSpc>
-              <a:spcAft>
-                <a:spcPts val="1000"/>
-              </a:spcAft>
-            </a:pPr>
-            <a:r>
-              <a:rPr sz="1050">
-                <a:solidFill>
-                  <a:srgbClr val="1EA7DD"/>
-                </a:solidFill>
-                <a:latin typeface="Segoe UI"/>
-              </a:rPr>
-              <a:t>▪  </a:t>
-            </a:r>
-            <a:r>
-              <a:rPr sz="1250">
-                <a:solidFill>
-                  <a:srgbClr val="1E2C33"/>
-                </a:solidFill>
-                <a:latin typeface="Segoe UI"/>
-              </a:rPr>
-              <a:t>Revenue per tahun dan pola musiman per bulan.</a:t>
-            </a:r>
-          </a:p>
-          <a:p>
-            <a:pPr>
-              <a:lnSpc>
-                <a:spcPct val="112000"/>
-              </a:lnSpc>
-              <a:spcAft>
-                <a:spcPts val="1000"/>
-              </a:spcAft>
-            </a:pPr>
-            <a:r>
-              <a:rPr sz="1050">
-                <a:solidFill>
-                  <a:srgbClr val="1EA7DD"/>
-                </a:solidFill>
-                <a:latin typeface="Segoe UI"/>
-              </a:rPr>
-              <a:t>▪  </a:t>
-            </a:r>
-            <a:r>
-              <a:rPr sz="1250">
-                <a:solidFill>
-                  <a:srgbClr val="1E2C33"/>
-                </a:solidFill>
-                <a:latin typeface="Segoe UI"/>
-              </a:rPr>
-              <a:t>AOV per tahun dan scatter diskon terhadap revenue.</a:t>
-            </a:r>
-          </a:p>
-        </p:txBody>
-      </p:sp>
-      <p:sp>
-        <p:nvSpPr>
-          <p:cNvPr id="12" name="TextBox 11"/>
-          <p:cNvSpPr txBox="1"/>
-          <p:nvPr/>
-        </p:nvSpPr>
-        <p:spPr>
-          <a:xfrm>
-            <a:off x="5259146" y="4983480"/>
-            <a:ext cx="6079413" cy="822960"/>
-          </a:xfrm>
-          <a:prstGeom prst="rect">
-            <a:avLst/>
-          </a:prstGeom>
-          <a:noFill/>
-        </p:spPr>
-        <p:txBody>
-          <a:bodyPr wrap="square" anchor="t" lIns="0" rIns="0" tIns="0" bIns="0">
-            <a:spAutoFit/>
-          </a:bodyPr>
-          <a:lstStyle/>
-          <a:p>
-            <a:pPr algn="l">
-              <a:lnSpc>
-                <a:spcPct val="112000"/>
-              </a:lnSpc>
-              <a:spcBef>
-                <a:spcPts val="0"/>
-              </a:spcBef>
-              <a:spcAft>
-                <a:spcPts val="0"/>
-              </a:spcAft>
-            </a:pPr>
-            <a:r>
-              <a:rPr sz="1150" b="1">
-                <a:solidFill>
-                  <a:srgbClr val="1EA7DD"/>
-                </a:solidFill>
-                <a:latin typeface="Segoe UI Semibold"/>
-              </a:rPr>
-              <a:t>Interaktif:  </a:t>
-            </a:r>
-            <a:r>
-              <a:rPr sz="1150" b="0">
-                <a:solidFill>
-                  <a:srgbClr val="8A98A0"/>
-                </a:solidFill>
-                <a:latin typeface="Segoe UI"/>
-              </a:rPr>
-              <a:t>hover, zoom, dan filter per tahun, langsung di dalam notebook.</a:t>
-            </a:r>
-          </a:p>
-        </p:txBody>
-      </p:sp>
-    </p:spTree>
-  </p:cSld>
-  <p:clrMapOvr>
-    <a:masterClrMapping/>
-  </p:clrMapOvr>
-</p:sld>
-</file>
-
-<file path=ppt/slides/slide12.xml><?xml version="1.0" encoding="utf-8"?>
-<p:sld xmlns:a="http://schemas.openxmlformats.org/drawingml/2006/main" xmlns:p="http://schemas.openxmlformats.org/presentationml/2006/main" xmlns:r="http://schemas.openxmlformats.org/officeDocument/2006/relationships">
-  <p:cSld>
-    <p:spTree>
-      <p:nvGrpSpPr>
-        <p:cNvPr id="1" name=""/>
-        <p:cNvGrpSpPr/>
-        <p:nvPr/>
-      </p:nvGrpSpPr>
-      <p:grpSpPr/>
-      <p:pic>
-        <p:nvPicPr>
-          <p:cNvPr id="2" name="Picture 1" descr="bg_light.png"/>
-          <p:cNvPicPr>
-            <a:picLocks noChangeAspect="1"/>
-          </p:cNvPicPr>
-          <p:nvPr/>
-        </p:nvPicPr>
-        <p:blipFill>
-          <a:blip r:embed="rId2"/>
-          <a:stretch>
-            <a:fillRect/>
-          </a:stretch>
-        </p:blipFill>
-        <p:spPr>
-          <a:xfrm>
-            <a:off x="0" y="0"/>
-            <a:ext cx="12191695" cy="6858000"/>
-          </a:xfrm>
-          <a:prstGeom prst="rect">
-            <a:avLst/>
-          </a:prstGeom>
-        </p:spPr>
-      </p:pic>
-      <p:sp>
-        <p:nvSpPr>
-          <p:cNvPr id="3" name="Rectangle 2"/>
-          <p:cNvSpPr/>
-          <p:nvPr/>
-        </p:nvSpPr>
-        <p:spPr>
-          <a:xfrm>
-            <a:off x="566928" y="475488"/>
-            <a:ext cx="146304" cy="603504"/>
-          </a:xfrm>
-          <a:prstGeom prst="rect">
-            <a:avLst/>
-          </a:prstGeom>
-          <a:solidFill>
-            <a:srgbClr val="1EA7DD"/>
-          </a:solidFill>
-          <a:ln>
-            <a:noFill/>
-          </a:ln>
-          <a:effectLst/>
-        </p:spPr>
-        <p:style>
-          <a:lnRef idx="1">
-            <a:schemeClr val="accent1"/>
-          </a:lnRef>
-          <a:fillRef idx="3">
-            <a:schemeClr val="accent1"/>
-          </a:fillRef>
-          <a:effectRef idx="2">
-            <a:schemeClr val="accent1"/>
-          </a:effectRef>
-          <a:fontRef idx="minor">
-            <a:schemeClr val="lt1"/>
-          </a:fontRef>
-        </p:style>
-        <p:txBody>
-          <a:bodyPr rtlCol="0" anchor="ctr"/>
-          <a:lstStyle/>
-          <a:p>
-            <a:pPr algn="ctr"/>
-          </a:p>
-        </p:txBody>
-      </p:sp>
-      <p:sp>
-        <p:nvSpPr>
-          <p:cNvPr id="4" name="TextBox 3"/>
-          <p:cNvSpPr txBox="1"/>
-          <p:nvPr/>
-        </p:nvSpPr>
-        <p:spPr>
-          <a:xfrm>
-            <a:off x="841248" y="420624"/>
-            <a:ext cx="10058400" cy="292608"/>
-          </a:xfrm>
-          <a:prstGeom prst="rect">
-            <a:avLst/>
-          </a:prstGeom>
-          <a:noFill/>
-        </p:spPr>
-        <p:txBody>
-          <a:bodyPr wrap="square" anchor="t" lIns="0" rIns="0" tIns="0" bIns="0">
-            <a:spAutoFit/>
-          </a:bodyPr>
-          <a:lstStyle/>
-          <a:p>
-            <a:pPr algn="l">
-              <a:lnSpc>
-                <a:spcPct val="105000"/>
-              </a:lnSpc>
-              <a:spcBef>
-                <a:spcPts val="0"/>
-              </a:spcBef>
-              <a:spcAft>
-                <a:spcPts val="0"/>
-              </a:spcAft>
-            </a:pPr>
-            <a:r>
-              <a:rPr sz="1100" b="1">
-                <a:solidFill>
-                  <a:srgbClr val="1EA7DD"/>
-                </a:solidFill>
-                <a:latin typeface="Segoe UI Semibold"/>
-              </a:rPr>
-              <a:t>STUDI KASUS 2 · PENJUALAN RITEL</a:t>
-            </a:r>
-          </a:p>
-        </p:txBody>
-      </p:sp>
-      <p:sp>
-        <p:nvSpPr>
-          <p:cNvPr id="5" name="TextBox 4"/>
-          <p:cNvSpPr txBox="1"/>
-          <p:nvPr/>
-        </p:nvSpPr>
-        <p:spPr>
-          <a:xfrm>
-            <a:off x="822960" y="640080"/>
-            <a:ext cx="10607040" cy="566928"/>
-          </a:xfrm>
-          <a:prstGeom prst="rect">
-            <a:avLst/>
-          </a:prstGeom>
-          <a:noFill/>
-        </p:spPr>
-        <p:txBody>
-          <a:bodyPr wrap="square" anchor="t" lIns="0" rIns="0" tIns="0" bIns="0">
-            <a:spAutoFit/>
-          </a:bodyPr>
-          <a:lstStyle/>
-          <a:p>
-            <a:pPr algn="l">
-              <a:lnSpc>
-                <a:spcPct val="105000"/>
-              </a:lnSpc>
-              <a:spcBef>
-                <a:spcPts val="0"/>
-              </a:spcBef>
-              <a:spcAft>
-                <a:spcPts val="0"/>
-              </a:spcAft>
-            </a:pPr>
-            <a:r>
-              <a:rPr sz="2600" b="1">
-                <a:solidFill>
-                  <a:srgbClr val="123047"/>
-                </a:solidFill>
-                <a:latin typeface="Segoe UI Black"/>
-              </a:rPr>
-              <a:t>TEMUAN &amp; </a:t>
-            </a:r>
-            <a:r>
-              <a:rPr sz="2600" b="1">
-                <a:solidFill>
-                  <a:srgbClr val="1EA7DD"/>
-                </a:solidFill>
-                <a:latin typeface="Segoe UI Black"/>
-              </a:rPr>
-              <a:t>REKOMENDASI</a:t>
-            </a:r>
-          </a:p>
-        </p:txBody>
-      </p:sp>
-      <p:sp>
-        <p:nvSpPr>
-          <p:cNvPr id="6" name="TextBox 5"/>
-          <p:cNvSpPr txBox="1"/>
-          <p:nvPr/>
-        </p:nvSpPr>
-        <p:spPr>
-          <a:xfrm>
-            <a:off x="566928" y="6373368"/>
-            <a:ext cx="6400800" cy="292608"/>
-          </a:xfrm>
-          <a:prstGeom prst="rect">
-            <a:avLst/>
-          </a:prstGeom>
-          <a:noFill/>
-        </p:spPr>
-        <p:txBody>
-          <a:bodyPr wrap="square" anchor="t" lIns="0" rIns="0" tIns="0" bIns="0">
-            <a:spAutoFit/>
-          </a:bodyPr>
-          <a:lstStyle/>
-          <a:p>
-            <a:pPr algn="l">
-              <a:lnSpc>
-                <a:spcPct val="105000"/>
-              </a:lnSpc>
-              <a:spcBef>
-                <a:spcPts val="0"/>
-              </a:spcBef>
-              <a:spcAft>
-                <a:spcPts val="0"/>
-              </a:spcAft>
-            </a:pPr>
-            <a:r>
-              <a:rPr sz="950" b="0">
-                <a:solidFill>
-                  <a:srgbClr val="8A98A0"/>
-                </a:solidFill>
-                <a:latin typeface="Segoe UI"/>
-              </a:rPr>
-              <a:t>final project sti · kelompok 5</a:t>
-            </a:r>
-          </a:p>
-        </p:txBody>
-      </p:sp>
-      <p:sp>
-        <p:nvSpPr>
-          <p:cNvPr id="7" name="TextBox 6"/>
-          <p:cNvSpPr txBox="1"/>
-          <p:nvPr/>
-        </p:nvSpPr>
-        <p:spPr>
-          <a:xfrm>
-            <a:off x="10972800" y="6355080"/>
-            <a:ext cx="822960" cy="320040"/>
-          </a:xfrm>
-          <a:prstGeom prst="rect">
-            <a:avLst/>
-          </a:prstGeom>
-          <a:noFill/>
-        </p:spPr>
-        <p:txBody>
-          <a:bodyPr wrap="square" anchor="t" lIns="0" rIns="0" tIns="0" bIns="0">
-            <a:spAutoFit/>
-          </a:bodyPr>
-          <a:lstStyle/>
-          <a:p>
-            <a:pPr algn="r">
-              <a:lnSpc>
-                <a:spcPct val="105000"/>
-              </a:lnSpc>
-              <a:spcBef>
-                <a:spcPts val="0"/>
-              </a:spcBef>
-              <a:spcAft>
-                <a:spcPts val="0"/>
-              </a:spcAft>
-            </a:pPr>
-            <a:r>
-              <a:rPr sz="1100" b="1">
-                <a:solidFill>
-                  <a:srgbClr val="1EA7DD"/>
-                </a:solidFill>
-                <a:latin typeface="Segoe UI Semibold"/>
-              </a:rPr>
-              <a:t>12</a:t>
-            </a:r>
-          </a:p>
-        </p:txBody>
-      </p:sp>
-      <p:sp>
-        <p:nvSpPr>
-          <p:cNvPr id="8" name="Snip Single Corner Rectangle 7"/>
-          <p:cNvSpPr/>
-          <p:nvPr/>
-        </p:nvSpPr>
-        <p:spPr>
-          <a:xfrm>
-            <a:off x="822960" y="1463040"/>
-            <a:ext cx="2542032" cy="1371600"/>
-          </a:xfrm>
-          <a:prstGeom prst="snip1Rect">
-            <a:avLst>
-              <a:gd name="adj" fmla="val 12000"/>
-            </a:avLst>
-          </a:prstGeom>
-          <a:solidFill>
-            <a:srgbClr val="FFFFFF"/>
-          </a:solidFill>
-          <a:ln w="15875">
-            <a:solidFill>
-              <a:srgbClr val="D9E2E7"/>
-            </a:solidFill>
-          </a:ln>
-          <a:effectLst/>
-        </p:spPr>
-        <p:style>
-          <a:lnRef idx="1">
-            <a:schemeClr val="accent1"/>
-          </a:lnRef>
-          <a:fillRef idx="3">
-            <a:schemeClr val="accent1"/>
-          </a:fillRef>
-          <a:effectRef idx="2">
-            <a:schemeClr val="accent1"/>
-          </a:effectRef>
-          <a:fontRef idx="minor">
-            <a:schemeClr val="lt1"/>
-          </a:fontRef>
-        </p:style>
-        <p:txBody>
-          <a:bodyPr rtlCol="0" anchor="ctr"/>
-          <a:lstStyle/>
-          <a:p>
-            <a:pPr algn="ctr"/>
-          </a:p>
-        </p:txBody>
-      </p:sp>
-      <p:sp>
-        <p:nvSpPr>
-          <p:cNvPr id="9" name="Rectangle 8"/>
-          <p:cNvSpPr/>
-          <p:nvPr/>
-        </p:nvSpPr>
-        <p:spPr>
-          <a:xfrm>
-            <a:off x="1051560" y="1737360"/>
-            <a:ext cx="457200" cy="73152"/>
-          </a:xfrm>
-          <a:prstGeom prst="rect">
-            <a:avLst/>
-          </a:prstGeom>
-          <a:solidFill>
-            <a:srgbClr val="1EA7DD"/>
-          </a:solidFill>
-          <a:ln>
-            <a:noFill/>
-          </a:ln>
-          <a:effectLst/>
-        </p:spPr>
-        <p:style>
-          <a:lnRef idx="1">
-            <a:schemeClr val="accent1"/>
-          </a:lnRef>
-          <a:fillRef idx="3">
-            <a:schemeClr val="accent1"/>
-          </a:fillRef>
-          <a:effectRef idx="2">
-            <a:schemeClr val="accent1"/>
-          </a:effectRef>
-          <a:fontRef idx="minor">
-            <a:schemeClr val="lt1"/>
-          </a:fontRef>
-        </p:style>
-        <p:txBody>
-          <a:bodyPr rtlCol="0" anchor="ctr"/>
-          <a:lstStyle/>
-          <a:p>
-            <a:pPr algn="ctr"/>
-          </a:p>
-        </p:txBody>
-      </p:sp>
-      <p:sp>
-        <p:nvSpPr>
-          <p:cNvPr id="10" name="TextBox 9"/>
-          <p:cNvSpPr txBox="1"/>
-          <p:nvPr/>
-        </p:nvSpPr>
-        <p:spPr>
-          <a:xfrm>
-            <a:off x="1051560" y="1874519"/>
-            <a:ext cx="2194560" cy="457200"/>
-          </a:xfrm>
-          <a:prstGeom prst="rect">
-            <a:avLst/>
-          </a:prstGeom>
-          <a:noFill/>
-        </p:spPr>
-        <p:txBody>
-          <a:bodyPr wrap="square" anchor="t" lIns="0" rIns="0" tIns="0" bIns="0">
-            <a:spAutoFit/>
-          </a:bodyPr>
-          <a:lstStyle/>
-          <a:p>
-            <a:pPr algn="l">
-              <a:lnSpc>
-                <a:spcPct val="105000"/>
-              </a:lnSpc>
-              <a:spcBef>
-                <a:spcPts val="0"/>
-              </a:spcBef>
-              <a:spcAft>
-                <a:spcPts val="0"/>
-              </a:spcAft>
-            </a:pPr>
-            <a:r>
-              <a:rPr sz="2500" b="1">
-                <a:solidFill>
-                  <a:srgbClr val="123047"/>
-                </a:solidFill>
-                <a:latin typeface="Segoe UI Black"/>
-              </a:rPr>
-              <a:t>5×</a:t>
-            </a:r>
-          </a:p>
-        </p:txBody>
-      </p:sp>
-      <p:sp>
-        <p:nvSpPr>
-          <p:cNvPr id="11" name="TextBox 10"/>
-          <p:cNvSpPr txBox="1"/>
-          <p:nvPr/>
-        </p:nvSpPr>
-        <p:spPr>
-          <a:xfrm>
-            <a:off x="1051560" y="2359152"/>
-            <a:ext cx="2286000" cy="640080"/>
-          </a:xfrm>
-          <a:prstGeom prst="rect">
-            <a:avLst/>
-          </a:prstGeom>
-          <a:noFill/>
-        </p:spPr>
-        <p:txBody>
-          <a:bodyPr wrap="square" anchor="t" lIns="0" rIns="0" tIns="0" bIns="0">
-            <a:spAutoFit/>
-          </a:bodyPr>
-          <a:lstStyle/>
-          <a:p>
-            <a:pPr algn="l">
-              <a:lnSpc>
-                <a:spcPct val="100000"/>
-              </a:lnSpc>
-              <a:spcBef>
-                <a:spcPts val="0"/>
-              </a:spcBef>
-              <a:spcAft>
-                <a:spcPts val="0"/>
-              </a:spcAft>
-            </a:pPr>
-            <a:r>
-              <a:rPr sz="1100" b="0">
-                <a:solidFill>
-                  <a:srgbClr val="8A98A0"/>
-                </a:solidFill>
-                <a:latin typeface="Segoe UI"/>
-              </a:rPr>
-              <a:t>Pertumbuhan revenue</a:t>
-            </a:r>
-          </a:p>
-          <a:p>
-            <a:pPr algn="l">
-              <a:lnSpc>
-                <a:spcPct val="100000"/>
-              </a:lnSpc>
-              <a:spcBef>
-                <a:spcPts val="0"/>
-              </a:spcBef>
-              <a:spcAft>
-                <a:spcPts val="0"/>
-              </a:spcAft>
-            </a:pPr>
-            <a:r>
-              <a:rPr sz="1100" b="0">
-                <a:solidFill>
-                  <a:srgbClr val="8A98A0"/>
-                </a:solidFill>
-                <a:latin typeface="Segoe UI"/>
-              </a:rPr>
-              <a:t>2023 → 2025</a:t>
-            </a:r>
-          </a:p>
-        </p:txBody>
-      </p:sp>
-      <p:sp>
-        <p:nvSpPr>
-          <p:cNvPr id="12" name="Snip Single Corner Rectangle 11"/>
-          <p:cNvSpPr/>
-          <p:nvPr/>
-        </p:nvSpPr>
-        <p:spPr>
-          <a:xfrm>
-            <a:off x="3493008" y="1463040"/>
-            <a:ext cx="2542032" cy="1371600"/>
-          </a:xfrm>
-          <a:prstGeom prst="snip1Rect">
-            <a:avLst>
-              <a:gd name="adj" fmla="val 12000"/>
-            </a:avLst>
-          </a:prstGeom>
-          <a:solidFill>
-            <a:srgbClr val="FFFFFF"/>
-          </a:solidFill>
-          <a:ln w="15875">
-            <a:solidFill>
-              <a:srgbClr val="D9E2E7"/>
-            </a:solidFill>
-          </a:ln>
-          <a:effectLst/>
-        </p:spPr>
-        <p:style>
-          <a:lnRef idx="1">
-            <a:schemeClr val="accent1"/>
-          </a:lnRef>
-          <a:fillRef idx="3">
-            <a:schemeClr val="accent1"/>
-          </a:fillRef>
-          <a:effectRef idx="2">
-            <a:schemeClr val="accent1"/>
-          </a:effectRef>
-          <a:fontRef idx="minor">
-            <a:schemeClr val="lt1"/>
-          </a:fontRef>
-        </p:style>
-        <p:txBody>
-          <a:bodyPr rtlCol="0" anchor="ctr"/>
-          <a:lstStyle/>
-          <a:p>
-            <a:pPr algn="ctr"/>
-          </a:p>
-        </p:txBody>
-      </p:sp>
-      <p:sp>
-        <p:nvSpPr>
-          <p:cNvPr id="13" name="Rectangle 12"/>
-          <p:cNvSpPr/>
-          <p:nvPr/>
-        </p:nvSpPr>
-        <p:spPr>
-          <a:xfrm>
-            <a:off x="3721608" y="1737360"/>
-            <a:ext cx="457200" cy="73152"/>
-          </a:xfrm>
-          <a:prstGeom prst="rect">
-            <a:avLst/>
-          </a:prstGeom>
-          <a:solidFill>
-            <a:srgbClr val="1EA7DD"/>
-          </a:solidFill>
-          <a:ln>
-            <a:noFill/>
-          </a:ln>
-          <a:effectLst/>
-        </p:spPr>
-        <p:style>
-          <a:lnRef idx="1">
-            <a:schemeClr val="accent1"/>
-          </a:lnRef>
-          <a:fillRef idx="3">
-            <a:schemeClr val="accent1"/>
-          </a:fillRef>
-          <a:effectRef idx="2">
-            <a:schemeClr val="accent1"/>
-          </a:effectRef>
-          <a:fontRef idx="minor">
-            <a:schemeClr val="lt1"/>
-          </a:fontRef>
-        </p:style>
-        <p:txBody>
-          <a:bodyPr rtlCol="0" anchor="ctr"/>
-          <a:lstStyle/>
-          <a:p>
-            <a:pPr algn="ctr"/>
-          </a:p>
-        </p:txBody>
-      </p:sp>
-      <p:sp>
-        <p:nvSpPr>
-          <p:cNvPr id="14" name="TextBox 13"/>
-          <p:cNvSpPr txBox="1"/>
-          <p:nvPr/>
-        </p:nvSpPr>
-        <p:spPr>
-          <a:xfrm>
-            <a:off x="3721608" y="1874519"/>
-            <a:ext cx="2194560" cy="457200"/>
-          </a:xfrm>
-          <a:prstGeom prst="rect">
-            <a:avLst/>
-          </a:prstGeom>
-          <a:noFill/>
-        </p:spPr>
-        <p:txBody>
-          <a:bodyPr wrap="square" anchor="t" lIns="0" rIns="0" tIns="0" bIns="0">
-            <a:spAutoFit/>
-          </a:bodyPr>
-          <a:lstStyle/>
-          <a:p>
-            <a:pPr algn="l">
-              <a:lnSpc>
-                <a:spcPct val="105000"/>
-              </a:lnSpc>
-              <a:spcBef>
-                <a:spcPts val="0"/>
-              </a:spcBef>
-              <a:spcAft>
-                <a:spcPts val="0"/>
-              </a:spcAft>
-            </a:pPr>
-            <a:r>
-              <a:rPr sz="2500" b="1">
-                <a:solidFill>
-                  <a:srgbClr val="123047"/>
-                </a:solidFill>
-                <a:latin typeface="Segoe UI Black"/>
-              </a:rPr>
-              <a:t>AOV ↑</a:t>
-            </a:r>
-          </a:p>
-        </p:txBody>
-      </p:sp>
-      <p:sp>
-        <p:nvSpPr>
-          <p:cNvPr id="15" name="TextBox 14"/>
-          <p:cNvSpPr txBox="1"/>
-          <p:nvPr/>
-        </p:nvSpPr>
-        <p:spPr>
-          <a:xfrm>
-            <a:off x="3721608" y="2359152"/>
-            <a:ext cx="2286000" cy="640080"/>
-          </a:xfrm>
-          <a:prstGeom prst="rect">
-            <a:avLst/>
-          </a:prstGeom>
-          <a:noFill/>
-        </p:spPr>
-        <p:txBody>
-          <a:bodyPr wrap="square" anchor="t" lIns="0" rIns="0" tIns="0" bIns="0">
-            <a:spAutoFit/>
-          </a:bodyPr>
-          <a:lstStyle/>
-          <a:p>
-            <a:pPr algn="l">
-              <a:lnSpc>
-                <a:spcPct val="100000"/>
-              </a:lnSpc>
-              <a:spcBef>
-                <a:spcPts val="0"/>
-              </a:spcBef>
-              <a:spcAft>
-                <a:spcPts val="0"/>
-              </a:spcAft>
-            </a:pPr>
-            <a:r>
-              <a:rPr sz="1100" b="0">
-                <a:solidFill>
-                  <a:srgbClr val="8A98A0"/>
-                </a:solidFill>
-                <a:latin typeface="Segoe UI"/>
-              </a:rPr>
-              <a:t>Pendorong utama</a:t>
-            </a:r>
-          </a:p>
-          <a:p>
-            <a:pPr algn="l">
-              <a:lnSpc>
-                <a:spcPct val="100000"/>
-              </a:lnSpc>
-              <a:spcBef>
-                <a:spcPts val="0"/>
-              </a:spcBef>
-              <a:spcAft>
-                <a:spcPts val="0"/>
-              </a:spcAft>
-            </a:pPr>
-            <a:r>
-              <a:rPr sz="1100" b="0">
-                <a:solidFill>
-                  <a:srgbClr val="8A98A0"/>
-                </a:solidFill>
-                <a:latin typeface="Segoe UI"/>
-              </a:rPr>
-              <a:t>(bukan volume)</a:t>
-            </a:r>
-          </a:p>
-        </p:txBody>
-      </p:sp>
-      <p:sp>
-        <p:nvSpPr>
-          <p:cNvPr id="16" name="Snip Single Corner Rectangle 15"/>
-          <p:cNvSpPr/>
-          <p:nvPr/>
-        </p:nvSpPr>
-        <p:spPr>
-          <a:xfrm>
-            <a:off x="6163056" y="1463040"/>
-            <a:ext cx="2542032" cy="1371600"/>
-          </a:xfrm>
-          <a:prstGeom prst="snip1Rect">
-            <a:avLst>
-              <a:gd name="adj" fmla="val 12000"/>
-            </a:avLst>
-          </a:prstGeom>
-          <a:solidFill>
-            <a:srgbClr val="FFFFFF"/>
-          </a:solidFill>
-          <a:ln w="15875">
-            <a:solidFill>
-              <a:srgbClr val="D9E2E7"/>
-            </a:solidFill>
-          </a:ln>
-          <a:effectLst/>
-        </p:spPr>
-        <p:style>
-          <a:lnRef idx="1">
-            <a:schemeClr val="accent1"/>
-          </a:lnRef>
-          <a:fillRef idx="3">
-            <a:schemeClr val="accent1"/>
-          </a:fillRef>
-          <a:effectRef idx="2">
-            <a:schemeClr val="accent1"/>
-          </a:effectRef>
-          <a:fontRef idx="minor">
-            <a:schemeClr val="lt1"/>
-          </a:fontRef>
-        </p:style>
-        <p:txBody>
-          <a:bodyPr rtlCol="0" anchor="ctr"/>
-          <a:lstStyle/>
-          <a:p>
-            <a:pPr algn="ctr"/>
-          </a:p>
-        </p:txBody>
-      </p:sp>
-      <p:sp>
-        <p:nvSpPr>
-          <p:cNvPr id="17" name="Rectangle 16"/>
-          <p:cNvSpPr/>
-          <p:nvPr/>
-        </p:nvSpPr>
-        <p:spPr>
-          <a:xfrm>
-            <a:off x="6391656" y="1737360"/>
-            <a:ext cx="457200" cy="73152"/>
-          </a:xfrm>
-          <a:prstGeom prst="rect">
-            <a:avLst/>
-          </a:prstGeom>
-          <a:solidFill>
-            <a:srgbClr val="1EA7DD"/>
-          </a:solidFill>
-          <a:ln>
-            <a:noFill/>
-          </a:ln>
-          <a:effectLst/>
-        </p:spPr>
-        <p:style>
-          <a:lnRef idx="1">
-            <a:schemeClr val="accent1"/>
-          </a:lnRef>
-          <a:fillRef idx="3">
-            <a:schemeClr val="accent1"/>
-          </a:fillRef>
-          <a:effectRef idx="2">
-            <a:schemeClr val="accent1"/>
-          </a:effectRef>
-          <a:fontRef idx="minor">
-            <a:schemeClr val="lt1"/>
-          </a:fontRef>
-        </p:style>
-        <p:txBody>
-          <a:bodyPr rtlCol="0" anchor="ctr"/>
-          <a:lstStyle/>
-          <a:p>
-            <a:pPr algn="ctr"/>
-          </a:p>
-        </p:txBody>
-      </p:sp>
-      <p:sp>
-        <p:nvSpPr>
-          <p:cNvPr id="18" name="TextBox 17"/>
-          <p:cNvSpPr txBox="1"/>
-          <p:nvPr/>
-        </p:nvSpPr>
-        <p:spPr>
-          <a:xfrm>
-            <a:off x="6391656" y="1874519"/>
-            <a:ext cx="2194560" cy="457200"/>
-          </a:xfrm>
-          <a:prstGeom prst="rect">
-            <a:avLst/>
-          </a:prstGeom>
-          <a:noFill/>
-        </p:spPr>
-        <p:txBody>
-          <a:bodyPr wrap="square" anchor="t" lIns="0" rIns="0" tIns="0" bIns="0">
-            <a:spAutoFit/>
-          </a:bodyPr>
-          <a:lstStyle/>
-          <a:p>
-            <a:pPr algn="l">
-              <a:lnSpc>
-                <a:spcPct val="105000"/>
-              </a:lnSpc>
-              <a:spcBef>
-                <a:spcPts val="0"/>
-              </a:spcBef>
-              <a:spcAft>
-                <a:spcPts val="0"/>
-              </a:spcAft>
-            </a:pPr>
-            <a:r>
-              <a:rPr sz="2500" b="1">
-                <a:solidFill>
-                  <a:srgbClr val="123047"/>
-                </a:solidFill>
-                <a:latin typeface="Segoe UI Black"/>
-              </a:rPr>
-              <a:t>~1,3</a:t>
-            </a:r>
-          </a:p>
-        </p:txBody>
-      </p:sp>
-      <p:sp>
-        <p:nvSpPr>
-          <p:cNvPr id="19" name="TextBox 18"/>
-          <p:cNvSpPr txBox="1"/>
-          <p:nvPr/>
-        </p:nvSpPr>
-        <p:spPr>
-          <a:xfrm>
-            <a:off x="6391656" y="2359152"/>
-            <a:ext cx="2286000" cy="640080"/>
-          </a:xfrm>
-          <a:prstGeom prst="rect">
-            <a:avLst/>
-          </a:prstGeom>
-          <a:noFill/>
-        </p:spPr>
-        <p:txBody>
-          <a:bodyPr wrap="square" anchor="t" lIns="0" rIns="0" tIns="0" bIns="0">
-            <a:spAutoFit/>
-          </a:bodyPr>
-          <a:lstStyle/>
-          <a:p>
-            <a:pPr algn="l">
-              <a:lnSpc>
-                <a:spcPct val="100000"/>
-              </a:lnSpc>
-              <a:spcBef>
-                <a:spcPts val="0"/>
-              </a:spcBef>
-              <a:spcAft>
-                <a:spcPts val="0"/>
-              </a:spcAft>
-            </a:pPr>
-            <a:r>
-              <a:rPr sz="1100" b="0">
-                <a:solidFill>
-                  <a:srgbClr val="8A98A0"/>
-                </a:solidFill>
-                <a:latin typeface="Segoe UI"/>
-              </a:rPr>
-              <a:t>Unit per transaksi</a:t>
-            </a:r>
-          </a:p>
-          <a:p>
-            <a:pPr algn="l">
-              <a:lnSpc>
-                <a:spcPct val="100000"/>
-              </a:lnSpc>
-              <a:spcBef>
-                <a:spcPts val="0"/>
-              </a:spcBef>
-              <a:spcAft>
-                <a:spcPts val="0"/>
-              </a:spcAft>
-            </a:pPr>
-            <a:r>
-              <a:rPr sz="1100" b="0">
-                <a:solidFill>
-                  <a:srgbClr val="8A98A0"/>
-                </a:solidFill>
-                <a:latin typeface="Segoe UI"/>
-              </a:rPr>
-              <a:t>(keranjang kecil)</a:t>
-            </a:r>
-          </a:p>
-        </p:txBody>
-      </p:sp>
-      <p:sp>
-        <p:nvSpPr>
-          <p:cNvPr id="20" name="Snip Single Corner Rectangle 19"/>
-          <p:cNvSpPr/>
-          <p:nvPr/>
-        </p:nvSpPr>
-        <p:spPr>
-          <a:xfrm>
-            <a:off x="8833104" y="1463040"/>
-            <a:ext cx="2542032" cy="1371600"/>
-          </a:xfrm>
-          <a:prstGeom prst="snip1Rect">
-            <a:avLst>
-              <a:gd name="adj" fmla="val 12000"/>
-            </a:avLst>
-          </a:prstGeom>
-          <a:solidFill>
-            <a:srgbClr val="FFFFFF"/>
-          </a:solidFill>
-          <a:ln w="15875">
-            <a:solidFill>
-              <a:srgbClr val="D9E2E7"/>
-            </a:solidFill>
-          </a:ln>
-          <a:effectLst/>
-        </p:spPr>
-        <p:style>
-          <a:lnRef idx="1">
-            <a:schemeClr val="accent1"/>
-          </a:lnRef>
-          <a:fillRef idx="3">
-            <a:schemeClr val="accent1"/>
-          </a:fillRef>
-          <a:effectRef idx="2">
-            <a:schemeClr val="accent1"/>
-          </a:effectRef>
-          <a:fontRef idx="minor">
-            <a:schemeClr val="lt1"/>
-          </a:fontRef>
-        </p:style>
-        <p:txBody>
-          <a:bodyPr rtlCol="0" anchor="ctr"/>
-          <a:lstStyle/>
-          <a:p>
-            <a:pPr algn="ctr"/>
-          </a:p>
-        </p:txBody>
-      </p:sp>
-      <p:sp>
-        <p:nvSpPr>
-          <p:cNvPr id="21" name="Rectangle 20"/>
-          <p:cNvSpPr/>
-          <p:nvPr/>
-        </p:nvSpPr>
-        <p:spPr>
-          <a:xfrm>
-            <a:off x="9061704" y="1737360"/>
-            <a:ext cx="457200" cy="73152"/>
-          </a:xfrm>
-          <a:prstGeom prst="rect">
-            <a:avLst/>
-          </a:prstGeom>
-          <a:solidFill>
-            <a:srgbClr val="1EA7DD"/>
-          </a:solidFill>
-          <a:ln>
-            <a:noFill/>
-          </a:ln>
-          <a:effectLst/>
-        </p:spPr>
-        <p:style>
-          <a:lnRef idx="1">
-            <a:schemeClr val="accent1"/>
-          </a:lnRef>
-          <a:fillRef idx="3">
-            <a:schemeClr val="accent1"/>
-          </a:fillRef>
-          <a:effectRef idx="2">
-            <a:schemeClr val="accent1"/>
-          </a:effectRef>
-          <a:fontRef idx="minor">
-            <a:schemeClr val="lt1"/>
-          </a:fontRef>
-        </p:style>
-        <p:txBody>
-          <a:bodyPr rtlCol="0" anchor="ctr"/>
-          <a:lstStyle/>
-          <a:p>
-            <a:pPr algn="ctr"/>
-          </a:p>
-        </p:txBody>
-      </p:sp>
-      <p:sp>
-        <p:nvSpPr>
-          <p:cNvPr id="22" name="TextBox 21"/>
-          <p:cNvSpPr txBox="1"/>
-          <p:nvPr/>
-        </p:nvSpPr>
-        <p:spPr>
-          <a:xfrm>
-            <a:off x="9061704" y="1874519"/>
-            <a:ext cx="2194560" cy="457200"/>
-          </a:xfrm>
-          <a:prstGeom prst="rect">
-            <a:avLst/>
-          </a:prstGeom>
-          <a:noFill/>
-        </p:spPr>
-        <p:txBody>
-          <a:bodyPr wrap="square" anchor="t" lIns="0" rIns="0" tIns="0" bIns="0">
-            <a:spAutoFit/>
-          </a:bodyPr>
-          <a:lstStyle/>
-          <a:p>
-            <a:pPr algn="l">
-              <a:lnSpc>
-                <a:spcPct val="105000"/>
-              </a:lnSpc>
-              <a:spcBef>
-                <a:spcPts val="0"/>
-              </a:spcBef>
-              <a:spcAft>
-                <a:spcPts val="0"/>
-              </a:spcAft>
-            </a:pPr>
-            <a:r>
-              <a:rPr sz="2500" b="1">
-                <a:solidFill>
-                  <a:srgbClr val="123047"/>
-                </a:solidFill>
-                <a:latin typeface="Segoe UI Black"/>
-              </a:rPr>
-              <a:t>Jun–Jul</a:t>
-            </a:r>
-          </a:p>
-        </p:txBody>
-      </p:sp>
-      <p:sp>
-        <p:nvSpPr>
-          <p:cNvPr id="23" name="TextBox 22"/>
-          <p:cNvSpPr txBox="1"/>
-          <p:nvPr/>
-        </p:nvSpPr>
-        <p:spPr>
-          <a:xfrm>
-            <a:off x="9061704" y="2359152"/>
-            <a:ext cx="2286000" cy="640080"/>
-          </a:xfrm>
-          <a:prstGeom prst="rect">
-            <a:avLst/>
-          </a:prstGeom>
-          <a:noFill/>
-        </p:spPr>
-        <p:txBody>
-          <a:bodyPr wrap="square" anchor="t" lIns="0" rIns="0" tIns="0" bIns="0">
-            <a:spAutoFit/>
-          </a:bodyPr>
-          <a:lstStyle/>
-          <a:p>
-            <a:pPr algn="l">
-              <a:lnSpc>
-                <a:spcPct val="100000"/>
-              </a:lnSpc>
-              <a:spcBef>
-                <a:spcPts val="0"/>
-              </a:spcBef>
-              <a:spcAft>
-                <a:spcPts val="0"/>
-              </a:spcAft>
-            </a:pPr>
-            <a:r>
-              <a:rPr sz="1100" b="0">
-                <a:solidFill>
-                  <a:srgbClr val="8A98A0"/>
-                </a:solidFill>
-                <a:latin typeface="Segoe UI"/>
-              </a:rPr>
-              <a:t>Puncak musiman</a:t>
-            </a:r>
-          </a:p>
-          <a:p>
-            <a:pPr algn="l">
-              <a:lnSpc>
-                <a:spcPct val="100000"/>
-              </a:lnSpc>
-              <a:spcBef>
-                <a:spcPts val="0"/>
-              </a:spcBef>
-              <a:spcAft>
-                <a:spcPts val="0"/>
-              </a:spcAft>
-            </a:pPr>
-            <a:r>
-              <a:rPr sz="1100" b="0">
-                <a:solidFill>
-                  <a:srgbClr val="8A98A0"/>
-                </a:solidFill>
-                <a:latin typeface="Segoe UI"/>
-              </a:rPr>
-              <a:t>(juga Januari)</a:t>
-            </a:r>
-          </a:p>
-        </p:txBody>
-      </p:sp>
-      <p:sp>
-        <p:nvSpPr>
-          <p:cNvPr id="24" name="TextBox 23"/>
-          <p:cNvSpPr txBox="1"/>
-          <p:nvPr/>
-        </p:nvSpPr>
-        <p:spPr>
-          <a:xfrm>
-            <a:off x="822960" y="3127248"/>
-            <a:ext cx="5212080" cy="365760"/>
-          </a:xfrm>
-          <a:prstGeom prst="rect">
-            <a:avLst/>
-          </a:prstGeom>
-          <a:noFill/>
-        </p:spPr>
-        <p:txBody>
-          <a:bodyPr wrap="square" anchor="t" lIns="0" rIns="0" tIns="0" bIns="0">
-            <a:spAutoFit/>
-          </a:bodyPr>
-          <a:lstStyle/>
-          <a:p>
-            <a:pPr algn="l">
-              <a:lnSpc>
-                <a:spcPct val="105000"/>
-              </a:lnSpc>
-              <a:spcBef>
-                <a:spcPts val="0"/>
-              </a:spcBef>
-              <a:spcAft>
-                <a:spcPts val="0"/>
-              </a:spcAft>
-            </a:pPr>
-            <a:r>
-              <a:rPr sz="1150" b="1">
-                <a:solidFill>
-                  <a:srgbClr val="1EA7DD"/>
-                </a:solidFill>
-                <a:latin typeface="Segoe UI Semibold"/>
-              </a:rPr>
-              <a:t>TEMUAN</a:t>
-            </a:r>
-          </a:p>
-        </p:txBody>
-      </p:sp>
-      <p:sp>
-        <p:nvSpPr>
-          <p:cNvPr id="25" name="TextBox 24"/>
-          <p:cNvSpPr txBox="1"/>
-          <p:nvPr/>
-        </p:nvSpPr>
-        <p:spPr>
-          <a:xfrm>
-            <a:off x="822960" y="3511296"/>
-            <a:ext cx="5257800" cy="2743200"/>
-          </a:xfrm>
-          <a:prstGeom prst="rect">
-            <a:avLst/>
-          </a:prstGeom>
-          <a:noFill/>
-        </p:spPr>
-        <p:txBody>
-          <a:bodyPr wrap="square" lIns="0" rIns="0" tIns="0" bIns="0">
-            <a:spAutoFit/>
-          </a:bodyPr>
-          <a:lstStyle/>
-          <a:p>
-            <a:pPr>
-              <a:lnSpc>
-                <a:spcPct val="112000"/>
-              </a:lnSpc>
-              <a:spcAft>
-                <a:spcPts val="900"/>
-              </a:spcAft>
-            </a:pPr>
-            <a:r>
-              <a:rPr sz="1050">
-                <a:solidFill>
-                  <a:srgbClr val="1EA7DD"/>
-                </a:solidFill>
-                <a:latin typeface="Segoe UI"/>
-              </a:rPr>
-              <a:t>▪  </a:t>
-            </a:r>
-            <a:r>
-              <a:rPr sz="1250">
-                <a:solidFill>
-                  <a:srgbClr val="1E2C33"/>
-                </a:solidFill>
-                <a:latin typeface="Segoe UI"/>
-              </a:rPr>
-              <a:t>Revenue tahunan tumbuh sekitar 5 kali lipat dalam dua tahun (2023 → 2025).</a:t>
-            </a:r>
-          </a:p>
-          <a:p>
-            <a:pPr>
-              <a:lnSpc>
-                <a:spcPct val="112000"/>
-              </a:lnSpc>
-              <a:spcAft>
-                <a:spcPts val="900"/>
-              </a:spcAft>
-            </a:pPr>
-            <a:r>
-              <a:rPr sz="1050">
-                <a:solidFill>
-                  <a:srgbClr val="1EA7DD"/>
-                </a:solidFill>
-                <a:latin typeface="Segoe UI"/>
-              </a:rPr>
-              <a:t>▪  </a:t>
-            </a:r>
-            <a:r>
-              <a:rPr sz="1250">
-                <a:solidFill>
-                  <a:srgbClr val="1E2C33"/>
-                </a:solidFill>
-                <a:latin typeface="Segoe UI"/>
-              </a:rPr>
-              <a:t>Pendorong utamanya adalah kenaikan nilai per transaksi (AOV), bukan semata jumlah transaksi.</a:t>
-            </a:r>
-          </a:p>
-          <a:p>
-            <a:pPr>
-              <a:lnSpc>
-                <a:spcPct val="112000"/>
-              </a:lnSpc>
-              <a:spcAft>
-                <a:spcPts val="900"/>
-              </a:spcAft>
-            </a:pPr>
-            <a:r>
-              <a:rPr sz="1050">
-                <a:solidFill>
-                  <a:srgbClr val="1EA7DD"/>
-                </a:solidFill>
-                <a:latin typeface="Segoe UI"/>
-              </a:rPr>
-              <a:t>▪  </a:t>
-            </a:r>
-            <a:r>
-              <a:rPr sz="1250">
-                <a:solidFill>
-                  <a:srgbClr val="1E2C33"/>
-                </a:solidFill>
-                <a:latin typeface="Segoe UI"/>
-              </a:rPr>
-              <a:t>Diskon belum efektif: rata-rata mencapai ~36%, tetapi korelasinya terhadap revenue mendekati nol, mengindikasikan over-discounting.</a:t>
-            </a:r>
-          </a:p>
-        </p:txBody>
-      </p:sp>
-      <p:sp>
-        <p:nvSpPr>
-          <p:cNvPr id="26" name="Snip Single Corner Rectangle 25"/>
-          <p:cNvSpPr/>
-          <p:nvPr/>
-        </p:nvSpPr>
-        <p:spPr>
-          <a:xfrm>
-            <a:off x="6400800" y="3127248"/>
-            <a:ext cx="4965192" cy="2907792"/>
-          </a:xfrm>
-          <a:prstGeom prst="snip1Rect">
-            <a:avLst>
-              <a:gd name="adj" fmla="val 6000"/>
-            </a:avLst>
-          </a:prstGeom>
-          <a:solidFill>
-            <a:srgbClr val="F3F7F9"/>
-          </a:solidFill>
-          <a:ln w="15875">
-            <a:solidFill>
-              <a:srgbClr val="D9E2E7"/>
-            </a:solidFill>
-          </a:ln>
-          <a:effectLst/>
-        </p:spPr>
-        <p:style>
-          <a:lnRef idx="1">
-            <a:schemeClr val="accent1"/>
-          </a:lnRef>
-          <a:fillRef idx="3">
-            <a:schemeClr val="accent1"/>
-          </a:fillRef>
-          <a:effectRef idx="2">
-            <a:schemeClr val="accent1"/>
-          </a:effectRef>
-          <a:fontRef idx="minor">
-            <a:schemeClr val="lt1"/>
-          </a:fontRef>
-        </p:style>
-        <p:txBody>
-          <a:bodyPr rtlCol="0" anchor="ctr"/>
-          <a:lstStyle/>
-          <a:p>
-            <a:pPr algn="ctr"/>
-          </a:p>
-        </p:txBody>
-      </p:sp>
-      <p:sp>
-        <p:nvSpPr>
-          <p:cNvPr id="27" name="TextBox 26"/>
-          <p:cNvSpPr txBox="1"/>
-          <p:nvPr/>
-        </p:nvSpPr>
-        <p:spPr>
-          <a:xfrm>
-            <a:off x="6720840" y="3310128"/>
-            <a:ext cx="4389120" cy="365760"/>
-          </a:xfrm>
-          <a:prstGeom prst="rect">
-            <a:avLst/>
-          </a:prstGeom>
-          <a:noFill/>
-        </p:spPr>
-        <p:txBody>
-          <a:bodyPr wrap="square" anchor="t" lIns="0" rIns="0" tIns="0" bIns="0">
-            <a:spAutoFit/>
-          </a:bodyPr>
-          <a:lstStyle/>
-          <a:p>
-            <a:pPr algn="l">
-              <a:lnSpc>
-                <a:spcPct val="105000"/>
-              </a:lnSpc>
-              <a:spcBef>
-                <a:spcPts val="0"/>
-              </a:spcBef>
-              <a:spcAft>
-                <a:spcPts val="0"/>
-              </a:spcAft>
-            </a:pPr>
-            <a:r>
-              <a:rPr sz="1150" b="1">
-                <a:solidFill>
-                  <a:srgbClr val="1EA7DD"/>
-                </a:solidFill>
-                <a:latin typeface="Segoe UI Semibold"/>
-              </a:rPr>
-              <a:t>REKOMENDASI</a:t>
-            </a:r>
-          </a:p>
-        </p:txBody>
-      </p:sp>
-      <p:sp>
-        <p:nvSpPr>
-          <p:cNvPr id="28" name="TextBox 27"/>
-          <p:cNvSpPr txBox="1"/>
-          <p:nvPr/>
-        </p:nvSpPr>
-        <p:spPr>
-          <a:xfrm>
-            <a:off x="6720840" y="3712463"/>
-            <a:ext cx="4389120" cy="2286000"/>
-          </a:xfrm>
-          <a:prstGeom prst="rect">
-            <a:avLst/>
-          </a:prstGeom>
-          <a:noFill/>
-        </p:spPr>
-        <p:txBody>
-          <a:bodyPr wrap="square" lIns="0" rIns="0" tIns="0" bIns="0">
-            <a:spAutoFit/>
-          </a:bodyPr>
-          <a:lstStyle/>
-          <a:p>
-            <a:pPr>
-              <a:lnSpc>
-                <a:spcPct val="112000"/>
-              </a:lnSpc>
-              <a:spcAft>
-                <a:spcPts val="800"/>
-              </a:spcAft>
-            </a:pPr>
-            <a:r>
-              <a:rPr sz="1000">
-                <a:solidFill>
-                  <a:srgbClr val="1EA7DD"/>
-                </a:solidFill>
-                <a:latin typeface="Segoe UI"/>
-              </a:rPr>
-              <a:t>▪  </a:t>
-            </a:r>
-            <a:r>
-              <a:rPr sz="1200">
-                <a:solidFill>
-                  <a:srgbClr val="1E2C33"/>
-                </a:solidFill>
-                <a:latin typeface="Segoe UI"/>
-              </a:rPr>
-              <a:t>Jaga momentum AOV lewat bundling dan upsell, mengingat keranjang masih sekitar 1,3 item.</a:t>
-            </a:r>
-          </a:p>
-          <a:p>
-            <a:pPr>
-              <a:lnSpc>
-                <a:spcPct val="112000"/>
-              </a:lnSpc>
-              <a:spcAft>
-                <a:spcPts val="800"/>
-              </a:spcAft>
-            </a:pPr>
-            <a:r>
-              <a:rPr sz="1000">
-                <a:solidFill>
-                  <a:srgbClr val="1EA7DD"/>
-                </a:solidFill>
-                <a:latin typeface="Segoe UI"/>
-              </a:rPr>
-              <a:t>▪  </a:t>
-            </a:r>
-            <a:r>
-              <a:rPr sz="1200">
-                <a:solidFill>
-                  <a:srgbClr val="1E2C33"/>
-                </a:solidFill>
-                <a:latin typeface="Segoe UI"/>
-              </a:rPr>
-              <a:t>Evaluasi strategi diskon dengan menguji pengurangan diskon dan mengukur dampaknya terhadap revenue.</a:t>
-            </a:r>
-          </a:p>
-          <a:p>
-            <a:pPr>
-              <a:lnSpc>
-                <a:spcPct val="112000"/>
-              </a:lnSpc>
-              <a:spcAft>
-                <a:spcPts val="800"/>
-              </a:spcAft>
-            </a:pPr>
-            <a:r>
-              <a:rPr sz="1000">
-                <a:solidFill>
-                  <a:srgbClr val="1EA7DD"/>
-                </a:solidFill>
-                <a:latin typeface="Segoe UI"/>
-              </a:rPr>
-              <a:t>▪  </a:t>
-            </a:r>
-            <a:r>
-              <a:rPr sz="1200">
-                <a:solidFill>
-                  <a:srgbClr val="1E2C33"/>
-                </a:solidFill>
-                <a:latin typeface="Segoe UI"/>
-              </a:rPr>
-              <a:t>Manfaatkan puncak musiman (Juni–Juli dan Januari) untuk perencanaan stok dan promo.</a:t>
-            </a:r>
-          </a:p>
-          <a:p>
-            <a:pPr>
-              <a:lnSpc>
-                <a:spcPct val="112000"/>
-              </a:lnSpc>
-              <a:spcAft>
-                <a:spcPts val="800"/>
-              </a:spcAft>
-            </a:pPr>
-            <a:r>
-              <a:rPr sz="1000">
-                <a:solidFill>
-                  <a:srgbClr val="1EA7DD"/>
-                </a:solidFill>
-                <a:latin typeface="Segoe UI"/>
-              </a:rPr>
-              <a:t>▪  </a:t>
-            </a:r>
-            <a:r>
-              <a:rPr sz="1200">
-                <a:solidFill>
-                  <a:srgbClr val="1E2C33"/>
-                </a:solidFill>
-                <a:latin typeface="Segoe UI"/>
-              </a:rPr>
-              <a:t>Dorong akuisisi dan retensi pelanggan karena jumlahnya cenderung stagnan.</a:t>
-            </a:r>
-          </a:p>
-        </p:txBody>
-      </p:sp>
-    </p:spTree>
-  </p:cSld>
-  <p:clrMapOvr>
-    <a:masterClrMapping/>
-  </p:clrMapOvr>
-</p:sld>
-</file>
-
-<file path=ppt/slides/slide13.xml><?xml version="1.0" encoding="utf-8"?>
-<p:sld xmlns:a="http://schemas.openxmlformats.org/drawingml/2006/main" xmlns:p="http://schemas.openxmlformats.org/presentationml/2006/main" xmlns:r="http://schemas.openxmlformats.org/officeDocument/2006/relationships">
-  <p:cSld>
-    <p:spTree>
-      <p:nvGrpSpPr>
-        <p:cNvPr id="1" name=""/>
-        <p:cNvGrpSpPr/>
-        <p:nvPr/>
-      </p:nvGrpSpPr>
-      <p:grpSpPr/>
-      <p:pic>
-        <p:nvPicPr>
-          <p:cNvPr id="2" name="Picture 1" descr="bg_light.png"/>
-          <p:cNvPicPr>
-            <a:picLocks noChangeAspect="1"/>
-          </p:cNvPicPr>
-          <p:nvPr/>
-        </p:nvPicPr>
-        <p:blipFill>
-          <a:blip r:embed="rId2"/>
-          <a:stretch>
-            <a:fillRect/>
-          </a:stretch>
-        </p:blipFill>
-        <p:spPr>
-          <a:xfrm>
-            <a:off x="0" y="0"/>
-            <a:ext cx="12191695" cy="6858000"/>
-          </a:xfrm>
-          <a:prstGeom prst="rect">
-            <a:avLst/>
-          </a:prstGeom>
-        </p:spPr>
-      </p:pic>
-      <p:sp>
-        <p:nvSpPr>
-          <p:cNvPr id="3" name="Rectangle 2"/>
-          <p:cNvSpPr/>
-          <p:nvPr/>
-        </p:nvSpPr>
-        <p:spPr>
-          <a:xfrm>
-            <a:off x="566928" y="475488"/>
-            <a:ext cx="146304" cy="603504"/>
-          </a:xfrm>
-          <a:prstGeom prst="rect">
-            <a:avLst/>
-          </a:prstGeom>
-          <a:solidFill>
-            <a:srgbClr val="1EA7DD"/>
-          </a:solidFill>
-          <a:ln>
-            <a:noFill/>
-          </a:ln>
-          <a:effectLst/>
-        </p:spPr>
-        <p:style>
-          <a:lnRef idx="1">
-            <a:schemeClr val="accent1"/>
-          </a:lnRef>
-          <a:fillRef idx="3">
-            <a:schemeClr val="accent1"/>
-          </a:fillRef>
-          <a:effectRef idx="2">
-            <a:schemeClr val="accent1"/>
-          </a:effectRef>
-          <a:fontRef idx="minor">
-            <a:schemeClr val="lt1"/>
-          </a:fontRef>
-        </p:style>
-        <p:txBody>
-          <a:bodyPr rtlCol="0" anchor="ctr"/>
-          <a:lstStyle/>
-          <a:p>
-            <a:pPr algn="ctr"/>
-          </a:p>
-        </p:txBody>
-      </p:sp>
-      <p:sp>
-        <p:nvSpPr>
-          <p:cNvPr id="4" name="TextBox 3"/>
-          <p:cNvSpPr txBox="1"/>
-          <p:nvPr/>
-        </p:nvSpPr>
-        <p:spPr>
-          <a:xfrm>
-            <a:off x="841248" y="420624"/>
-            <a:ext cx="10058400" cy="292608"/>
-          </a:xfrm>
-          <a:prstGeom prst="rect">
-            <a:avLst/>
-          </a:prstGeom>
-          <a:noFill/>
-        </p:spPr>
-        <p:txBody>
-          <a:bodyPr wrap="square" anchor="t" lIns="0" rIns="0" tIns="0" bIns="0">
-            <a:spAutoFit/>
-          </a:bodyPr>
-          <a:lstStyle/>
-          <a:p>
-            <a:pPr algn="l">
-              <a:lnSpc>
-                <a:spcPct val="105000"/>
-              </a:lnSpc>
-              <a:spcBef>
-                <a:spcPts val="0"/>
-              </a:spcBef>
-              <a:spcAft>
-                <a:spcPts val="0"/>
-              </a:spcAft>
-            </a:pPr>
-            <a:r>
-              <a:rPr sz="1100" b="1">
-                <a:solidFill>
-                  <a:srgbClr val="1EA7DD"/>
-                </a:solidFill>
-                <a:latin typeface="Segoe UI Semibold"/>
-              </a:rPr>
-              <a:t>PENUTUP</a:t>
-            </a:r>
-          </a:p>
-        </p:txBody>
-      </p:sp>
-      <p:sp>
-        <p:nvSpPr>
-          <p:cNvPr id="5" name="TextBox 4"/>
-          <p:cNvSpPr txBox="1"/>
-          <p:nvPr/>
-        </p:nvSpPr>
-        <p:spPr>
-          <a:xfrm>
-            <a:off x="822960" y="640080"/>
-            <a:ext cx="10607040" cy="566928"/>
-          </a:xfrm>
-          <a:prstGeom prst="rect">
-            <a:avLst/>
-          </a:prstGeom>
-          <a:noFill/>
-        </p:spPr>
-        <p:txBody>
-          <a:bodyPr wrap="square" anchor="t" lIns="0" rIns="0" tIns="0" bIns="0">
-            <a:spAutoFit/>
-          </a:bodyPr>
-          <a:lstStyle/>
-          <a:p>
-            <a:pPr algn="l">
-              <a:lnSpc>
-                <a:spcPct val="105000"/>
-              </a:lnSpc>
-              <a:spcBef>
-                <a:spcPts val="0"/>
-              </a:spcBef>
-              <a:spcAft>
-                <a:spcPts val="0"/>
-              </a:spcAft>
-            </a:pPr>
-            <a:r>
-              <a:rPr sz="2600" b="1">
-                <a:solidFill>
-                  <a:srgbClr val="123047"/>
-                </a:solidFill>
-                <a:latin typeface="Segoe UI Black"/>
-              </a:rPr>
-              <a:t>KESIMPULAN</a:t>
-            </a:r>
-          </a:p>
-        </p:txBody>
-      </p:sp>
-      <p:sp>
-        <p:nvSpPr>
-          <p:cNvPr id="6" name="TextBox 5"/>
-          <p:cNvSpPr txBox="1"/>
-          <p:nvPr/>
-        </p:nvSpPr>
-        <p:spPr>
-          <a:xfrm>
-            <a:off x="566928" y="6373368"/>
-            <a:ext cx="6400800" cy="292608"/>
-          </a:xfrm>
-          <a:prstGeom prst="rect">
-            <a:avLst/>
-          </a:prstGeom>
-          <a:noFill/>
-        </p:spPr>
-        <p:txBody>
-          <a:bodyPr wrap="square" anchor="t" lIns="0" rIns="0" tIns="0" bIns="0">
-            <a:spAutoFit/>
-          </a:bodyPr>
-          <a:lstStyle/>
-          <a:p>
-            <a:pPr algn="l">
-              <a:lnSpc>
-                <a:spcPct val="105000"/>
-              </a:lnSpc>
-              <a:spcBef>
-                <a:spcPts val="0"/>
-              </a:spcBef>
-              <a:spcAft>
-                <a:spcPts val="0"/>
-              </a:spcAft>
-            </a:pPr>
-            <a:r>
-              <a:rPr sz="950" b="0">
-                <a:solidFill>
-                  <a:srgbClr val="8A98A0"/>
-                </a:solidFill>
-                <a:latin typeface="Segoe UI"/>
-              </a:rPr>
-              <a:t>final project sti · kelompok 5</a:t>
-            </a:r>
-          </a:p>
-        </p:txBody>
-      </p:sp>
-      <p:sp>
-        <p:nvSpPr>
-          <p:cNvPr id="7" name="TextBox 6"/>
-          <p:cNvSpPr txBox="1"/>
-          <p:nvPr/>
-        </p:nvSpPr>
-        <p:spPr>
-          <a:xfrm>
-            <a:off x="10972800" y="6355080"/>
-            <a:ext cx="822960" cy="320040"/>
-          </a:xfrm>
-          <a:prstGeom prst="rect">
-            <a:avLst/>
-          </a:prstGeom>
-          <a:noFill/>
-        </p:spPr>
-        <p:txBody>
-          <a:bodyPr wrap="square" anchor="t" lIns="0" rIns="0" tIns="0" bIns="0">
-            <a:spAutoFit/>
-          </a:bodyPr>
-          <a:lstStyle/>
-          <a:p>
-            <a:pPr algn="r">
-              <a:lnSpc>
-                <a:spcPct val="105000"/>
-              </a:lnSpc>
-              <a:spcBef>
-                <a:spcPts val="0"/>
-              </a:spcBef>
-              <a:spcAft>
-                <a:spcPts val="0"/>
-              </a:spcAft>
-            </a:pPr>
-            <a:r>
-              <a:rPr sz="1100" b="1">
-                <a:solidFill>
-                  <a:srgbClr val="1EA7DD"/>
-                </a:solidFill>
-                <a:latin typeface="Segoe UI Semibold"/>
-              </a:rPr>
-              <a:t>13</a:t>
-            </a:r>
-          </a:p>
-        </p:txBody>
-      </p:sp>
-      <p:sp>
-        <p:nvSpPr>
-          <p:cNvPr id="8" name="TextBox 7"/>
-          <p:cNvSpPr txBox="1"/>
-          <p:nvPr/>
-        </p:nvSpPr>
-        <p:spPr>
-          <a:xfrm>
-            <a:off x="822960" y="1691640"/>
-            <a:ext cx="10515600" cy="3840480"/>
-          </a:xfrm>
-          <a:prstGeom prst="rect">
-            <a:avLst/>
-          </a:prstGeom>
-          <a:noFill/>
-        </p:spPr>
-        <p:txBody>
-          <a:bodyPr wrap="square" lIns="0" rIns="0" tIns="0" bIns="0">
-            <a:spAutoFit/>
-          </a:bodyPr>
-          <a:lstStyle/>
-          <a:p>
-            <a:pPr>
-              <a:lnSpc>
-                <a:spcPct val="118000"/>
-              </a:lnSpc>
-              <a:spcAft>
-                <a:spcPts val="1600"/>
-              </a:spcAft>
-            </a:pPr>
-            <a:r>
-              <a:rPr sz="1250">
-                <a:solidFill>
-                  <a:srgbClr val="1EA7DD"/>
-                </a:solidFill>
-                <a:latin typeface="Segoe UI"/>
-              </a:rPr>
-              <a:t>▪  </a:t>
-            </a:r>
-            <a:r>
-              <a:rPr sz="1450">
-                <a:solidFill>
-                  <a:srgbClr val="1E2C33"/>
-                </a:solidFill>
-                <a:latin typeface="Segoe UI"/>
-              </a:rPr>
-              <a:t>Pendekatan CRISP-DM berhasil mengubah dua dataset mentah menjadi dashboard pemantauan yang menjawab pertanyaan bisnis nyata.</a:t>
-            </a:r>
-          </a:p>
-          <a:p>
-            <a:pPr>
-              <a:lnSpc>
-                <a:spcPct val="118000"/>
-              </a:lnSpc>
-              <a:spcAft>
-                <a:spcPts val="1600"/>
-              </a:spcAft>
-            </a:pPr>
-            <a:r>
-              <a:rPr sz="1250">
-                <a:solidFill>
-                  <a:srgbClr val="1EA7DD"/>
-                </a:solidFill>
-                <a:latin typeface="Segoe UI"/>
-              </a:rPr>
-              <a:t>▪  </a:t>
-            </a:r>
-            <a:r>
-              <a:rPr sz="1450">
-                <a:solidFill>
-                  <a:srgbClr val="1E2C33"/>
-                </a:solidFill>
-                <a:latin typeface="Segoe UI"/>
-              </a:rPr>
-              <a:t>Inventory CGS-1: ketersediaan aset tergolong baik (~94% aktif), tetapi gap data kalibrasi perlu segera ditindaklanjuti demi keselamatan dan kepatuhan.</a:t>
-            </a:r>
-          </a:p>
-          <a:p>
-            <a:pPr>
-              <a:lnSpc>
-                <a:spcPct val="118000"/>
-              </a:lnSpc>
-              <a:spcAft>
-                <a:spcPts val="1600"/>
-              </a:spcAft>
-            </a:pPr>
-            <a:r>
-              <a:rPr sz="1250">
-                <a:solidFill>
-                  <a:srgbClr val="1EA7DD"/>
-                </a:solidFill>
-                <a:latin typeface="Segoe UI"/>
-              </a:rPr>
-              <a:t>▪  </a:t>
-            </a:r>
-            <a:r>
-              <a:rPr sz="1450">
-                <a:solidFill>
-                  <a:srgbClr val="1E2C33"/>
-                </a:solidFill>
-                <a:latin typeface="Segoe UI"/>
-              </a:rPr>
-              <a:t>Penjualan ritel: pertumbuhan kuat (~5×) ditopang kenaikan AOV, sementara strategi diskon perlu dievaluasi karena terindikasi over-discounting.</a:t>
-            </a:r>
-          </a:p>
-          <a:p>
-            <a:pPr>
-              <a:lnSpc>
-                <a:spcPct val="118000"/>
-              </a:lnSpc>
-              <a:spcAft>
-                <a:spcPts val="1600"/>
-              </a:spcAft>
-            </a:pPr>
-            <a:r>
-              <a:rPr sz="1250">
-                <a:solidFill>
-                  <a:srgbClr val="1EA7DD"/>
-                </a:solidFill>
-                <a:latin typeface="Segoe UI"/>
-              </a:rPr>
-              <a:t>▪  </a:t>
-            </a:r>
-            <a:r>
-              <a:rPr sz="1450">
-                <a:solidFill>
-                  <a:srgbClr val="1E2C33"/>
-                </a:solidFill>
-                <a:latin typeface="Segoe UI"/>
-              </a:rPr>
-              <a:t>Manajemen proyek lewat GitHub Projects menjaga pekerjaan kelompok tetap transparan, terbagi rapi, dan terlacak (12 selesai, 2 berjalan, 2 antre).</a:t>
-            </a:r>
-          </a:p>
-          <a:p>
-            <a:pPr>
-              <a:lnSpc>
-                <a:spcPct val="118000"/>
-              </a:lnSpc>
-              <a:spcAft>
-                <a:spcPts val="1600"/>
-              </a:spcAft>
-            </a:pPr>
-            <a:r>
-              <a:rPr sz="1250">
-                <a:solidFill>
-                  <a:srgbClr val="1EA7DD"/>
-                </a:solidFill>
-                <a:latin typeface="Segoe UI"/>
-              </a:rPr>
-              <a:t>▪  </a:t>
-            </a:r>
-            <a:r>
-              <a:rPr sz="1450">
-                <a:solidFill>
-                  <a:srgbClr val="1E2C33"/>
-                </a:solidFill>
-                <a:latin typeface="Segoe UI"/>
-              </a:rPr>
-              <a:t>Langkah berikutnya: membersihkan outlier pada data penjualan dan menuntaskan dashboard Looker Studio untuk inventory.</a:t>
-            </a:r>
-          </a:p>
-        </p:txBody>
-      </p:sp>
-    </p:spTree>
-  </p:cSld>
-  <p:clrMapOvr>
-    <a:masterClrMapping/>
-  </p:clrMapOvr>
-</p:sld>
-</file>
-
-<file path=ppt/slides/slide14.xml><?xml version="1.0" encoding="utf-8"?>
 <p:sld xmlns:a="http://schemas.openxmlformats.org/drawingml/2006/main" xmlns:p="http://schemas.openxmlformats.org/presentationml/2006/main" xmlns:r="http://schemas.openxmlformats.org/officeDocument/2006/relationships">
   <p:cSld>
     <p:spTree>
@@ -7687,7 +4673,7 @@
                 </a:solidFill>
                 <a:latin typeface="Segoe UI"/>
               </a:rPr>
-              <a:t>Konteks dua studi kasus dan pertanyaan bisnis yang ingin dijawab</a:t>
+              <a:t>Konteks studi kasus dan pertanyaan bisnis yang ingin dijawab</a:t>
             </a:r>
           </a:p>
         </p:txBody>
@@ -8139,7 +5125,7 @@
                 </a:solidFill>
                 <a:latin typeface="Segoe UI Semibold"/>
               </a:rPr>
-              <a:t>Studi Kasus 1: Inventory CGS-1</a:t>
+              <a:t>Studi Kasus: Inventory CGS-1</a:t>
             </a:r>
           </a:p>
           <a:p>
@@ -8266,164 +5252,6 @@
         <p:spPr>
           <a:xfrm>
             <a:off x="1920240" y="4828031"/>
-            <a:ext cx="9509760" cy="640080"/>
-          </a:xfrm>
-          <a:prstGeom prst="rect">
-            <a:avLst/>
-          </a:prstGeom>
-          <a:noFill/>
-        </p:spPr>
-        <p:txBody>
-          <a:bodyPr wrap="square" anchor="t" lIns="0" rIns="0" tIns="0" bIns="0">
-            <a:spAutoFit/>
-          </a:bodyPr>
-          <a:lstStyle/>
-          <a:p>
-            <a:pPr algn="l">
-              <a:lnSpc>
-                <a:spcPct val="100000"/>
-              </a:lnSpc>
-              <a:spcBef>
-                <a:spcPts val="0"/>
-              </a:spcBef>
-              <a:spcAft>
-                <a:spcPts val="200"/>
-              </a:spcAft>
-            </a:pPr>
-            <a:r>
-              <a:rPr sz="1650" b="1">
-                <a:solidFill>
-                  <a:srgbClr val="123047"/>
-                </a:solidFill>
-                <a:latin typeface="Segoe UI Semibold"/>
-              </a:rPr>
-              <a:t>Studi Kasus 2: Penjualan Ritel</a:t>
-            </a:r>
-          </a:p>
-          <a:p>
-            <a:pPr algn="l">
-              <a:lnSpc>
-                <a:spcPct val="100000"/>
-              </a:lnSpc>
-              <a:spcBef>
-                <a:spcPts val="0"/>
-              </a:spcBef>
-              <a:spcAft>
-                <a:spcPts val="200"/>
-              </a:spcAft>
-            </a:pPr>
-            <a:r>
-              <a:rPr sz="1200" b="0">
-                <a:solidFill>
-                  <a:srgbClr val="8A98A0"/>
-                </a:solidFill>
-                <a:latin typeface="Segoe UI"/>
-              </a:rPr>
-              <a:t>Tren, pendorong revenue, musiman, dan diskon</a:t>
-            </a:r>
-          </a:p>
-        </p:txBody>
-      </p:sp>
-      <p:sp>
-        <p:nvSpPr>
-          <p:cNvPr id="23" name="Snip Single Corner Rectangle 22"/>
-          <p:cNvSpPr/>
-          <p:nvPr/>
-        </p:nvSpPr>
-        <p:spPr>
-          <a:xfrm>
-            <a:off x="822960" y="5541264"/>
-            <a:ext cx="914400" cy="731520"/>
-          </a:xfrm>
-          <a:prstGeom prst="snip1Rect">
-            <a:avLst>
-              <a:gd name="adj" fmla="val 18000"/>
-            </a:avLst>
-          </a:prstGeom>
-          <a:solidFill>
-            <a:srgbClr val="123047"/>
-          </a:solidFill>
-          <a:ln>
-            <a:noFill/>
-          </a:ln>
-          <a:effectLst/>
-        </p:spPr>
-        <p:style>
-          <a:lnRef idx="1">
-            <a:schemeClr val="accent1"/>
-          </a:lnRef>
-          <a:fillRef idx="3">
-            <a:schemeClr val="accent1"/>
-          </a:fillRef>
-          <a:effectRef idx="2">
-            <a:schemeClr val="accent1"/>
-          </a:effectRef>
-          <a:fontRef idx="minor">
-            <a:schemeClr val="lt1"/>
-          </a:fontRef>
-        </p:style>
-        <p:txBody>
-          <a:bodyPr rtlCol="0" anchor="ctr"/>
-          <a:lstStyle/>
-          <a:p>
-            <a:pPr algn="ctr"/>
-          </a:p>
-        </p:txBody>
-      </p:sp>
-      <p:sp>
-        <p:nvSpPr>
-          <p:cNvPr id="24" name="TextBox 23"/>
-          <p:cNvSpPr txBox="1"/>
-          <p:nvPr/>
-        </p:nvSpPr>
-        <p:spPr>
-          <a:xfrm>
-            <a:off x="822960" y="5559551"/>
-            <a:ext cx="914400" cy="713232"/>
-          </a:xfrm>
-          <a:prstGeom prst="rect">
-            <a:avLst/>
-          </a:prstGeom>
-          <a:noFill/>
-        </p:spPr>
-        <p:txBody>
-          <a:bodyPr wrap="square" anchor="ctr" lIns="0" rIns="0" tIns="0" bIns="0">
-            <a:spAutoFit/>
-          </a:bodyPr>
-          <a:lstStyle/>
-          <a:p>
-            <a:pPr algn="ctr">
-              <a:lnSpc>
-                <a:spcPct val="105000"/>
-              </a:lnSpc>
-              <a:spcBef>
-                <a:spcPts val="0"/>
-              </a:spcBef>
-              <a:spcAft>
-                <a:spcPts val="0"/>
-              </a:spcAft>
-            </a:pPr>
-            <a:r>
-              <a:rPr sz="2200" b="1">
-                <a:solidFill>
-                  <a:srgbClr val="1EA7DD"/>
-                </a:solidFill>
-                <a:latin typeface="Segoe UI Black"/>
-              </a:rPr>
-              <a:t>06</a:t>
-            </a:r>
-          </a:p>
-        </p:txBody>
-      </p:sp>
-      <p:sp>
-        <p:nvSpPr>
-          <p:cNvPr id="25" name="TextBox 24"/>
-          <p:cNvSpPr txBox="1"/>
-          <p:nvPr/>
-        </p:nvSpPr>
-        <p:spPr>
-          <a:xfrm>
-            <a:off x="1920240" y="5632703"/>
             <a:ext cx="9509760" cy="640080"/>
           </a:xfrm>
           <a:prstGeom prst="rect">
@@ -8806,7 +5634,7 @@
                 </a:solidFill>
                 <a:latin typeface="Segoe UI Semibold"/>
               </a:rPr>
-              <a:t>dua studi kasus nyata</a:t>
+              <a:t>studi kasus nyata</a:t>
             </a:r>
             <a:r>
               <a:rPr sz="1400" b="0">
@@ -8829,11 +5657,11 @@
         <p:spPr>
           <a:xfrm>
             <a:off x="822960" y="2286000"/>
-            <a:ext cx="4983480" cy="3749039"/>
+            <a:ext cx="10543032" cy="3749039"/>
           </a:xfrm>
           <a:prstGeom prst="snip1Rect">
             <a:avLst>
-              <a:gd name="adj" fmla="val 7000"/>
+              <a:gd name="adj" fmla="val 4000"/>
             </a:avLst>
           </a:prstGeom>
           <a:solidFill>
@@ -8876,7 +5704,7 @@
         </p:nvSpPr>
         <p:spPr>
           <a:xfrm>
-            <a:off x="1115568" y="2615184"/>
+            <a:off x="1143000" y="2651760"/>
             <a:ext cx="548640" cy="82296"/>
           </a:xfrm>
           <a:prstGeom prst="rect">
@@ -8920,8 +5748,8 @@
         </p:nvSpPr>
         <p:spPr>
           <a:xfrm>
-            <a:off x="1115568" y="2788920"/>
-            <a:ext cx="4389120" cy="274320"/>
+            <a:off x="1143000" y="2834640"/>
+            <a:ext cx="9875520" cy="274320"/>
           </a:xfrm>
           <a:prstGeom prst="rect">
             <a:avLst/>
@@ -8952,7 +5780,7 @@
                 </a:solidFill>
                 <a:latin typeface="Segoe UI Semibold"/>
               </a:rPr>
-              <a:t>STUDI KASUS 1</a:t>
+              <a:t>STUDI KASUS</a:t>
             </a:r>
           </a:p>
         </p:txBody>
@@ -8965,8 +5793,8 @@
         </p:nvSpPr>
         <p:spPr>
           <a:xfrm>
-            <a:off x="1115568" y="3035808"/>
-            <a:ext cx="4389120" cy="640080"/>
+            <a:off x="1143000" y="3090672"/>
+            <a:ext cx="9875520" cy="548640"/>
           </a:xfrm>
           <a:prstGeom prst="rect">
             <a:avLst/>
@@ -8991,7 +5819,7 @@
               </a:spcAft>
             </a:pPr>
             <a:r>
-              <a:rPr sz="1800" b="1">
+              <a:rPr sz="2200" b="1">
                 <a:solidFill>
                   <a:srgbClr val="123047"/>
                 </a:solidFill>
@@ -9010,8 +5838,8 @@
         </p:nvSpPr>
         <p:spPr>
           <a:xfrm>
-            <a:off x="1115568" y="3822191"/>
-            <a:ext cx="4434840" cy="2103120"/>
+            <a:off x="1143000" y="3977639"/>
+            <a:ext cx="9966960" cy="1828800"/>
           </a:xfrm>
           <a:prstGeom prst="rect">
             <a:avLst/>
@@ -9029,11 +5857,11 @@
                 <a:spcPct val="112000"/>
               </a:lnSpc>
               <a:spcAft>
-                <a:spcPts val="900"/>
-              </a:spcAft>
-            </a:pPr>
-            <a:r>
-              <a:rPr sz="1050">
+                <a:spcPts val="1100"/>
+              </a:spcAft>
+            </a:pPr>
+            <a:r>
+              <a:rPr sz="1150">
                 <a:solidFill>
                   <a:srgbClr val="1EA7DD"/>
                 </a:solidFill>
@@ -9042,13 +5870,13 @@
               <a:t>▪  </a:t>
             </a:r>
             <a:r>
-              <a:rPr sz="1250">
+              <a:rPr sz="1350">
                 <a:solidFill>
                   <a:srgbClr val="1E2C33"/>
                 </a:solidFill>
                 <a:latin typeface="Segoe UI"/>
               </a:rPr>
-              <a:t>Memantau kesiapan instrumen lapangan (transmitter, valve, actuator) di Custody Gas Station (CGS-1).</a:t>
+              <a:t>Custody Gas Station (CGS-1) mengoperasikan banyak instrumen lapangan (transmitter, valve, actuator) yang menopang keandalan, keselamatan, dan kepatuhan operasi.</a:t>
             </a:r>
           </a:p>
           <a:p>
@@ -9057,11 +5885,11 @@
                 <a:spcPct val="112000"/>
               </a:lnSpc>
               <a:spcAft>
-                <a:spcPts val="900"/>
-              </a:spcAft>
-            </a:pPr>
-            <a:r>
-              <a:rPr sz="1050">
+                <a:spcPts val="1100"/>
+              </a:spcAft>
+            </a:pPr>
+            <a:r>
+              <a:rPr sz="1150">
                 <a:solidFill>
                   <a:srgbClr val="1EA7DD"/>
                 </a:solidFill>
@@ -9070,13 +5898,13 @@
               <a:t>▪  </a:t>
             </a:r>
             <a:r>
-              <a:rPr sz="1250">
+              <a:rPr sz="1350">
                 <a:solidFill>
                   <a:srgbClr val="1E2C33"/>
                 </a:solidFill>
                 <a:latin typeface="Segoe UI"/>
               </a:rPr>
-              <a:t>Menyoroti status aset, ketergantungan vendor, dan kelengkapan data kalibrasi yang menyangkut keselamatan serta kepatuhan.</a:t>
+              <a:t>Analisis menyoroti status aset, ketergantungan vendor, dan kelengkapan data kalibrasi.</a:t>
             </a:r>
           </a:p>
           <a:p>
@@ -9085,11 +5913,11 @@
                 <a:spcPct val="112000"/>
               </a:lnSpc>
               <a:spcAft>
-                <a:spcPts val="900"/>
-              </a:spcAft>
-            </a:pPr>
-            <a:r>
-              <a:rPr sz="1050">
+                <a:spcPts val="1100"/>
+              </a:spcAft>
+            </a:pPr>
+            <a:r>
+              <a:rPr sz="1150">
                 <a:solidFill>
                   <a:srgbClr val="1EA7DD"/>
                 </a:solidFill>
@@ -9098,302 +5926,13 @@
               <a:t>▪  </a:t>
             </a:r>
             <a:r>
-              <a:rPr sz="1250">
+              <a:rPr sz="1350">
                 <a:solidFill>
                   <a:srgbClr val="1E2C33"/>
                 </a:solidFill>
                 <a:latin typeface="Segoe UI"/>
               </a:rPr>
-              <a:t>Hasil akhir disajikan sebagai dashboard Looker Studio.</a:t>
-            </a:r>
-          </a:p>
-        </p:txBody>
-      </p:sp>
-      <p:sp>
-        <p:nvSpPr>
-          <p:cNvPr id="14" name="Snip Single Corner Rectangle 13"/>
-          <p:cNvSpPr/>
-          <p:nvPr/>
-        </p:nvSpPr>
-        <p:spPr>
-          <a:xfrm>
-            <a:off x="6400800" y="2286000"/>
-            <a:ext cx="4983480" cy="3749039"/>
-          </a:xfrm>
-          <a:prstGeom prst="snip1Rect">
-            <a:avLst>
-              <a:gd name="adj" fmla="val 7000"/>
-            </a:avLst>
-          </a:prstGeom>
-          <a:solidFill>
-            <a:srgbClr val="FFFFFF"/>
-          </a:solidFill>
-          <a:ln w="15875">
-            <a:solidFill>
-              <a:srgbClr val="D9E2E7"/>
-            </a:solidFill>
-          </a:ln>
-          <a:effectLst/>
-        </p:spPr>
-        <p:style>
-          <a:lnRef idx="1">
-            <a:schemeClr val="accent1"/>
-          </a:lnRef>
-          <a:fillRef idx="3">
-            <a:schemeClr val="accent1"/>
-          </a:fillRef>
-          <a:effectRef idx="2">
-            <a:schemeClr val="accent1"/>
-          </a:effectRef>
-          <a:fontRef idx="minor">
-            <a:schemeClr val="lt1"/>
-          </a:fontRef>
-        </p:style>
-        <p:txBody>
-          <a:bodyPr rtlCol="0" anchor="ctr"/>
-          <a:lstStyle/>
-          <a:p>
-            <a:pPr algn="ctr"/>
-          </a:p>
-        </p:txBody>
-      </p:sp>
-      <p:sp>
-        <p:nvSpPr>
-          <p:cNvPr id="15" name="Rectangle 14"/>
-          <p:cNvSpPr/>
-          <p:nvPr/>
-        </p:nvSpPr>
-        <p:spPr>
-          <a:xfrm>
-            <a:off x="6693408" y="2615184"/>
-            <a:ext cx="548640" cy="82296"/>
-          </a:xfrm>
-          <a:prstGeom prst="rect">
-            <a:avLst/>
-          </a:prstGeom>
-          <a:solidFill>
-            <a:srgbClr val="1EA7DD"/>
-          </a:solidFill>
-          <a:ln>
-            <a:noFill/>
-          </a:ln>
-          <a:effectLst/>
-        </p:spPr>
-        <p:style>
-          <a:lnRef idx="1">
-            <a:schemeClr val="accent1"/>
-          </a:lnRef>
-          <a:fillRef idx="3">
-            <a:schemeClr val="accent1"/>
-          </a:fillRef>
-          <a:effectRef idx="2">
-            <a:schemeClr val="accent1"/>
-          </a:effectRef>
-          <a:fontRef idx="minor">
-            <a:schemeClr val="lt1"/>
-          </a:fontRef>
-        </p:style>
-        <p:txBody>
-          <a:bodyPr rtlCol="0" anchor="ctr"/>
-          <a:lstStyle/>
-          <a:p>
-            <a:pPr algn="ctr"/>
-          </a:p>
-        </p:txBody>
-      </p:sp>
-      <p:sp>
-        <p:nvSpPr>
-          <p:cNvPr id="16" name="TextBox 15"/>
-          <p:cNvSpPr txBox="1"/>
-          <p:nvPr/>
-        </p:nvSpPr>
-        <p:spPr>
-          <a:xfrm>
-            <a:off x="6693408" y="2788920"/>
-            <a:ext cx="4389120" cy="274320"/>
-          </a:xfrm>
-          <a:prstGeom prst="rect">
-            <a:avLst/>
-          </a:prstGeom>
-          <a:noFill/>
-        </p:spPr>
-        <p:txBody>
-          <a:bodyPr wrap="square" anchor="t" lIns="0" rIns="0" tIns="0" bIns="0">
-            <a:spAutoFit/>
-          </a:bodyPr>
-          <a:lstStyle/>
-          <a:p>
-            <a:pPr algn="l">
-              <a:lnSpc>
-                <a:spcPct val="105000"/>
-              </a:lnSpc>
-              <a:spcBef>
-                <a:spcPts val="0"/>
-              </a:spcBef>
-              <a:spcAft>
-                <a:spcPts val="0"/>
-              </a:spcAft>
-            </a:pPr>
-            <a:r>
-              <a:rPr sz="1100" b="1">
-                <a:solidFill>
-                  <a:srgbClr val="1EA7DD"/>
-                </a:solidFill>
-                <a:latin typeface="Segoe UI Semibold"/>
-              </a:rPr>
-              <a:t>STUDI KASUS 2</a:t>
-            </a:r>
-          </a:p>
-        </p:txBody>
-      </p:sp>
-      <p:sp>
-        <p:nvSpPr>
-          <p:cNvPr id="17" name="TextBox 16"/>
-          <p:cNvSpPr txBox="1"/>
-          <p:nvPr/>
-        </p:nvSpPr>
-        <p:spPr>
-          <a:xfrm>
-            <a:off x="6693408" y="3035808"/>
-            <a:ext cx="4389120" cy="640080"/>
-          </a:xfrm>
-          <a:prstGeom prst="rect">
-            <a:avLst/>
-          </a:prstGeom>
-          <a:noFill/>
-        </p:spPr>
-        <p:txBody>
-          <a:bodyPr wrap="square" anchor="t" lIns="0" rIns="0" tIns="0" bIns="0">
-            <a:spAutoFit/>
-          </a:bodyPr>
-          <a:lstStyle/>
-          <a:p>
-            <a:pPr algn="l">
-              <a:lnSpc>
-                <a:spcPct val="100000"/>
-              </a:lnSpc>
-              <a:spcBef>
-                <a:spcPts val="0"/>
-              </a:spcBef>
-              <a:spcAft>
-                <a:spcPts val="0"/>
-              </a:spcAft>
-            </a:pPr>
-            <a:r>
-              <a:rPr sz="1800" b="1">
-                <a:solidFill>
-                  <a:srgbClr val="123047"/>
-                </a:solidFill>
-                <a:latin typeface="Segoe UI Black"/>
-              </a:rPr>
-              <a:t>Kinerja Penjualan Ritel Online</a:t>
-            </a:r>
-          </a:p>
-        </p:txBody>
-      </p:sp>
-      <p:sp>
-        <p:nvSpPr>
-          <p:cNvPr id="18" name="TextBox 17"/>
-          <p:cNvSpPr txBox="1"/>
-          <p:nvPr/>
-        </p:nvSpPr>
-        <p:spPr>
-          <a:xfrm>
-            <a:off x="6693408" y="3822191"/>
-            <a:ext cx="4434840" cy="2103120"/>
-          </a:xfrm>
-          <a:prstGeom prst="rect">
-            <a:avLst/>
-          </a:prstGeom>
-          <a:noFill/>
-        </p:spPr>
-        <p:txBody>
-          <a:bodyPr wrap="square" lIns="0" rIns="0" tIns="0" bIns="0">
-            <a:spAutoFit/>
-          </a:bodyPr>
-          <a:lstStyle/>
-          <a:p>
-            <a:pPr>
-              <a:lnSpc>
-                <a:spcPct val="112000"/>
-              </a:lnSpc>
-              <a:spcAft>
-                <a:spcPts val="900"/>
-              </a:spcAft>
-            </a:pPr>
-            <a:r>
-              <a:rPr sz="1050">
-                <a:solidFill>
-                  <a:srgbClr val="1EA7DD"/>
-                </a:solidFill>
-                <a:latin typeface="Segoe UI"/>
-              </a:rPr>
-              <a:t>▪  </a:t>
-            </a:r>
-            <a:r>
-              <a:rPr sz="1250">
-                <a:solidFill>
-                  <a:srgbClr val="1E2C33"/>
-                </a:solidFill>
-                <a:latin typeface="Segoe UI"/>
-              </a:rPr>
-              <a:t>Data penjualan B2C agregat mingguan sepanjang 2022–2026 (sekitar 3,5 tahun).</a:t>
-            </a:r>
-          </a:p>
-          <a:p>
-            <a:pPr>
-              <a:lnSpc>
-                <a:spcPct val="112000"/>
-              </a:lnSpc>
-              <a:spcAft>
-                <a:spcPts val="900"/>
-              </a:spcAft>
-            </a:pPr>
-            <a:r>
-              <a:rPr sz="1050">
-                <a:solidFill>
-                  <a:srgbClr val="1EA7DD"/>
-                </a:solidFill>
-                <a:latin typeface="Segoe UI"/>
-              </a:rPr>
-              <a:t>▪  </a:t>
-            </a:r>
-            <a:r>
-              <a:rPr sz="1250">
-                <a:solidFill>
-                  <a:srgbClr val="1E2C33"/>
-                </a:solidFill>
-                <a:latin typeface="Segoe UI"/>
-              </a:rPr>
-              <a:t>Menelusuri tren pertumbuhan, pendorong revenue, pola musiman, dan efektivitas diskon.</a:t>
-            </a:r>
-          </a:p>
-          <a:p>
-            <a:pPr>
-              <a:lnSpc>
-                <a:spcPct val="112000"/>
-              </a:lnSpc>
-              <a:spcAft>
-                <a:spcPts val="900"/>
-              </a:spcAft>
-            </a:pPr>
-            <a:r>
-              <a:rPr sz="1050">
-                <a:solidFill>
-                  <a:srgbClr val="1EA7DD"/>
-                </a:solidFill>
-                <a:latin typeface="Segoe UI"/>
-              </a:rPr>
-              <a:t>▪  </a:t>
-            </a:r>
-            <a:r>
-              <a:rPr sz="1250">
-                <a:solidFill>
-                  <a:srgbClr val="1E2C33"/>
-                </a:solidFill>
-                <a:latin typeface="Segoe UI"/>
-              </a:rPr>
-              <a:t>Hasil akhir disajikan sebagai dashboard interaktif Plotly.</a:t>
+              <a:t>Hasil akhir disajikan sebagai dashboard pemantauan Looker Studio.</a:t>
             </a:r>
           </a:p>
         </p:txBody>
@@ -9713,7 +6252,7 @@
                 </a:solidFill>
                 <a:latin typeface="Segoe UI"/>
               </a:rPr>
-              <a:t>Kedua studi kasus dikerjakan melalui enam fase CRISP-DM secara berurutan, mulai dari pemahaman bisnis hingga penyajian dashboard.</a:t>
+              <a:t>Studi kasus ini dikerjakan melalui enam fase CRISP-DM secara berurutan, mulai dari pemahaman bisnis hingga penyajian dashboard.</a:t>
             </a:r>
           </a:p>
         </p:txBody>
@@ -11778,7 +8317,7 @@
                 </a:solidFill>
                 <a:latin typeface="Segoe UI"/>
               </a:rPr>
-              <a:t>. Setiap fase CRISP-DM dari kedua studi kasus dipecah menjadi kartu tugas, lalu dilacak perpindahannya dari </a:t>
+              <a:t>. Setiap fase CRISP-DM dipecah menjadi kartu tugas, lalu dilacak perpindahannya dari </a:t>
             </a:r>
             <a:r>
               <a:rPr sz="1400" b="1">
@@ -13544,7 +10083,7 @@
                 </a:solidFill>
                 <a:latin typeface="Segoe UI"/>
               </a:rPr>
-              <a:t>Tiap kartu mewakili satu fase CRISP-DM dari kedua studi kasus, ditambah setup, dokumentasi, dan pengumpulan.</a:t>
+              <a:t>Tiap kartu mewakili satu fase pekerjaan, dari analisis hingga setup, dokumentasi, dan pengumpulan.</a:t>
             </a:r>
           </a:p>
         </p:txBody>
@@ -13833,7 +10372,7 @@
         <p:spPr>
           <a:xfrm>
             <a:off x="822960" y="1600200"/>
-            <a:ext cx="3657600" cy="640080"/>
+            <a:ext cx="4206240" cy="640080"/>
           </a:xfrm>
           <a:prstGeom prst="rect">
             <a:avLst/>
@@ -13879,7 +10418,7 @@
         <p:spPr>
           <a:xfrm>
             <a:off x="987552" y="1600200"/>
-            <a:ext cx="3383280" cy="640080"/>
+            <a:ext cx="3931920" cy="640080"/>
           </a:xfrm>
           <a:prstGeom prst="rect">
             <a:avLst/>
@@ -13923,8 +10462,8 @@
         </p:nvSpPr>
         <p:spPr>
           <a:xfrm>
-            <a:off x="4480560" y="1600200"/>
-            <a:ext cx="3520440" cy="640080"/>
+            <a:off x="5029200" y="1600200"/>
+            <a:ext cx="6336792" cy="640080"/>
           </a:xfrm>
           <a:prstGeom prst="rect">
             <a:avLst/>
@@ -13969,8 +10508,8 @@
         </p:nvSpPr>
         <p:spPr>
           <a:xfrm>
-            <a:off x="4645152" y="1600200"/>
-            <a:ext cx="3246120" cy="640080"/>
+            <a:off x="5193792" y="1600200"/>
+            <a:ext cx="6062472" cy="640080"/>
           </a:xfrm>
           <a:prstGeom prst="rect">
             <a:avLst/>
@@ -14001,7 +10540,7 @@
                 </a:solidFill>
                 <a:latin typeface="Segoe UI Semibold"/>
               </a:rPr>
-              <a:t>Inventory CGS-1</a:t>
+              <a:t>Pekerjaan pada studi kasus Inventory CGS-1</a:t>
             </a:r>
           </a:p>
         </p:txBody>
@@ -14014,99 +10553,8 @@
         </p:nvSpPr>
         <p:spPr>
           <a:xfrm>
-            <a:off x="8001000" y="1600200"/>
-            <a:ext cx="3456432" cy="640080"/>
-          </a:xfrm>
-          <a:prstGeom prst="rect">
-            <a:avLst/>
-          </a:prstGeom>
-          <a:solidFill>
-            <a:srgbClr val="123047"/>
-          </a:solidFill>
-          <a:ln w="9525">
-            <a:solidFill>
-              <a:srgbClr val="D9E2E7"/>
-            </a:solidFill>
-          </a:ln>
-          <a:effectLst/>
-        </p:spPr>
-        <p:style>
-          <a:lnRef idx="1">
-            <a:schemeClr val="accent1"/>
-          </a:lnRef>
-          <a:fillRef idx="3">
-            <a:schemeClr val="accent1"/>
-          </a:fillRef>
-          <a:effectRef idx="2">
-            <a:schemeClr val="accent1"/>
-          </a:effectRef>
-          <a:fontRef idx="minor">
-            <a:schemeClr val="lt1"/>
-          </a:fontRef>
-        </p:style>
-        <p:txBody>
-          <a:bodyPr rtlCol="0" anchor="ctr"/>
-          <a:lstStyle/>
-          <a:p>
-            <a:pPr algn="ctr"/>
-          </a:p>
-        </p:txBody>
-      </p:sp>
-      <p:sp>
-        <p:nvSpPr>
-          <p:cNvPr id="13" name="TextBox 12"/>
-          <p:cNvSpPr txBox="1"/>
-          <p:nvPr/>
-        </p:nvSpPr>
-        <p:spPr>
-          <a:xfrm>
-            <a:off x="8165592" y="1600200"/>
-            <a:ext cx="3182112" cy="640080"/>
-          </a:xfrm>
-          <a:prstGeom prst="rect">
-            <a:avLst/>
-          </a:prstGeom>
-          <a:noFill/>
-        </p:spPr>
-        <p:txBody>
-          <a:bodyPr wrap="square" anchor="ctr" lIns="0" rIns="0" tIns="0" bIns="0">
-            <a:spAutoFit/>
-          </a:bodyPr>
-          <a:lstStyle/>
-          <a:p>
-            <a:pPr algn="l">
-              <a:lnSpc>
-                <a:spcPct val="100000"/>
-              </a:lnSpc>
-              <a:spcBef>
-                <a:spcPts val="0"/>
-              </a:spcBef>
-              <a:spcAft>
-                <a:spcPts val="0"/>
-              </a:spcAft>
-            </a:pPr>
-            <a:r>
-              <a:rPr sz="1300" b="1">
-                <a:solidFill>
-                  <a:srgbClr val="FFFFFF"/>
-                </a:solidFill>
-                <a:latin typeface="Segoe UI Semibold"/>
-              </a:rPr>
-              <a:t>Penjualan Ritel</a:t>
-            </a:r>
-          </a:p>
-        </p:txBody>
-      </p:sp>
-      <p:sp>
-        <p:nvSpPr>
-          <p:cNvPr id="14" name="Rectangle 13"/>
-          <p:cNvSpPr/>
-          <p:nvPr/>
-        </p:nvSpPr>
-        <p:spPr>
-          <a:xfrm>
             <a:off x="822960" y="2240280"/>
-            <a:ext cx="3657600" cy="640080"/>
+            <a:ext cx="4206240" cy="640080"/>
           </a:xfrm>
           <a:prstGeom prst="rect">
             <a:avLst/>
@@ -14145,14 +10593,14 @@
       </p:sp>
       <p:sp>
         <p:nvSpPr>
-          <p:cNvPr id="15" name="TextBox 14"/>
+          <p:cNvPr id="13" name="TextBox 12"/>
           <p:cNvSpPr txBox="1"/>
           <p:nvPr/>
         </p:nvSpPr>
         <p:spPr>
           <a:xfrm>
             <a:off x="987552" y="2240280"/>
-            <a:ext cx="3383280" cy="640080"/>
+            <a:ext cx="3931920" cy="640080"/>
           </a:xfrm>
           <a:prstGeom prst="rect">
             <a:avLst/>
@@ -14177,7 +10625,7 @@
               </a:spcAft>
             </a:pPr>
             <a:r>
-              <a:rPr sz="1200" b="1">
+              <a:rPr sz="1250" b="1">
                 <a:solidFill>
                   <a:srgbClr val="123047"/>
                 </a:solidFill>
@@ -14190,14 +10638,14 @@
       </p:sp>
       <p:sp>
         <p:nvSpPr>
-          <p:cNvPr id="16" name="Rectangle 15"/>
+          <p:cNvPr id="14" name="Rectangle 13"/>
           <p:cNvSpPr/>
           <p:nvPr/>
         </p:nvSpPr>
         <p:spPr>
           <a:xfrm>
-            <a:off x="4480560" y="2240280"/>
-            <a:ext cx="3520440" cy="640080"/>
+            <a:off x="5029200" y="2240280"/>
+            <a:ext cx="6336792" cy="640080"/>
           </a:xfrm>
           <a:prstGeom prst="rect">
             <a:avLst/>
@@ -14236,14 +10684,14 @@
       </p:sp>
       <p:sp>
         <p:nvSpPr>
-          <p:cNvPr id="17" name="TextBox 16"/>
+          <p:cNvPr id="15" name="TextBox 14"/>
           <p:cNvSpPr txBox="1"/>
           <p:nvPr/>
         </p:nvSpPr>
         <p:spPr>
           <a:xfrm>
-            <a:off x="4645152" y="2240280"/>
-            <a:ext cx="3246120" cy="640080"/>
+            <a:off x="5193792" y="2240280"/>
+            <a:ext cx="6062472" cy="640080"/>
           </a:xfrm>
           <a:prstGeom prst="rect">
             <a:avLst/>
@@ -14268,13 +10716,104 @@
               </a:spcAft>
             </a:pPr>
             <a:r>
-              <a:rPr sz="1200" b="0">
+              <a:rPr sz="1250" b="0">
                 <a:solidFill>
                   <a:srgbClr val="1E2C33"/>
                 </a:solidFill>
                 <a:latin typeface="Segoe UI"/>
               </a:rPr>
-              <a:t>Menyusun 3 pertanyaan bisnis</a:t>
+              <a:t>Menyusun 3 pertanyaan bisnis (status, vendor, kalibrasi)</a:t>
+            </a:r>
+          </a:p>
+        </p:txBody>
+      </p:sp>
+      <p:sp>
+        <p:nvSpPr>
+          <p:cNvPr id="16" name="Rectangle 15"/>
+          <p:cNvSpPr/>
+          <p:nvPr/>
+        </p:nvSpPr>
+        <p:spPr>
+          <a:xfrm>
+            <a:off x="822960" y="2880360"/>
+            <a:ext cx="4206240" cy="640080"/>
+          </a:xfrm>
+          <a:prstGeom prst="rect">
+            <a:avLst/>
+          </a:prstGeom>
+          <a:solidFill>
+            <a:srgbClr val="FFFFFF"/>
+          </a:solidFill>
+          <a:ln w="9525">
+            <a:solidFill>
+              <a:srgbClr val="D9E2E7"/>
+            </a:solidFill>
+          </a:ln>
+          <a:effectLst/>
+        </p:spPr>
+        <p:style>
+          <a:lnRef idx="1">
+            <a:schemeClr val="accent1"/>
+          </a:lnRef>
+          <a:fillRef idx="3">
+            <a:schemeClr val="accent1"/>
+          </a:fillRef>
+          <a:effectRef idx="2">
+            <a:schemeClr val="accent1"/>
+          </a:effectRef>
+          <a:fontRef idx="minor">
+            <a:schemeClr val="lt1"/>
+          </a:fontRef>
+        </p:style>
+        <p:txBody>
+          <a:bodyPr rtlCol="0" anchor="ctr"/>
+          <a:lstStyle/>
+          <a:p>
+            <a:pPr algn="ctr"/>
+          </a:p>
+        </p:txBody>
+      </p:sp>
+      <p:sp>
+        <p:nvSpPr>
+          <p:cNvPr id="17" name="TextBox 16"/>
+          <p:cNvSpPr txBox="1"/>
+          <p:nvPr/>
+        </p:nvSpPr>
+        <p:spPr>
+          <a:xfrm>
+            <a:off x="987552" y="2880360"/>
+            <a:ext cx="3931920" cy="640080"/>
+          </a:xfrm>
+          <a:prstGeom prst="rect">
+            <a:avLst/>
+          </a:prstGeom>
+          <a:noFill/>
+        </p:spPr>
+        <p:txBody>
+          <a:bodyPr wrap="square" anchor="ctr" lIns="0" rIns="0" tIns="0" bIns="0">
+            <a:spAutoFit/>
+          </a:bodyPr>
+          <a:lstStyle/>
+          <a:p>
+            <a:pPr algn="l">
+              <a:lnSpc>
+                <a:spcPct val="100000"/>
+              </a:lnSpc>
+              <a:spcBef>
+                <a:spcPts val="0"/>
+              </a:spcBef>
+              <a:spcAft>
+                <a:spcPts val="0"/>
+              </a:spcAft>
+            </a:pPr>
+            <a:r>
+              <a:rPr sz="1250" b="1">
+                <a:solidFill>
+                  <a:srgbClr val="123047"/>
+                </a:solidFill>
+                <a:latin typeface="Segoe UI Semibold"/>
+              </a:rPr>
+              <a:t>Data Understanding</a:t>
             </a:r>
           </a:p>
         </p:txBody>
@@ -14287,8 +10826,99 @@
         </p:nvSpPr>
         <p:spPr>
           <a:xfrm>
-            <a:off x="8001000" y="2240280"/>
-            <a:ext cx="3456432" cy="640080"/>
+            <a:off x="5029200" y="2880360"/>
+            <a:ext cx="6336792" cy="640080"/>
+          </a:xfrm>
+          <a:prstGeom prst="rect">
+            <a:avLst/>
+          </a:prstGeom>
+          <a:solidFill>
+            <a:srgbClr val="FFFFFF"/>
+          </a:solidFill>
+          <a:ln w="9525">
+            <a:solidFill>
+              <a:srgbClr val="D9E2E7"/>
+            </a:solidFill>
+          </a:ln>
+          <a:effectLst/>
+        </p:spPr>
+        <p:style>
+          <a:lnRef idx="1">
+            <a:schemeClr val="accent1"/>
+          </a:lnRef>
+          <a:fillRef idx="3">
+            <a:schemeClr val="accent1"/>
+          </a:fillRef>
+          <a:effectRef idx="2">
+            <a:schemeClr val="accent1"/>
+          </a:effectRef>
+          <a:fontRef idx="minor">
+            <a:schemeClr val="lt1"/>
+          </a:fontRef>
+        </p:style>
+        <p:txBody>
+          <a:bodyPr rtlCol="0" anchor="ctr"/>
+          <a:lstStyle/>
+          <a:p>
+            <a:pPr algn="ctr"/>
+          </a:p>
+        </p:txBody>
+      </p:sp>
+      <p:sp>
+        <p:nvSpPr>
+          <p:cNvPr id="19" name="TextBox 18"/>
+          <p:cNvSpPr txBox="1"/>
+          <p:nvPr/>
+        </p:nvSpPr>
+        <p:spPr>
+          <a:xfrm>
+            <a:off x="5193792" y="2880360"/>
+            <a:ext cx="6062472" cy="640080"/>
+          </a:xfrm>
+          <a:prstGeom prst="rect">
+            <a:avLst/>
+          </a:prstGeom>
+          <a:noFill/>
+        </p:spPr>
+        <p:txBody>
+          <a:bodyPr wrap="square" anchor="ctr" lIns="0" rIns="0" tIns="0" bIns="0">
+            <a:spAutoFit/>
+          </a:bodyPr>
+          <a:lstStyle/>
+          <a:p>
+            <a:pPr algn="l">
+              <a:lnSpc>
+                <a:spcPct val="100000"/>
+              </a:lnSpc>
+              <a:spcBef>
+                <a:spcPts val="0"/>
+              </a:spcBef>
+              <a:spcAft>
+                <a:spcPts val="0"/>
+              </a:spcAft>
+            </a:pPr>
+            <a:r>
+              <a:rPr sz="1250" b="0">
+                <a:solidFill>
+                  <a:srgbClr val="1E2C33"/>
+                </a:solidFill>
+                <a:latin typeface="Segoe UI"/>
+              </a:rPr>
+              <a:t>Memuat data Excel instrumen, memeriksa data hilang</a:t>
+            </a:r>
+          </a:p>
+        </p:txBody>
+      </p:sp>
+      <p:sp>
+        <p:nvSpPr>
+          <p:cNvPr id="20" name="Rectangle 19"/>
+          <p:cNvSpPr/>
+          <p:nvPr/>
+        </p:nvSpPr>
+        <p:spPr>
+          <a:xfrm>
+            <a:off x="822960" y="3520440"/>
+            <a:ext cx="4206240" cy="640080"/>
           </a:xfrm>
           <a:prstGeom prst="rect">
             <a:avLst/>
@@ -14327,14 +10957,14 @@
       </p:sp>
       <p:sp>
         <p:nvSpPr>
-          <p:cNvPr id="19" name="TextBox 18"/>
+          <p:cNvPr id="21" name="TextBox 20"/>
           <p:cNvSpPr txBox="1"/>
           <p:nvPr/>
         </p:nvSpPr>
         <p:spPr>
           <a:xfrm>
-            <a:off x="8165592" y="2240280"/>
-            <a:ext cx="3182112" cy="640080"/>
+            <a:off x="987552" y="3520440"/>
+            <a:ext cx="3931920" cy="640080"/>
           </a:xfrm>
           <a:prstGeom prst="rect">
             <a:avLst/>
@@ -14359,27 +10989,118 @@
               </a:spcAft>
             </a:pPr>
             <a:r>
-              <a:rPr sz="1200" b="0">
+              <a:rPr sz="1250" b="1">
+                <a:solidFill>
+                  <a:srgbClr val="123047"/>
+                </a:solidFill>
+                <a:latin typeface="Segoe UI Semibold"/>
+              </a:rPr>
+              <a:t>Data Preparation</a:t>
+            </a:r>
+          </a:p>
+        </p:txBody>
+      </p:sp>
+      <p:sp>
+        <p:nvSpPr>
+          <p:cNvPr id="22" name="Rectangle 21"/>
+          <p:cNvSpPr/>
+          <p:nvPr/>
+        </p:nvSpPr>
+        <p:spPr>
+          <a:xfrm>
+            <a:off x="5029200" y="3520440"/>
+            <a:ext cx="6336792" cy="640080"/>
+          </a:xfrm>
+          <a:prstGeom prst="rect">
+            <a:avLst/>
+          </a:prstGeom>
+          <a:solidFill>
+            <a:srgbClr val="F3F7F9"/>
+          </a:solidFill>
+          <a:ln w="9525">
+            <a:solidFill>
+              <a:srgbClr val="D9E2E7"/>
+            </a:solidFill>
+          </a:ln>
+          <a:effectLst/>
+        </p:spPr>
+        <p:style>
+          <a:lnRef idx="1">
+            <a:schemeClr val="accent1"/>
+          </a:lnRef>
+          <a:fillRef idx="3">
+            <a:schemeClr val="accent1"/>
+          </a:fillRef>
+          <a:effectRef idx="2">
+            <a:schemeClr val="accent1"/>
+          </a:effectRef>
+          <a:fontRef idx="minor">
+            <a:schemeClr val="lt1"/>
+          </a:fontRef>
+        </p:style>
+        <p:txBody>
+          <a:bodyPr rtlCol="0" anchor="ctr"/>
+          <a:lstStyle/>
+          <a:p>
+            <a:pPr algn="ctr"/>
+          </a:p>
+        </p:txBody>
+      </p:sp>
+      <p:sp>
+        <p:nvSpPr>
+          <p:cNvPr id="23" name="TextBox 22"/>
+          <p:cNvSpPr txBox="1"/>
+          <p:nvPr/>
+        </p:nvSpPr>
+        <p:spPr>
+          <a:xfrm>
+            <a:off x="5193792" y="3520440"/>
+            <a:ext cx="6062472" cy="640080"/>
+          </a:xfrm>
+          <a:prstGeom prst="rect">
+            <a:avLst/>
+          </a:prstGeom>
+          <a:noFill/>
+        </p:spPr>
+        <p:txBody>
+          <a:bodyPr wrap="square" anchor="ctr" lIns="0" rIns="0" tIns="0" bIns="0">
+            <a:spAutoFit/>
+          </a:bodyPr>
+          <a:lstStyle/>
+          <a:p>
+            <a:pPr algn="l">
+              <a:lnSpc>
+                <a:spcPct val="100000"/>
+              </a:lnSpc>
+              <a:spcBef>
+                <a:spcPts val="0"/>
+              </a:spcBef>
+              <a:spcAft>
+                <a:spcPts val="0"/>
+              </a:spcAft>
+            </a:pPr>
+            <a:r>
+              <a:rPr sz="1250" b="0">
                 <a:solidFill>
                   <a:srgbClr val="1E2C33"/>
                 </a:solidFill>
                 <a:latin typeface="Segoe UI"/>
               </a:rPr>
-              <a:t>Menyusun 4 pertanyaan bisnis</a:t>
-            </a:r>
-          </a:p>
-        </p:txBody>
-      </p:sp>
-      <p:sp>
-        <p:nvSpPr>
-          <p:cNvPr id="20" name="Rectangle 19"/>
+              <a:t>Membersihkan data, menandai flag kalibrasi &amp; serial number</a:t>
+            </a:r>
+          </a:p>
+        </p:txBody>
+      </p:sp>
+      <p:sp>
+        <p:nvSpPr>
+          <p:cNvPr id="24" name="Rectangle 23"/>
           <p:cNvSpPr/>
           <p:nvPr/>
         </p:nvSpPr>
         <p:spPr>
           <a:xfrm>
-            <a:off x="822960" y="2880360"/>
-            <a:ext cx="3657600" cy="640080"/>
+            <a:off x="822960" y="4160520"/>
+            <a:ext cx="4206240" cy="640080"/>
           </a:xfrm>
           <a:prstGeom prst="rect">
             <a:avLst/>
@@ -14418,14 +11139,14 @@
       </p:sp>
       <p:sp>
         <p:nvSpPr>
-          <p:cNvPr id="21" name="TextBox 20"/>
+          <p:cNvPr id="25" name="TextBox 24"/>
           <p:cNvSpPr txBox="1"/>
           <p:nvPr/>
         </p:nvSpPr>
         <p:spPr>
           <a:xfrm>
-            <a:off x="987552" y="2880360"/>
-            <a:ext cx="3383280" cy="640080"/>
+            <a:off x="987552" y="4160520"/>
+            <a:ext cx="3931920" cy="640080"/>
           </a:xfrm>
           <a:prstGeom prst="rect">
             <a:avLst/>
@@ -14450,27 +11171,27 @@
               </a:spcAft>
             </a:pPr>
             <a:r>
-              <a:rPr sz="1200" b="1">
+              <a:rPr sz="1250" b="1">
                 <a:solidFill>
                   <a:srgbClr val="123047"/>
                 </a:solidFill>
                 <a:latin typeface="Segoe UI Semibold"/>
               </a:rPr>
-              <a:t>Data Understanding</a:t>
-            </a:r>
-          </a:p>
-        </p:txBody>
-      </p:sp>
-      <p:sp>
-        <p:nvSpPr>
-          <p:cNvPr id="22" name="Rectangle 21"/>
+              <a:t>Modeling / Analisis</a:t>
+            </a:r>
+          </a:p>
+        </p:txBody>
+      </p:sp>
+      <p:sp>
+        <p:nvSpPr>
+          <p:cNvPr id="26" name="Rectangle 25"/>
           <p:cNvSpPr/>
           <p:nvPr/>
         </p:nvSpPr>
         <p:spPr>
           <a:xfrm>
-            <a:off x="4480560" y="2880360"/>
-            <a:ext cx="3520440" cy="640080"/>
+            <a:off x="5029200" y="4160520"/>
+            <a:ext cx="6336792" cy="640080"/>
           </a:xfrm>
           <a:prstGeom prst="rect">
             <a:avLst/>
@@ -14509,14 +11230,14 @@
       </p:sp>
       <p:sp>
         <p:nvSpPr>
-          <p:cNvPr id="23" name="TextBox 22"/>
+          <p:cNvPr id="27" name="TextBox 26"/>
           <p:cNvSpPr txBox="1"/>
           <p:nvPr/>
         </p:nvSpPr>
         <p:spPr>
           <a:xfrm>
-            <a:off x="4645152" y="2880360"/>
-            <a:ext cx="3246120" cy="640080"/>
+            <a:off x="5193792" y="4160520"/>
+            <a:ext cx="6062472" cy="640080"/>
           </a:xfrm>
           <a:prstGeom prst="rect">
             <a:avLst/>
@@ -14541,27 +11262,209 @@
               </a:spcAft>
             </a:pPr>
             <a:r>
-              <a:rPr sz="1200" b="0">
+              <a:rPr sz="1250" b="0">
                 <a:solidFill>
                   <a:srgbClr val="1E2C33"/>
                 </a:solidFill>
                 <a:latin typeface="Segoe UI"/>
               </a:rPr>
-              <a:t>Memuat Excel, memeriksa data hilang</a:t>
-            </a:r>
-          </a:p>
-        </p:txBody>
-      </p:sp>
-      <p:sp>
-        <p:nvSpPr>
-          <p:cNvPr id="24" name="Rectangle 23"/>
+              <a:t>Status aset, ketergantungan vendor, cakupan kalibrasi</a:t>
+            </a:r>
+          </a:p>
+        </p:txBody>
+      </p:sp>
+      <p:sp>
+        <p:nvSpPr>
+          <p:cNvPr id="28" name="Rectangle 27"/>
           <p:cNvSpPr/>
           <p:nvPr/>
         </p:nvSpPr>
         <p:spPr>
           <a:xfrm>
-            <a:off x="8001000" y="2880360"/>
-            <a:ext cx="3456432" cy="640080"/>
+            <a:off x="822960" y="4800600"/>
+            <a:ext cx="4206240" cy="640080"/>
+          </a:xfrm>
+          <a:prstGeom prst="rect">
+            <a:avLst/>
+          </a:prstGeom>
+          <a:solidFill>
+            <a:srgbClr val="F3F7F9"/>
+          </a:solidFill>
+          <a:ln w="9525">
+            <a:solidFill>
+              <a:srgbClr val="D9E2E7"/>
+            </a:solidFill>
+          </a:ln>
+          <a:effectLst/>
+        </p:spPr>
+        <p:style>
+          <a:lnRef idx="1">
+            <a:schemeClr val="accent1"/>
+          </a:lnRef>
+          <a:fillRef idx="3">
+            <a:schemeClr val="accent1"/>
+          </a:fillRef>
+          <a:effectRef idx="2">
+            <a:schemeClr val="accent1"/>
+          </a:effectRef>
+          <a:fontRef idx="minor">
+            <a:schemeClr val="lt1"/>
+          </a:fontRef>
+        </p:style>
+        <p:txBody>
+          <a:bodyPr rtlCol="0" anchor="ctr"/>
+          <a:lstStyle/>
+          <a:p>
+            <a:pPr algn="ctr"/>
+          </a:p>
+        </p:txBody>
+      </p:sp>
+      <p:sp>
+        <p:nvSpPr>
+          <p:cNvPr id="29" name="TextBox 28"/>
+          <p:cNvSpPr txBox="1"/>
+          <p:nvPr/>
+        </p:nvSpPr>
+        <p:spPr>
+          <a:xfrm>
+            <a:off x="987552" y="4800600"/>
+            <a:ext cx="3931920" cy="640080"/>
+          </a:xfrm>
+          <a:prstGeom prst="rect">
+            <a:avLst/>
+          </a:prstGeom>
+          <a:noFill/>
+        </p:spPr>
+        <p:txBody>
+          <a:bodyPr wrap="square" anchor="ctr" lIns="0" rIns="0" tIns="0" bIns="0">
+            <a:spAutoFit/>
+          </a:bodyPr>
+          <a:lstStyle/>
+          <a:p>
+            <a:pPr algn="l">
+              <a:lnSpc>
+                <a:spcPct val="100000"/>
+              </a:lnSpc>
+              <a:spcBef>
+                <a:spcPts val="0"/>
+              </a:spcBef>
+              <a:spcAft>
+                <a:spcPts val="0"/>
+              </a:spcAft>
+            </a:pPr>
+            <a:r>
+              <a:rPr sz="1250" b="1">
+                <a:solidFill>
+                  <a:srgbClr val="123047"/>
+                </a:solidFill>
+                <a:latin typeface="Segoe UI Semibold"/>
+              </a:rPr>
+              <a:t>Evaluation</a:t>
+            </a:r>
+          </a:p>
+        </p:txBody>
+      </p:sp>
+      <p:sp>
+        <p:nvSpPr>
+          <p:cNvPr id="30" name="Rectangle 29"/>
+          <p:cNvSpPr/>
+          <p:nvPr/>
+        </p:nvSpPr>
+        <p:spPr>
+          <a:xfrm>
+            <a:off x="5029200" y="4800600"/>
+            <a:ext cx="6336792" cy="640080"/>
+          </a:xfrm>
+          <a:prstGeom prst="rect">
+            <a:avLst/>
+          </a:prstGeom>
+          <a:solidFill>
+            <a:srgbClr val="F3F7F9"/>
+          </a:solidFill>
+          <a:ln w="9525">
+            <a:solidFill>
+              <a:srgbClr val="D9E2E7"/>
+            </a:solidFill>
+          </a:ln>
+          <a:effectLst/>
+        </p:spPr>
+        <p:style>
+          <a:lnRef idx="1">
+            <a:schemeClr val="accent1"/>
+          </a:lnRef>
+          <a:fillRef idx="3">
+            <a:schemeClr val="accent1"/>
+          </a:fillRef>
+          <a:effectRef idx="2">
+            <a:schemeClr val="accent1"/>
+          </a:effectRef>
+          <a:fontRef idx="minor">
+            <a:schemeClr val="lt1"/>
+          </a:fontRef>
+        </p:style>
+        <p:txBody>
+          <a:bodyPr rtlCol="0" anchor="ctr"/>
+          <a:lstStyle/>
+          <a:p>
+            <a:pPr algn="ctr"/>
+          </a:p>
+        </p:txBody>
+      </p:sp>
+      <p:sp>
+        <p:nvSpPr>
+          <p:cNvPr id="31" name="TextBox 30"/>
+          <p:cNvSpPr txBox="1"/>
+          <p:nvPr/>
+        </p:nvSpPr>
+        <p:spPr>
+          <a:xfrm>
+            <a:off x="5193792" y="4800600"/>
+            <a:ext cx="6062472" cy="640080"/>
+          </a:xfrm>
+          <a:prstGeom prst="rect">
+            <a:avLst/>
+          </a:prstGeom>
+          <a:noFill/>
+        </p:spPr>
+        <p:txBody>
+          <a:bodyPr wrap="square" anchor="ctr" lIns="0" rIns="0" tIns="0" bIns="0">
+            <a:spAutoFit/>
+          </a:bodyPr>
+          <a:lstStyle/>
+          <a:p>
+            <a:pPr algn="l">
+              <a:lnSpc>
+                <a:spcPct val="100000"/>
+              </a:lnSpc>
+              <a:spcBef>
+                <a:spcPts val="0"/>
+              </a:spcBef>
+              <a:spcAft>
+                <a:spcPts val="0"/>
+              </a:spcAft>
+            </a:pPr>
+            <a:r>
+              <a:rPr sz="1250" b="0">
+                <a:solidFill>
+                  <a:srgbClr val="1E2C33"/>
+                </a:solidFill>
+                <a:latin typeface="Segoe UI"/>
+              </a:rPr>
+              <a:t>Gap kalibrasi, watchlist aset prioritas</a:t>
+            </a:r>
+          </a:p>
+        </p:txBody>
+      </p:sp>
+      <p:sp>
+        <p:nvSpPr>
+          <p:cNvPr id="32" name="Rectangle 31"/>
+          <p:cNvSpPr/>
+          <p:nvPr/>
+        </p:nvSpPr>
+        <p:spPr>
+          <a:xfrm>
+            <a:off x="822960" y="5440680"/>
+            <a:ext cx="4206240" cy="640080"/>
           </a:xfrm>
           <a:prstGeom prst="rect">
             <a:avLst/>
@@ -14600,14 +11503,14 @@
       </p:sp>
       <p:sp>
         <p:nvSpPr>
-          <p:cNvPr id="25" name="TextBox 24"/>
+          <p:cNvPr id="33" name="TextBox 32"/>
           <p:cNvSpPr txBox="1"/>
           <p:nvPr/>
         </p:nvSpPr>
         <p:spPr>
           <a:xfrm>
-            <a:off x="8165592" y="2880360"/>
-            <a:ext cx="3182112" cy="640080"/>
+            <a:off x="987552" y="5440680"/>
+            <a:ext cx="3931920" cy="640080"/>
           </a:xfrm>
           <a:prstGeom prst="rect">
             <a:avLst/>
@@ -14632,300 +11535,27 @@
               </a:spcAft>
             </a:pPr>
             <a:r>
-              <a:rPr sz="1200" b="0">
-                <a:solidFill>
-                  <a:srgbClr val="1E2C33"/>
-                </a:solidFill>
-                <a:latin typeface="Segoe UI"/>
-              </a:rPr>
-              <a:t>Memuat data mingguan &amp; kamus data</a:t>
-            </a:r>
-          </a:p>
-        </p:txBody>
-      </p:sp>
-      <p:sp>
-        <p:nvSpPr>
-          <p:cNvPr id="26" name="Rectangle 25"/>
+              <a:rPr sz="1250" b="1">
+                <a:solidFill>
+                  <a:srgbClr val="123047"/>
+                </a:solidFill>
+                <a:latin typeface="Segoe UI Semibold"/>
+              </a:rPr>
+              <a:t>Deployment</a:t>
+            </a:r>
+          </a:p>
+        </p:txBody>
+      </p:sp>
+      <p:sp>
+        <p:nvSpPr>
+          <p:cNvPr id="34" name="Rectangle 33"/>
           <p:cNvSpPr/>
           <p:nvPr/>
         </p:nvSpPr>
         <p:spPr>
           <a:xfrm>
-            <a:off x="822960" y="3520440"/>
-            <a:ext cx="3657600" cy="640080"/>
-          </a:xfrm>
-          <a:prstGeom prst="rect">
-            <a:avLst/>
-          </a:prstGeom>
-          <a:solidFill>
-            <a:srgbClr val="F3F7F9"/>
-          </a:solidFill>
-          <a:ln w="9525">
-            <a:solidFill>
-              <a:srgbClr val="D9E2E7"/>
-            </a:solidFill>
-          </a:ln>
-          <a:effectLst/>
-        </p:spPr>
-        <p:style>
-          <a:lnRef idx="1">
-            <a:schemeClr val="accent1"/>
-          </a:lnRef>
-          <a:fillRef idx="3">
-            <a:schemeClr val="accent1"/>
-          </a:fillRef>
-          <a:effectRef idx="2">
-            <a:schemeClr val="accent1"/>
-          </a:effectRef>
-          <a:fontRef idx="minor">
-            <a:schemeClr val="lt1"/>
-          </a:fontRef>
-        </p:style>
-        <p:txBody>
-          <a:bodyPr rtlCol="0" anchor="ctr"/>
-          <a:lstStyle/>
-          <a:p>
-            <a:pPr algn="ctr"/>
-          </a:p>
-        </p:txBody>
-      </p:sp>
-      <p:sp>
-        <p:nvSpPr>
-          <p:cNvPr id="27" name="TextBox 26"/>
-          <p:cNvSpPr txBox="1"/>
-          <p:nvPr/>
-        </p:nvSpPr>
-        <p:spPr>
-          <a:xfrm>
-            <a:off x="987552" y="3520440"/>
-            <a:ext cx="3383280" cy="640080"/>
-          </a:xfrm>
-          <a:prstGeom prst="rect">
-            <a:avLst/>
-          </a:prstGeom>
-          <a:noFill/>
-        </p:spPr>
-        <p:txBody>
-          <a:bodyPr wrap="square" anchor="ctr" lIns="0" rIns="0" tIns="0" bIns="0">
-            <a:spAutoFit/>
-          </a:bodyPr>
-          <a:lstStyle/>
-          <a:p>
-            <a:pPr algn="l">
-              <a:lnSpc>
-                <a:spcPct val="100000"/>
-              </a:lnSpc>
-              <a:spcBef>
-                <a:spcPts val="0"/>
-              </a:spcBef>
-              <a:spcAft>
-                <a:spcPts val="0"/>
-              </a:spcAft>
-            </a:pPr>
-            <a:r>
-              <a:rPr sz="1200" b="1">
-                <a:solidFill>
-                  <a:srgbClr val="123047"/>
-                </a:solidFill>
-                <a:latin typeface="Segoe UI Semibold"/>
-              </a:rPr>
-              <a:t>Data Preparation</a:t>
-            </a:r>
-          </a:p>
-        </p:txBody>
-      </p:sp>
-      <p:sp>
-        <p:nvSpPr>
-          <p:cNvPr id="28" name="Rectangle 27"/>
-          <p:cNvSpPr/>
-          <p:nvPr/>
-        </p:nvSpPr>
-        <p:spPr>
-          <a:xfrm>
-            <a:off x="4480560" y="3520440"/>
-            <a:ext cx="3520440" cy="640080"/>
-          </a:xfrm>
-          <a:prstGeom prst="rect">
-            <a:avLst/>
-          </a:prstGeom>
-          <a:solidFill>
-            <a:srgbClr val="F3F7F9"/>
-          </a:solidFill>
-          <a:ln w="9525">
-            <a:solidFill>
-              <a:srgbClr val="D9E2E7"/>
-            </a:solidFill>
-          </a:ln>
-          <a:effectLst/>
-        </p:spPr>
-        <p:style>
-          <a:lnRef idx="1">
-            <a:schemeClr val="accent1"/>
-          </a:lnRef>
-          <a:fillRef idx="3">
-            <a:schemeClr val="accent1"/>
-          </a:fillRef>
-          <a:effectRef idx="2">
-            <a:schemeClr val="accent1"/>
-          </a:effectRef>
-          <a:fontRef idx="minor">
-            <a:schemeClr val="lt1"/>
-          </a:fontRef>
-        </p:style>
-        <p:txBody>
-          <a:bodyPr rtlCol="0" anchor="ctr"/>
-          <a:lstStyle/>
-          <a:p>
-            <a:pPr algn="ctr"/>
-          </a:p>
-        </p:txBody>
-      </p:sp>
-      <p:sp>
-        <p:nvSpPr>
-          <p:cNvPr id="29" name="TextBox 28"/>
-          <p:cNvSpPr txBox="1"/>
-          <p:nvPr/>
-        </p:nvSpPr>
-        <p:spPr>
-          <a:xfrm>
-            <a:off x="4645152" y="3520440"/>
-            <a:ext cx="3246120" cy="640080"/>
-          </a:xfrm>
-          <a:prstGeom prst="rect">
-            <a:avLst/>
-          </a:prstGeom>
-          <a:noFill/>
-        </p:spPr>
-        <p:txBody>
-          <a:bodyPr wrap="square" anchor="ctr" lIns="0" rIns="0" tIns="0" bIns="0">
-            <a:spAutoFit/>
-          </a:bodyPr>
-          <a:lstStyle/>
-          <a:p>
-            <a:pPr algn="l">
-              <a:lnSpc>
-                <a:spcPct val="100000"/>
-              </a:lnSpc>
-              <a:spcBef>
-                <a:spcPts val="0"/>
-              </a:spcBef>
-              <a:spcAft>
-                <a:spcPts val="0"/>
-              </a:spcAft>
-            </a:pPr>
-            <a:r>
-              <a:rPr sz="1200" b="0">
-                <a:solidFill>
-                  <a:srgbClr val="1E2C33"/>
-                </a:solidFill>
-                <a:latin typeface="Segoe UI"/>
-              </a:rPr>
-              <a:t>Membersihkan, menandai kalibrasi/serial</a:t>
-            </a:r>
-          </a:p>
-        </p:txBody>
-      </p:sp>
-      <p:sp>
-        <p:nvSpPr>
-          <p:cNvPr id="30" name="Rectangle 29"/>
-          <p:cNvSpPr/>
-          <p:nvPr/>
-        </p:nvSpPr>
-        <p:spPr>
-          <a:xfrm>
-            <a:off x="8001000" y="3520440"/>
-            <a:ext cx="3456432" cy="640080"/>
-          </a:xfrm>
-          <a:prstGeom prst="rect">
-            <a:avLst/>
-          </a:prstGeom>
-          <a:solidFill>
-            <a:srgbClr val="F3F7F9"/>
-          </a:solidFill>
-          <a:ln w="9525">
-            <a:solidFill>
-              <a:srgbClr val="D9E2E7"/>
-            </a:solidFill>
-          </a:ln>
-          <a:effectLst/>
-        </p:spPr>
-        <p:style>
-          <a:lnRef idx="1">
-            <a:schemeClr val="accent1"/>
-          </a:lnRef>
-          <a:fillRef idx="3">
-            <a:schemeClr val="accent1"/>
-          </a:fillRef>
-          <a:effectRef idx="2">
-            <a:schemeClr val="accent1"/>
-          </a:effectRef>
-          <a:fontRef idx="minor">
-            <a:schemeClr val="lt1"/>
-          </a:fontRef>
-        </p:style>
-        <p:txBody>
-          <a:bodyPr rtlCol="0" anchor="ctr"/>
-          <a:lstStyle/>
-          <a:p>
-            <a:pPr algn="ctr"/>
-          </a:p>
-        </p:txBody>
-      </p:sp>
-      <p:sp>
-        <p:nvSpPr>
-          <p:cNvPr id="31" name="TextBox 30"/>
-          <p:cNvSpPr txBox="1"/>
-          <p:nvPr/>
-        </p:nvSpPr>
-        <p:spPr>
-          <a:xfrm>
-            <a:off x="8165592" y="3520440"/>
-            <a:ext cx="3182112" cy="640080"/>
-          </a:xfrm>
-          <a:prstGeom prst="rect">
-            <a:avLst/>
-          </a:prstGeom>
-          <a:noFill/>
-        </p:spPr>
-        <p:txBody>
-          <a:bodyPr wrap="square" anchor="ctr" lIns="0" rIns="0" tIns="0" bIns="0">
-            <a:spAutoFit/>
-          </a:bodyPr>
-          <a:lstStyle/>
-          <a:p>
-            <a:pPr algn="l">
-              <a:lnSpc>
-                <a:spcPct val="100000"/>
-              </a:lnSpc>
-              <a:spcBef>
-                <a:spcPts val="0"/>
-              </a:spcBef>
-              <a:spcAft>
-                <a:spcPts val="0"/>
-              </a:spcAft>
-            </a:pPr>
-            <a:r>
-              <a:rPr sz="1200" b="0">
-                <a:solidFill>
-                  <a:srgbClr val="1E2C33"/>
-                </a:solidFill>
-                <a:latin typeface="Segoe UI"/>
-              </a:rPr>
-              <a:t>Menurunkan KPI: AOV, MA, disc%</a:t>
-            </a:r>
-          </a:p>
-        </p:txBody>
-      </p:sp>
-      <p:sp>
-        <p:nvSpPr>
-          <p:cNvPr id="32" name="Rectangle 31"/>
-          <p:cNvSpPr/>
-          <p:nvPr/>
-        </p:nvSpPr>
-        <p:spPr>
-          <a:xfrm>
-            <a:off x="822960" y="4160520"/>
-            <a:ext cx="3657600" cy="640080"/>
+            <a:off x="5029200" y="5440680"/>
+            <a:ext cx="6336792" cy="640080"/>
           </a:xfrm>
           <a:prstGeom prst="rect">
             <a:avLst/>
@@ -14964,14 +11594,14 @@
       </p:sp>
       <p:sp>
         <p:nvSpPr>
-          <p:cNvPr id="33" name="TextBox 32"/>
+          <p:cNvPr id="35" name="TextBox 34"/>
           <p:cNvSpPr txBox="1"/>
           <p:nvPr/>
         </p:nvSpPr>
         <p:spPr>
           <a:xfrm>
-            <a:off x="987552" y="4160520"/>
-            <a:ext cx="3383280" cy="640080"/>
+            <a:off x="5193792" y="5440680"/>
+            <a:ext cx="6062472" cy="640080"/>
           </a:xfrm>
           <a:prstGeom prst="rect">
             <a:avLst/>
@@ -14996,104 +11626,13 @@
               </a:spcAft>
             </a:pPr>
             <a:r>
-              <a:rPr sz="1200" b="1">
-                <a:solidFill>
-                  <a:srgbClr val="123047"/>
-                </a:solidFill>
-                <a:latin typeface="Segoe UI Semibold"/>
-              </a:rPr>
-              <a:t>Modeling / Analisis</a:t>
-            </a:r>
-          </a:p>
-        </p:txBody>
-      </p:sp>
-      <p:sp>
-        <p:nvSpPr>
-          <p:cNvPr id="34" name="Rectangle 33"/>
-          <p:cNvSpPr/>
-          <p:nvPr/>
-        </p:nvSpPr>
-        <p:spPr>
-          <a:xfrm>
-            <a:off x="4480560" y="4160520"/>
-            <a:ext cx="3520440" cy="640080"/>
-          </a:xfrm>
-          <a:prstGeom prst="rect">
-            <a:avLst/>
-          </a:prstGeom>
-          <a:solidFill>
-            <a:srgbClr val="FFFFFF"/>
-          </a:solidFill>
-          <a:ln w="9525">
-            <a:solidFill>
-              <a:srgbClr val="D9E2E7"/>
-            </a:solidFill>
-          </a:ln>
-          <a:effectLst/>
-        </p:spPr>
-        <p:style>
-          <a:lnRef idx="1">
-            <a:schemeClr val="accent1"/>
-          </a:lnRef>
-          <a:fillRef idx="3">
-            <a:schemeClr val="accent1"/>
-          </a:fillRef>
-          <a:effectRef idx="2">
-            <a:schemeClr val="accent1"/>
-          </a:effectRef>
-          <a:fontRef idx="minor">
-            <a:schemeClr val="lt1"/>
-          </a:fontRef>
-        </p:style>
-        <p:txBody>
-          <a:bodyPr rtlCol="0" anchor="ctr"/>
-          <a:lstStyle/>
-          <a:p>
-            <a:pPr algn="ctr"/>
-          </a:p>
-        </p:txBody>
-      </p:sp>
-      <p:sp>
-        <p:nvSpPr>
-          <p:cNvPr id="35" name="TextBox 34"/>
-          <p:cNvSpPr txBox="1"/>
-          <p:nvPr/>
-        </p:nvSpPr>
-        <p:spPr>
-          <a:xfrm>
-            <a:off x="4645152" y="4160520"/>
-            <a:ext cx="3246120" cy="640080"/>
-          </a:xfrm>
-          <a:prstGeom prst="rect">
-            <a:avLst/>
-          </a:prstGeom>
-          <a:noFill/>
-        </p:spPr>
-        <p:txBody>
-          <a:bodyPr wrap="square" anchor="ctr" lIns="0" rIns="0" tIns="0" bIns="0">
-            <a:spAutoFit/>
-          </a:bodyPr>
-          <a:lstStyle/>
-          <a:p>
-            <a:pPr algn="l">
-              <a:lnSpc>
-                <a:spcPct val="100000"/>
-              </a:lnSpc>
-              <a:spcBef>
-                <a:spcPts val="0"/>
-              </a:spcBef>
-              <a:spcAft>
-                <a:spcPts val="0"/>
-              </a:spcAft>
-            </a:pPr>
-            <a:r>
-              <a:rPr sz="1200" b="0">
+              <a:rPr sz="1250" b="0">
                 <a:solidFill>
                   <a:srgbClr val="1E2C33"/>
                 </a:solidFill>
                 <a:latin typeface="Segoe UI"/>
               </a:rPr>
-              <a:t>Status, vendor, cakupan kalibrasi</a:t>
+              <a:t>Dashboard pemantauan Looker Studio</a:t>
             </a:r>
           </a:p>
         </p:txBody>
@@ -15101,643 +11640,6 @@
       <p:sp>
         <p:nvSpPr>
           <p:cNvPr id="36" name="Rectangle 35"/>
-          <p:cNvSpPr/>
-          <p:nvPr/>
-        </p:nvSpPr>
-        <p:spPr>
-          <a:xfrm>
-            <a:off x="8001000" y="4160520"/>
-            <a:ext cx="3456432" cy="640080"/>
-          </a:xfrm>
-          <a:prstGeom prst="rect">
-            <a:avLst/>
-          </a:prstGeom>
-          <a:solidFill>
-            <a:srgbClr val="FFFFFF"/>
-          </a:solidFill>
-          <a:ln w="9525">
-            <a:solidFill>
-              <a:srgbClr val="D9E2E7"/>
-            </a:solidFill>
-          </a:ln>
-          <a:effectLst/>
-        </p:spPr>
-        <p:style>
-          <a:lnRef idx="1">
-            <a:schemeClr val="accent1"/>
-          </a:lnRef>
-          <a:fillRef idx="3">
-            <a:schemeClr val="accent1"/>
-          </a:fillRef>
-          <a:effectRef idx="2">
-            <a:schemeClr val="accent1"/>
-          </a:effectRef>
-          <a:fontRef idx="minor">
-            <a:schemeClr val="lt1"/>
-          </a:fontRef>
-        </p:style>
-        <p:txBody>
-          <a:bodyPr rtlCol="0" anchor="ctr"/>
-          <a:lstStyle/>
-          <a:p>
-            <a:pPr algn="ctr"/>
-          </a:p>
-        </p:txBody>
-      </p:sp>
-      <p:sp>
-        <p:nvSpPr>
-          <p:cNvPr id="37" name="TextBox 36"/>
-          <p:cNvSpPr txBox="1"/>
-          <p:nvPr/>
-        </p:nvSpPr>
-        <p:spPr>
-          <a:xfrm>
-            <a:off x="8165592" y="4160520"/>
-            <a:ext cx="3182112" cy="640080"/>
-          </a:xfrm>
-          <a:prstGeom prst="rect">
-            <a:avLst/>
-          </a:prstGeom>
-          <a:noFill/>
-        </p:spPr>
-        <p:txBody>
-          <a:bodyPr wrap="square" anchor="ctr" lIns="0" rIns="0" tIns="0" bIns="0">
-            <a:spAutoFit/>
-          </a:bodyPr>
-          <a:lstStyle/>
-          <a:p>
-            <a:pPr algn="l">
-              <a:lnSpc>
-                <a:spcPct val="100000"/>
-              </a:lnSpc>
-              <a:spcBef>
-                <a:spcPts val="0"/>
-              </a:spcBef>
-              <a:spcAft>
-                <a:spcPts val="0"/>
-              </a:spcAft>
-            </a:pPr>
-            <a:r>
-              <a:rPr sz="1200" b="0">
-                <a:solidFill>
-                  <a:srgbClr val="1E2C33"/>
-                </a:solidFill>
-                <a:latin typeface="Segoe UI"/>
-              </a:rPr>
-              <a:t>Tren, musiman, AOV, diskon</a:t>
-            </a:r>
-          </a:p>
-        </p:txBody>
-      </p:sp>
-      <p:sp>
-        <p:nvSpPr>
-          <p:cNvPr id="38" name="Rectangle 37"/>
-          <p:cNvSpPr/>
-          <p:nvPr/>
-        </p:nvSpPr>
-        <p:spPr>
-          <a:xfrm>
-            <a:off x="822960" y="4800600"/>
-            <a:ext cx="3657600" cy="640080"/>
-          </a:xfrm>
-          <a:prstGeom prst="rect">
-            <a:avLst/>
-          </a:prstGeom>
-          <a:solidFill>
-            <a:srgbClr val="F3F7F9"/>
-          </a:solidFill>
-          <a:ln w="9525">
-            <a:solidFill>
-              <a:srgbClr val="D9E2E7"/>
-            </a:solidFill>
-          </a:ln>
-          <a:effectLst/>
-        </p:spPr>
-        <p:style>
-          <a:lnRef idx="1">
-            <a:schemeClr val="accent1"/>
-          </a:lnRef>
-          <a:fillRef idx="3">
-            <a:schemeClr val="accent1"/>
-          </a:fillRef>
-          <a:effectRef idx="2">
-            <a:schemeClr val="accent1"/>
-          </a:effectRef>
-          <a:fontRef idx="minor">
-            <a:schemeClr val="lt1"/>
-          </a:fontRef>
-        </p:style>
-        <p:txBody>
-          <a:bodyPr rtlCol="0" anchor="ctr"/>
-          <a:lstStyle/>
-          <a:p>
-            <a:pPr algn="ctr"/>
-          </a:p>
-        </p:txBody>
-      </p:sp>
-      <p:sp>
-        <p:nvSpPr>
-          <p:cNvPr id="39" name="TextBox 38"/>
-          <p:cNvSpPr txBox="1"/>
-          <p:nvPr/>
-        </p:nvSpPr>
-        <p:spPr>
-          <a:xfrm>
-            <a:off x="987552" y="4800600"/>
-            <a:ext cx="3383280" cy="640080"/>
-          </a:xfrm>
-          <a:prstGeom prst="rect">
-            <a:avLst/>
-          </a:prstGeom>
-          <a:noFill/>
-        </p:spPr>
-        <p:txBody>
-          <a:bodyPr wrap="square" anchor="ctr" lIns="0" rIns="0" tIns="0" bIns="0">
-            <a:spAutoFit/>
-          </a:bodyPr>
-          <a:lstStyle/>
-          <a:p>
-            <a:pPr algn="l">
-              <a:lnSpc>
-                <a:spcPct val="100000"/>
-              </a:lnSpc>
-              <a:spcBef>
-                <a:spcPts val="0"/>
-              </a:spcBef>
-              <a:spcAft>
-                <a:spcPts val="0"/>
-              </a:spcAft>
-            </a:pPr>
-            <a:r>
-              <a:rPr sz="1200" b="1">
-                <a:solidFill>
-                  <a:srgbClr val="123047"/>
-                </a:solidFill>
-                <a:latin typeface="Segoe UI Semibold"/>
-              </a:rPr>
-              <a:t>Evaluation</a:t>
-            </a:r>
-          </a:p>
-        </p:txBody>
-      </p:sp>
-      <p:sp>
-        <p:nvSpPr>
-          <p:cNvPr id="40" name="Rectangle 39"/>
-          <p:cNvSpPr/>
-          <p:nvPr/>
-        </p:nvSpPr>
-        <p:spPr>
-          <a:xfrm>
-            <a:off x="4480560" y="4800600"/>
-            <a:ext cx="3520440" cy="640080"/>
-          </a:xfrm>
-          <a:prstGeom prst="rect">
-            <a:avLst/>
-          </a:prstGeom>
-          <a:solidFill>
-            <a:srgbClr val="F3F7F9"/>
-          </a:solidFill>
-          <a:ln w="9525">
-            <a:solidFill>
-              <a:srgbClr val="D9E2E7"/>
-            </a:solidFill>
-          </a:ln>
-          <a:effectLst/>
-        </p:spPr>
-        <p:style>
-          <a:lnRef idx="1">
-            <a:schemeClr val="accent1"/>
-          </a:lnRef>
-          <a:fillRef idx="3">
-            <a:schemeClr val="accent1"/>
-          </a:fillRef>
-          <a:effectRef idx="2">
-            <a:schemeClr val="accent1"/>
-          </a:effectRef>
-          <a:fontRef idx="minor">
-            <a:schemeClr val="lt1"/>
-          </a:fontRef>
-        </p:style>
-        <p:txBody>
-          <a:bodyPr rtlCol="0" anchor="ctr"/>
-          <a:lstStyle/>
-          <a:p>
-            <a:pPr algn="ctr"/>
-          </a:p>
-        </p:txBody>
-      </p:sp>
-      <p:sp>
-        <p:nvSpPr>
-          <p:cNvPr id="41" name="TextBox 40"/>
-          <p:cNvSpPr txBox="1"/>
-          <p:nvPr/>
-        </p:nvSpPr>
-        <p:spPr>
-          <a:xfrm>
-            <a:off x="4645152" y="4800600"/>
-            <a:ext cx="3246120" cy="640080"/>
-          </a:xfrm>
-          <a:prstGeom prst="rect">
-            <a:avLst/>
-          </a:prstGeom>
-          <a:noFill/>
-        </p:spPr>
-        <p:txBody>
-          <a:bodyPr wrap="square" anchor="ctr" lIns="0" rIns="0" tIns="0" bIns="0">
-            <a:spAutoFit/>
-          </a:bodyPr>
-          <a:lstStyle/>
-          <a:p>
-            <a:pPr algn="l">
-              <a:lnSpc>
-                <a:spcPct val="100000"/>
-              </a:lnSpc>
-              <a:spcBef>
-                <a:spcPts val="0"/>
-              </a:spcBef>
-              <a:spcAft>
-                <a:spcPts val="0"/>
-              </a:spcAft>
-            </a:pPr>
-            <a:r>
-              <a:rPr sz="1200" b="0">
-                <a:solidFill>
-                  <a:srgbClr val="1E2C33"/>
-                </a:solidFill>
-                <a:latin typeface="Segoe UI"/>
-              </a:rPr>
-              <a:t>Gap kalibrasi, watchlist aset</a:t>
-            </a:r>
-          </a:p>
-        </p:txBody>
-      </p:sp>
-      <p:sp>
-        <p:nvSpPr>
-          <p:cNvPr id="42" name="Rectangle 41"/>
-          <p:cNvSpPr/>
-          <p:nvPr/>
-        </p:nvSpPr>
-        <p:spPr>
-          <a:xfrm>
-            <a:off x="8001000" y="4800600"/>
-            <a:ext cx="3456432" cy="640080"/>
-          </a:xfrm>
-          <a:prstGeom prst="rect">
-            <a:avLst/>
-          </a:prstGeom>
-          <a:solidFill>
-            <a:srgbClr val="F3F7F9"/>
-          </a:solidFill>
-          <a:ln w="9525">
-            <a:solidFill>
-              <a:srgbClr val="D9E2E7"/>
-            </a:solidFill>
-          </a:ln>
-          <a:effectLst/>
-        </p:spPr>
-        <p:style>
-          <a:lnRef idx="1">
-            <a:schemeClr val="accent1"/>
-          </a:lnRef>
-          <a:fillRef idx="3">
-            <a:schemeClr val="accent1"/>
-          </a:fillRef>
-          <a:effectRef idx="2">
-            <a:schemeClr val="accent1"/>
-          </a:effectRef>
-          <a:fontRef idx="minor">
-            <a:schemeClr val="lt1"/>
-          </a:fontRef>
-        </p:style>
-        <p:txBody>
-          <a:bodyPr rtlCol="0" anchor="ctr"/>
-          <a:lstStyle/>
-          <a:p>
-            <a:pPr algn="ctr"/>
-          </a:p>
-        </p:txBody>
-      </p:sp>
-      <p:sp>
-        <p:nvSpPr>
-          <p:cNvPr id="43" name="TextBox 42"/>
-          <p:cNvSpPr txBox="1"/>
-          <p:nvPr/>
-        </p:nvSpPr>
-        <p:spPr>
-          <a:xfrm>
-            <a:off x="8165592" y="4800600"/>
-            <a:ext cx="3182112" cy="640080"/>
-          </a:xfrm>
-          <a:prstGeom prst="rect">
-            <a:avLst/>
-          </a:prstGeom>
-          <a:noFill/>
-        </p:spPr>
-        <p:txBody>
-          <a:bodyPr wrap="square" anchor="ctr" lIns="0" rIns="0" tIns="0" bIns="0">
-            <a:spAutoFit/>
-          </a:bodyPr>
-          <a:lstStyle/>
-          <a:p>
-            <a:pPr algn="l">
-              <a:lnSpc>
-                <a:spcPct val="100000"/>
-              </a:lnSpc>
-              <a:spcBef>
-                <a:spcPts val="0"/>
-              </a:spcBef>
-              <a:spcAft>
-                <a:spcPts val="0"/>
-              </a:spcAft>
-            </a:pPr>
-            <a:r>
-              <a:rPr sz="1200" b="0">
-                <a:solidFill>
-                  <a:srgbClr val="1E2C33"/>
-                </a:solidFill>
-                <a:latin typeface="Segoe UI"/>
-              </a:rPr>
-              <a:t>Pertumbuhan, over-discounting</a:t>
-            </a:r>
-          </a:p>
-        </p:txBody>
-      </p:sp>
-      <p:sp>
-        <p:nvSpPr>
-          <p:cNvPr id="44" name="Rectangle 43"/>
-          <p:cNvSpPr/>
-          <p:nvPr/>
-        </p:nvSpPr>
-        <p:spPr>
-          <a:xfrm>
-            <a:off x="822960" y="5440680"/>
-            <a:ext cx="3657600" cy="640080"/>
-          </a:xfrm>
-          <a:prstGeom prst="rect">
-            <a:avLst/>
-          </a:prstGeom>
-          <a:solidFill>
-            <a:srgbClr val="FFFFFF"/>
-          </a:solidFill>
-          <a:ln w="9525">
-            <a:solidFill>
-              <a:srgbClr val="D9E2E7"/>
-            </a:solidFill>
-          </a:ln>
-          <a:effectLst/>
-        </p:spPr>
-        <p:style>
-          <a:lnRef idx="1">
-            <a:schemeClr val="accent1"/>
-          </a:lnRef>
-          <a:fillRef idx="3">
-            <a:schemeClr val="accent1"/>
-          </a:fillRef>
-          <a:effectRef idx="2">
-            <a:schemeClr val="accent1"/>
-          </a:effectRef>
-          <a:fontRef idx="minor">
-            <a:schemeClr val="lt1"/>
-          </a:fontRef>
-        </p:style>
-        <p:txBody>
-          <a:bodyPr rtlCol="0" anchor="ctr"/>
-          <a:lstStyle/>
-          <a:p>
-            <a:pPr algn="ctr"/>
-          </a:p>
-        </p:txBody>
-      </p:sp>
-      <p:sp>
-        <p:nvSpPr>
-          <p:cNvPr id="45" name="TextBox 44"/>
-          <p:cNvSpPr txBox="1"/>
-          <p:nvPr/>
-        </p:nvSpPr>
-        <p:spPr>
-          <a:xfrm>
-            <a:off x="987552" y="5440680"/>
-            <a:ext cx="3383280" cy="640080"/>
-          </a:xfrm>
-          <a:prstGeom prst="rect">
-            <a:avLst/>
-          </a:prstGeom>
-          <a:noFill/>
-        </p:spPr>
-        <p:txBody>
-          <a:bodyPr wrap="square" anchor="ctr" lIns="0" rIns="0" tIns="0" bIns="0">
-            <a:spAutoFit/>
-          </a:bodyPr>
-          <a:lstStyle/>
-          <a:p>
-            <a:pPr algn="l">
-              <a:lnSpc>
-                <a:spcPct val="100000"/>
-              </a:lnSpc>
-              <a:spcBef>
-                <a:spcPts val="0"/>
-              </a:spcBef>
-              <a:spcAft>
-                <a:spcPts val="0"/>
-              </a:spcAft>
-            </a:pPr>
-            <a:r>
-              <a:rPr sz="1200" b="1">
-                <a:solidFill>
-                  <a:srgbClr val="123047"/>
-                </a:solidFill>
-                <a:latin typeface="Segoe UI Semibold"/>
-              </a:rPr>
-              <a:t>Deployment</a:t>
-            </a:r>
-          </a:p>
-        </p:txBody>
-      </p:sp>
-      <p:sp>
-        <p:nvSpPr>
-          <p:cNvPr id="46" name="Rectangle 45"/>
-          <p:cNvSpPr/>
-          <p:nvPr/>
-        </p:nvSpPr>
-        <p:spPr>
-          <a:xfrm>
-            <a:off x="4480560" y="5440680"/>
-            <a:ext cx="3520440" cy="640080"/>
-          </a:xfrm>
-          <a:prstGeom prst="rect">
-            <a:avLst/>
-          </a:prstGeom>
-          <a:solidFill>
-            <a:srgbClr val="FFFFFF"/>
-          </a:solidFill>
-          <a:ln w="9525">
-            <a:solidFill>
-              <a:srgbClr val="D9E2E7"/>
-            </a:solidFill>
-          </a:ln>
-          <a:effectLst/>
-        </p:spPr>
-        <p:style>
-          <a:lnRef idx="1">
-            <a:schemeClr val="accent1"/>
-          </a:lnRef>
-          <a:fillRef idx="3">
-            <a:schemeClr val="accent1"/>
-          </a:fillRef>
-          <a:effectRef idx="2">
-            <a:schemeClr val="accent1"/>
-          </a:effectRef>
-          <a:fontRef idx="minor">
-            <a:schemeClr val="lt1"/>
-          </a:fontRef>
-        </p:style>
-        <p:txBody>
-          <a:bodyPr rtlCol="0" anchor="ctr"/>
-          <a:lstStyle/>
-          <a:p>
-            <a:pPr algn="ctr"/>
-          </a:p>
-        </p:txBody>
-      </p:sp>
-      <p:sp>
-        <p:nvSpPr>
-          <p:cNvPr id="47" name="TextBox 46"/>
-          <p:cNvSpPr txBox="1"/>
-          <p:nvPr/>
-        </p:nvSpPr>
-        <p:spPr>
-          <a:xfrm>
-            <a:off x="4645152" y="5440680"/>
-            <a:ext cx="3246120" cy="640080"/>
-          </a:xfrm>
-          <a:prstGeom prst="rect">
-            <a:avLst/>
-          </a:prstGeom>
-          <a:noFill/>
-        </p:spPr>
-        <p:txBody>
-          <a:bodyPr wrap="square" anchor="ctr" lIns="0" rIns="0" tIns="0" bIns="0">
-            <a:spAutoFit/>
-          </a:bodyPr>
-          <a:lstStyle/>
-          <a:p>
-            <a:pPr algn="l">
-              <a:lnSpc>
-                <a:spcPct val="100000"/>
-              </a:lnSpc>
-              <a:spcBef>
-                <a:spcPts val="0"/>
-              </a:spcBef>
-              <a:spcAft>
-                <a:spcPts val="0"/>
-              </a:spcAft>
-            </a:pPr>
-            <a:r>
-              <a:rPr sz="1200" b="0">
-                <a:solidFill>
-                  <a:srgbClr val="1E2C33"/>
-                </a:solidFill>
-                <a:latin typeface="Segoe UI"/>
-              </a:rPr>
-              <a:t>Dashboard Looker Studio</a:t>
-            </a:r>
-          </a:p>
-        </p:txBody>
-      </p:sp>
-      <p:sp>
-        <p:nvSpPr>
-          <p:cNvPr id="48" name="Rectangle 47"/>
-          <p:cNvSpPr/>
-          <p:nvPr/>
-        </p:nvSpPr>
-        <p:spPr>
-          <a:xfrm>
-            <a:off x="8001000" y="5440680"/>
-            <a:ext cx="3456432" cy="640080"/>
-          </a:xfrm>
-          <a:prstGeom prst="rect">
-            <a:avLst/>
-          </a:prstGeom>
-          <a:solidFill>
-            <a:srgbClr val="FFFFFF"/>
-          </a:solidFill>
-          <a:ln w="9525">
-            <a:solidFill>
-              <a:srgbClr val="D9E2E7"/>
-            </a:solidFill>
-          </a:ln>
-          <a:effectLst/>
-        </p:spPr>
-        <p:style>
-          <a:lnRef idx="1">
-            <a:schemeClr val="accent1"/>
-          </a:lnRef>
-          <a:fillRef idx="3">
-            <a:schemeClr val="accent1"/>
-          </a:fillRef>
-          <a:effectRef idx="2">
-            <a:schemeClr val="accent1"/>
-          </a:effectRef>
-          <a:fontRef idx="minor">
-            <a:schemeClr val="lt1"/>
-          </a:fontRef>
-        </p:style>
-        <p:txBody>
-          <a:bodyPr rtlCol="0" anchor="ctr"/>
-          <a:lstStyle/>
-          <a:p>
-            <a:pPr algn="ctr"/>
-          </a:p>
-        </p:txBody>
-      </p:sp>
-      <p:sp>
-        <p:nvSpPr>
-          <p:cNvPr id="49" name="TextBox 48"/>
-          <p:cNvSpPr txBox="1"/>
-          <p:nvPr/>
-        </p:nvSpPr>
-        <p:spPr>
-          <a:xfrm>
-            <a:off x="8165592" y="5440680"/>
-            <a:ext cx="3182112" cy="640080"/>
-          </a:xfrm>
-          <a:prstGeom prst="rect">
-            <a:avLst/>
-          </a:prstGeom>
-          <a:noFill/>
-        </p:spPr>
-        <p:txBody>
-          <a:bodyPr wrap="square" anchor="ctr" lIns="0" rIns="0" tIns="0" bIns="0">
-            <a:spAutoFit/>
-          </a:bodyPr>
-          <a:lstStyle/>
-          <a:p>
-            <a:pPr algn="l">
-              <a:lnSpc>
-                <a:spcPct val="100000"/>
-              </a:lnSpc>
-              <a:spcBef>
-                <a:spcPts val="0"/>
-              </a:spcBef>
-              <a:spcAft>
-                <a:spcPts val="0"/>
-              </a:spcAft>
-            </a:pPr>
-            <a:r>
-              <a:rPr sz="1200" b="0">
-                <a:solidFill>
-                  <a:srgbClr val="1E2C33"/>
-                </a:solidFill>
-                <a:latin typeface="Segoe UI"/>
-              </a:rPr>
-              <a:t>Dashboard Plotly interaktif</a:t>
-            </a:r>
-          </a:p>
-        </p:txBody>
-      </p:sp>
-      <p:sp>
-        <p:nvSpPr>
-          <p:cNvPr id="50" name="Rectangle 49"/>
           <p:cNvSpPr/>
           <p:nvPr/>
         </p:nvSpPr>
@@ -15905,7 +11807,7 @@
                 </a:solidFill>
                 <a:latin typeface="Segoe UI Semibold"/>
               </a:rPr>
-              <a:t>STUDI KASUS 1 · INVENTORY CGS-1</a:t>
+              <a:t>STUDI KASUS · INVENTORY CGS-1</a:t>
             </a:r>
           </a:p>
         </p:txBody>
@@ -16708,7 +12610,7 @@
                 </a:solidFill>
                 <a:latin typeface="Segoe UI Semibold"/>
               </a:rPr>
-              <a:t>STUDI KASUS 1 · INVENTORY CGS-1</a:t>
+              <a:t>STUDI KASUS · INVENTORY CGS-1</a:t>
             </a:r>
           </a:p>
         </p:txBody>
